--- a/docs/company-profile/STUDIO-HOLYMOLLY_Profile_2026.pptx
+++ b/docs/company-profile/STUDIO-HOLYMOLLY_Profile_2026.pptx
@@ -19,7 +19,6 @@
     <p:sldId id="267" r:id="rId18"/>
     <p:sldId id="268" r:id="rId19"/>
     <p:sldId id="269" r:id="rId20"/>
-    <p:sldId id="270" r:id="rId21"/>
   </p:sldIdLst>
   <p:sldSz cx="12191695" cy="6858000" type="screen4x3"/>
   <p:notesSz cx="6858000" cy="9144000"/>
@@ -3140,8 +3139,8 @@
         </p:nvSpPr>
         <p:spPr>
           <a:xfrm>
-            <a:off x="640080" y="502920"/>
-            <a:ext cx="7315200" cy="320040"/>
+            <a:off x="603504" y="310896"/>
+            <a:ext cx="9144000" cy="274320"/>
           </a:xfrm>
           <a:prstGeom prst="rect">
             <a:avLst/>
@@ -3156,7 +3155,7 @@
           <a:p>
             <a:pPr algn="l"/>
             <a:r>
-              <a:rPr sz="1000" b="0" spc="200">
+              <a:rPr sz="900" b="0" spc="220">
                 <a:solidFill>
                   <a:srgbClr val="6F6F6F"/>
                 </a:solidFill>
@@ -3164,7 +3163,7 @@
                 <a:ea typeface="Noto Sans KR"/>
                 <a:cs typeface="Noto Sans KR"/>
               </a:rPr>
-              <a:t>COMPANY PROFILE — 2026</a:t>
+              <a:t>STUDIO HOLYMOLLY — VISUAL DIRECTION STUDIO</a:t>
             </a:r>
           </a:p>
         </p:txBody>
@@ -3177,8 +3176,8 @@
         </p:nvSpPr>
         <p:spPr>
           <a:xfrm>
-            <a:off x="594360" y="1737360"/>
-            <a:ext cx="10911535" cy="3108960"/>
+            <a:off x="7930591" y="310896"/>
+            <a:ext cx="3657600" cy="274320"/>
           </a:xfrm>
           <a:prstGeom prst="rect">
             <a:avLst/>
@@ -3191,53 +3190,61 @@
           </a:bodyPr>
           <a:lstStyle/>
           <a:p>
-            <a:pPr algn="l">
-              <a:lnSpc>
-                <a:spcPct val="102000"/>
-              </a:lnSpc>
-            </a:pPr>
-            <a:r>
-              <a:rPr sz="9200" b="0" spc="300">
-                <a:solidFill>
-                  <a:srgbClr val="0A0A0A"/>
+            <a:pPr algn="r"/>
+            <a:r>
+              <a:rPr sz="900" b="0" spc="220">
+                <a:solidFill>
+                  <a:srgbClr val="6F6F6F"/>
                 </a:solidFill>
                 <a:latin typeface="Jost"/>
                 <a:ea typeface="Noto Sans KR"/>
                 <a:cs typeface="Noto Sans KR"/>
               </a:rPr>
-              <a:t>STUDIO.</a:t>
-            </a:r>
-          </a:p>
-          <a:p>
-            <a:pPr algn="l">
-              <a:lnSpc>
-                <a:spcPct val="102000"/>
-              </a:lnSpc>
-            </a:pPr>
-            <a:r>
-              <a:rPr sz="9200" b="0" spc="300">
-                <a:solidFill>
-                  <a:srgbClr val="0A0A0A"/>
-                </a:solidFill>
-                <a:latin typeface="Jost"/>
-                <a:ea typeface="Noto Sans KR"/>
-                <a:cs typeface="Noto Sans KR"/>
-              </a:rPr>
-              <a:t>HOLYMOLLY</a:t>
-            </a:r>
-          </a:p>
-        </p:txBody>
-      </p:sp>
-      <p:sp>
-        <p:nvSpPr>
-          <p:cNvPr id="5" name="TextBox 4"/>
+              <a:t>COMPANY PROFILE 2026</a:t>
+            </a:r>
+          </a:p>
+        </p:txBody>
+      </p:sp>
+      <p:sp>
+        <p:nvSpPr>
+          <p:cNvPr id="5" name="Rectangle 4"/>
+          <p:cNvSpPr/>
+          <p:nvPr/>
+        </p:nvSpPr>
+        <p:spPr>
+          <a:xfrm>
+            <a:off x="603504" y="658368"/>
+            <a:ext cx="10984687" cy="12700"/>
+          </a:xfrm>
+          <a:prstGeom prst="rect">
+            <a:avLst/>
+          </a:prstGeom>
+          <a:solidFill>
+            <a:srgbClr val="E5E5E3"/>
+          </a:solidFill>
+          <a:ln>
+            <a:noFill/>
+          </a:ln>
+          <a:effectLst/>
+        </p:spPr>
+        <p:txBody>
+          <a:bodyPr rtlCol="0" anchor="ctr"/>
+          <a:lstStyle/>
+          <a:p>
+            <a:pPr algn="ctr"/>
+          </a:p>
+        </p:txBody>
+      </p:sp>
+      <p:sp>
+        <p:nvSpPr>
+          <p:cNvPr id="6" name="TextBox 5"/>
           <p:cNvSpPr txBox="1"/>
           <p:nvPr/>
         </p:nvSpPr>
         <p:spPr>
           <a:xfrm>
-            <a:off x="640080" y="5303520"/>
-            <a:ext cx="7315200" cy="457200"/>
+            <a:off x="566928" y="1600200"/>
+            <a:ext cx="12252960" cy="3840480"/>
           </a:xfrm>
           <a:prstGeom prst="rect">
             <a:avLst/>
@@ -3250,31 +3257,83 @@
           </a:bodyPr>
           <a:lstStyle/>
           <a:p>
-            <a:pPr algn="l"/>
-            <a:r>
-              <a:rPr sz="1600" b="1">
+            <a:pPr algn="l">
+              <a:lnSpc>
+                <a:spcPct val="98000"/>
+              </a:lnSpc>
+            </a:pPr>
+            <a:r>
+              <a:rPr sz="13000" b="0" spc="150">
                 <a:solidFill>
                   <a:srgbClr val="0A0A0A"/>
                 </a:solidFill>
-                <a:latin typeface="Noto Sans KR"/>
-                <a:ea typeface="Noto Sans KR"/>
-                <a:cs typeface="Noto Sans KR"/>
-              </a:rPr>
-              <a:t>브랜드가 보여지는 모든 장면을 만듭니다.</a:t>
-            </a:r>
-          </a:p>
-        </p:txBody>
-      </p:sp>
-      <p:sp>
-        <p:nvSpPr>
-          <p:cNvPr id="6" name="TextBox 5"/>
+                <a:latin typeface="Jost"/>
+                <a:ea typeface="Noto Sans KR"/>
+                <a:cs typeface="Noto Sans KR"/>
+              </a:rPr>
+              <a:t>STUDIO.</a:t>
+            </a:r>
+          </a:p>
+          <a:p>
+            <a:pPr algn="l">
+              <a:lnSpc>
+                <a:spcPct val="98000"/>
+              </a:lnSpc>
+            </a:pPr>
+            <a:r>
+              <a:rPr sz="13000" b="0" spc="150">
+                <a:solidFill>
+                  <a:srgbClr val="0A0A0A"/>
+                </a:solidFill>
+                <a:latin typeface="Jost"/>
+                <a:ea typeface="Noto Sans KR"/>
+                <a:cs typeface="Noto Sans KR"/>
+              </a:rPr>
+              <a:t>HOLYMOLLY</a:t>
+            </a:r>
+          </a:p>
+        </p:txBody>
+      </p:sp>
+      <p:sp>
+        <p:nvSpPr>
+          <p:cNvPr id="7" name="Rectangle 6"/>
+          <p:cNvSpPr/>
+          <p:nvPr/>
+        </p:nvSpPr>
+        <p:spPr>
+          <a:xfrm>
+            <a:off x="603504" y="5897880"/>
+            <a:ext cx="10984687" cy="12700"/>
+          </a:xfrm>
+          <a:prstGeom prst="rect">
+            <a:avLst/>
+          </a:prstGeom>
+          <a:solidFill>
+            <a:srgbClr val="E5E5E3"/>
+          </a:solidFill>
+          <a:ln>
+            <a:noFill/>
+          </a:ln>
+          <a:effectLst/>
+        </p:spPr>
+        <p:txBody>
+          <a:bodyPr rtlCol="0" anchor="ctr"/>
+          <a:lstStyle/>
+          <a:p>
+            <a:pPr algn="ctr"/>
+          </a:p>
+        </p:txBody>
+      </p:sp>
+      <p:sp>
+        <p:nvSpPr>
+          <p:cNvPr id="8" name="TextBox 7"/>
           <p:cNvSpPr txBox="1"/>
           <p:nvPr/>
         </p:nvSpPr>
         <p:spPr>
           <a:xfrm>
-            <a:off x="640080" y="5897880"/>
-            <a:ext cx="7315200" cy="365760"/>
+            <a:off x="603504" y="6108192"/>
+            <a:ext cx="6400800" cy="457200"/>
           </a:xfrm>
           <a:prstGeom prst="rect">
             <a:avLst/>
@@ -3289,29 +3348,29 @@
           <a:p>
             <a:pPr algn="l"/>
             <a:r>
-              <a:rPr sz="1100" b="0">
-                <a:solidFill>
-                  <a:srgbClr val="6F6F6F"/>
+              <a:rPr sz="1250" b="1">
+                <a:solidFill>
+                  <a:srgbClr val="0A0A0A"/>
                 </a:solidFill>
                 <a:latin typeface="Noto Sans KR"/>
                 <a:ea typeface="Noto Sans KR"/>
                 <a:cs typeface="Noto Sans KR"/>
               </a:rPr>
-              <a:t>스튜디오 홀리몰리 — Visual Direction Studio</a:t>
-            </a:r>
-          </a:p>
-        </p:txBody>
-      </p:sp>
-      <p:sp>
-        <p:nvSpPr>
-          <p:cNvPr id="7" name="TextBox 6"/>
+              <a:t>브랜드가 보여지는 모든 장면을 만듭니다.</a:t>
+            </a:r>
+          </a:p>
+        </p:txBody>
+      </p:sp>
+      <p:sp>
+        <p:nvSpPr>
+          <p:cNvPr id="9" name="TextBox 8"/>
           <p:cNvSpPr txBox="1"/>
           <p:nvPr/>
         </p:nvSpPr>
         <p:spPr>
           <a:xfrm>
-            <a:off x="7894015" y="6400800"/>
-            <a:ext cx="3657600" cy="274320"/>
+            <a:off x="6101791" y="6126480"/>
+            <a:ext cx="5486400" cy="457200"/>
           </a:xfrm>
           <a:prstGeom prst="rect">
             <a:avLst/>
@@ -3326,7 +3385,7 @@
           <a:p>
             <a:pPr algn="r"/>
             <a:r>
-              <a:rPr sz="900" b="0" spc="100">
+              <a:rPr sz="850" b="0" spc="150">
                 <a:solidFill>
                   <a:srgbClr val="A3A3A3"/>
                 </a:solidFill>
@@ -3334,7 +3393,7 @@
                 <a:ea typeface="Noto Sans KR"/>
                 <a:cs typeface="Noto Sans KR"/>
               </a:rPr>
-              <a:t>studioholymolly.myportfolio.com</a:t>
+              <a:t>SEOUL, YEOKSAM — STUDIOHOLYMOLLY.MYPORTFOLIO.COM</a:t>
             </a:r>
           </a:p>
         </p:txBody>
@@ -3395,8 +3454,8 @@
         </p:nvSpPr>
         <p:spPr>
           <a:xfrm>
-            <a:off x="640080" y="502920"/>
-            <a:ext cx="7315200" cy="320040"/>
+            <a:off x="603504" y="310896"/>
+            <a:ext cx="8229600" cy="274320"/>
           </a:xfrm>
           <a:prstGeom prst="rect">
             <a:avLst/>
@@ -3411,7 +3470,7 @@
           <a:p>
             <a:pPr algn="l"/>
             <a:r>
-              <a:rPr sz="1000" b="0" spc="200">
+              <a:rPr sz="900" b="0" spc="220">
                 <a:solidFill>
                   <a:srgbClr val="6F6F6F"/>
                 </a:solidFill>
@@ -3419,112 +3478,21 @@
                 <a:ea typeface="Noto Sans KR"/>
                 <a:cs typeface="Noto Sans KR"/>
               </a:rPr>
-              <a:t>SELECTED WORKS — CASE 03</a:t>
-            </a:r>
-          </a:p>
-        </p:txBody>
-      </p:sp>
-      <p:sp>
-        <p:nvSpPr>
-          <p:cNvPr id="4" name="Rectangle 3"/>
-          <p:cNvSpPr/>
-          <p:nvPr/>
-        </p:nvSpPr>
-        <p:spPr>
-          <a:xfrm>
-            <a:off x="640080" y="1051560"/>
-            <a:ext cx="6858000" cy="4937760"/>
-          </a:xfrm>
-          <a:prstGeom prst="rect">
-            <a:avLst/>
-          </a:prstGeom>
-          <a:solidFill>
-            <a:srgbClr val="F0F0EE"/>
-          </a:solidFill>
-          <a:ln w="9525">
-            <a:solidFill>
-              <a:srgbClr val="E5E5E3"/>
-            </a:solidFill>
-          </a:ln>
-          <a:effectLst/>
-        </p:spPr>
-        <p:txBody>
-          <a:bodyPr rtlCol="0" anchor="ctr"/>
-          <a:lstStyle/>
-          <a:p>
-            <a:pPr algn="ctr"/>
-          </a:p>
-        </p:txBody>
-      </p:sp>
-      <p:sp>
-        <p:nvSpPr>
-          <p:cNvPr id="5" name="TextBox 4"/>
+              <a:t>WHY HOLYMOLLY</a:t>
+            </a:r>
+          </a:p>
+        </p:txBody>
+      </p:sp>
+      <p:sp>
+        <p:nvSpPr>
+          <p:cNvPr id="4" name="TextBox 3"/>
           <p:cNvSpPr txBox="1"/>
           <p:nvPr/>
         </p:nvSpPr>
         <p:spPr>
           <a:xfrm>
-            <a:off x="640080" y="1051560"/>
-            <a:ext cx="6858000" cy="4937760"/>
-          </a:xfrm>
-          <a:prstGeom prst="rect">
-            <a:avLst/>
-          </a:prstGeom>
-          <a:noFill/>
-        </p:spPr>
-        <p:txBody>
-          <a:bodyPr wrap="square" anchor="ctr" lIns="0" rIns="0" tIns="0" bIns="0">
-            <a:spAutoFit/>
-          </a:bodyPr>
-          <a:lstStyle/>
-          <a:p>
-            <a:pPr algn="ctr">
-              <a:spcAft>
-                <a:spcPts val="400"/>
-              </a:spcAft>
-            </a:pPr>
-            <a:r>
-              <a:rPr sz="1000" b="0" spc="250">
-                <a:solidFill>
-                  <a:srgbClr val="A3A3A3"/>
-                </a:solidFill>
-                <a:latin typeface="Jost"/>
-                <a:ea typeface="Noto Sans KR"/>
-                <a:cs typeface="Noto Sans KR"/>
-              </a:rPr>
-              <a:t>IMAGE</a:t>
-            </a:r>
-          </a:p>
-          <a:p>
-            <a:pPr algn="ctr">
-              <a:spcAft>
-                <a:spcPts val="400"/>
-              </a:spcAft>
-            </a:pPr>
-            <a:r>
-              <a:rPr sz="950" b="0">
-                <a:solidFill>
-                  <a:srgbClr val="A3A3A3"/>
-                </a:solidFill>
-                <a:latin typeface="Noto Sans KR"/>
-                <a:ea typeface="Noto Sans KR"/>
-                <a:cs typeface="Noto Sans KR"/>
-              </a:rPr>
-              <a:t>F&amp;B 대표 컷으로 교체</a:t>
-            </a:r>
-          </a:p>
-        </p:txBody>
-      </p:sp>
-      <p:sp>
-        <p:nvSpPr>
-          <p:cNvPr id="6" name="TextBox 5"/>
-          <p:cNvSpPr txBox="1"/>
-          <p:nvPr/>
-        </p:nvSpPr>
-        <p:spPr>
-          <a:xfrm>
-            <a:off x="7863840" y="1188720"/>
-            <a:ext cx="3687775" cy="1097280"/>
+            <a:off x="10490911" y="310896"/>
+            <a:ext cx="1097280" cy="274320"/>
           </a:xfrm>
           <a:prstGeom prst="rect">
             <a:avLst/>
@@ -3537,53 +3505,31 @@
           </a:bodyPr>
           <a:lstStyle/>
           <a:p>
-            <a:pPr algn="l">
-              <a:lnSpc>
-                <a:spcPct val="135000"/>
-              </a:lnSpc>
-            </a:pPr>
-            <a:r>
-              <a:rPr sz="1600" b="1">
-                <a:solidFill>
-                  <a:srgbClr val="0A0A0A"/>
-                </a:solidFill>
-                <a:latin typeface="Noto Sans KR"/>
-                <a:ea typeface="Noto Sans KR"/>
-                <a:cs typeface="Noto Sans KR"/>
-              </a:rPr>
-              <a:t>[클라이언트/브랜드명]</a:t>
-            </a:r>
-          </a:p>
-          <a:p>
-            <a:pPr algn="l">
-              <a:lnSpc>
-                <a:spcPct val="135000"/>
-              </a:lnSpc>
-            </a:pPr>
-            <a:r>
-              <a:rPr sz="1300" b="0">
-                <a:solidFill>
-                  <a:srgbClr val="0A0A0A"/>
-                </a:solidFill>
-                <a:latin typeface="Noto Sans KR"/>
-                <a:ea typeface="Noto Sans KR"/>
-                <a:cs typeface="Noto Sans KR"/>
-              </a:rPr>
-              <a:t>[프로젝트명]</a:t>
-            </a:r>
-          </a:p>
-        </p:txBody>
-      </p:sp>
-      <p:sp>
-        <p:nvSpPr>
-          <p:cNvPr id="7" name="Rectangle 6"/>
+            <a:pPr algn="r"/>
+            <a:r>
+              <a:rPr sz="900" b="0" spc="220">
+                <a:solidFill>
+                  <a:srgbClr val="6F6F6F"/>
+                </a:solidFill>
+                <a:latin typeface="Jost"/>
+                <a:ea typeface="Noto Sans KR"/>
+                <a:cs typeface="Noto Sans KR"/>
+              </a:rPr>
+              <a:t>10</a:t>
+            </a:r>
+          </a:p>
+        </p:txBody>
+      </p:sp>
+      <p:sp>
+        <p:nvSpPr>
+          <p:cNvPr id="5" name="Rectangle 4"/>
           <p:cNvSpPr/>
           <p:nvPr/>
         </p:nvSpPr>
         <p:spPr>
           <a:xfrm>
-            <a:off x="7863840" y="2514600"/>
-            <a:ext cx="3687775" cy="11430"/>
+            <a:off x="603504" y="658368"/>
+            <a:ext cx="10984687" cy="12700"/>
           </a:xfrm>
           <a:prstGeom prst="rect">
             <a:avLst/>
@@ -3606,14 +3552,14 @@
       </p:sp>
       <p:sp>
         <p:nvSpPr>
-          <p:cNvPr id="8" name="TextBox 7"/>
+          <p:cNvPr id="6" name="TextBox 5"/>
           <p:cNvSpPr txBox="1"/>
           <p:nvPr/>
         </p:nvSpPr>
         <p:spPr>
           <a:xfrm>
-            <a:off x="7863840" y="2743200"/>
-            <a:ext cx="3687775" cy="2926080"/>
+            <a:off x="603504" y="1234440"/>
+            <a:ext cx="10058400" cy="822960"/>
           </a:xfrm>
           <a:prstGeom prst="rect">
             <a:avLst/>
@@ -3626,122 +3572,151 @@
           </a:bodyPr>
           <a:lstStyle/>
           <a:p>
-            <a:pPr algn="l">
-              <a:lnSpc>
-                <a:spcPct val="150000"/>
-              </a:lnSpc>
-              <a:spcAft>
-                <a:spcPts val="500"/>
-              </a:spcAft>
-            </a:pPr>
-            <a:r>
-              <a:rPr sz="900" b="0" spc="200">
-                <a:solidFill>
-                  <a:srgbClr val="6F6F6F"/>
-                </a:solidFill>
-                <a:latin typeface="Jost"/>
-                <a:ea typeface="Noto Sans KR"/>
-                <a:cs typeface="Noto Sans KR"/>
-              </a:rPr>
-              <a:t>SCOPE</a:t>
-            </a:r>
-          </a:p>
-          <a:p>
-            <a:pPr algn="l">
-              <a:lnSpc>
-                <a:spcPct val="150000"/>
-              </a:lnSpc>
-              <a:spcAft>
-                <a:spcPts val="500"/>
-              </a:spcAft>
-            </a:pPr>
-            <a:r>
-              <a:rPr sz="1050" b="0">
-                <a:solidFill>
-                  <a:srgbClr val="6F6F6F"/>
+            <a:pPr algn="l"/>
+            <a:r>
+              <a:rPr sz="3400" b="1">
+                <a:solidFill>
+                  <a:srgbClr val="0A0A0A"/>
                 </a:solidFill>
                 <a:latin typeface="Noto Sans KR"/>
                 <a:ea typeface="Noto Sans KR"/>
                 <a:cs typeface="Noto Sans KR"/>
               </a:rPr>
-              <a:t>기획 · 촬영 · 리터칭 (해당 항목만 남기기)</a:t>
-            </a:r>
-          </a:p>
-          <a:p>
-            <a:pPr algn="l">
-              <a:lnSpc>
-                <a:spcPct val="150000"/>
-              </a:lnSpc>
-              <a:spcAft>
-                <a:spcPts val="500"/>
-              </a:spcAft>
-            </a:pPr>
-            <a:r>
-              <a:rPr sz="800" b="0">
-                <a:solidFill>
-                  <a:srgbClr val="6F6F6F"/>
-                </a:solidFill>
-                <a:latin typeface="Jost"/>
-                <a:ea typeface="Noto Sans KR"/>
-                <a:cs typeface="Noto Sans KR"/>
-              </a:rPr>
-              <a:t/>
-            </a:r>
-          </a:p>
-          <a:p>
-            <a:pPr algn="l">
-              <a:lnSpc>
-                <a:spcPct val="150000"/>
-              </a:lnSpc>
-              <a:spcAft>
-                <a:spcPts val="500"/>
-              </a:spcAft>
-            </a:pPr>
-            <a:r>
-              <a:rPr sz="900" b="0" spc="200">
-                <a:solidFill>
-                  <a:srgbClr val="6F6F6F"/>
-                </a:solidFill>
-                <a:latin typeface="Jost"/>
-                <a:ea typeface="Noto Sans KR"/>
-                <a:cs typeface="Noto Sans KR"/>
-              </a:rPr>
-              <a:t>SUMMARY</a:t>
-            </a:r>
-          </a:p>
-          <a:p>
-            <a:pPr algn="l">
-              <a:lnSpc>
-                <a:spcPct val="150000"/>
-              </a:lnSpc>
-              <a:spcAft>
-                <a:spcPts val="500"/>
-              </a:spcAft>
-            </a:pPr>
-            <a:r>
-              <a:rPr sz="1050" b="0">
-                <a:solidFill>
-                  <a:srgbClr val="6F6F6F"/>
-                </a:solidFill>
-                <a:latin typeface="Noto Sans KR"/>
-                <a:ea typeface="Noto Sans KR"/>
-                <a:cs typeface="Noto Sans KR"/>
-              </a:rPr>
-              <a:t>[한 줄 요약 — 무엇을 해결했는지. 예: 신제품 론칭 상세페이지 전체 비주얼]</a:t>
-            </a:r>
-          </a:p>
-        </p:txBody>
-      </p:sp>
-      <p:sp>
-        <p:nvSpPr>
-          <p:cNvPr id="9" name="TextBox 8"/>
+              <a:t>홀리몰리와 찍으면 다른 것</a:t>
+            </a:r>
+          </a:p>
+        </p:txBody>
+      </p:sp>
+      <p:sp>
+        <p:nvSpPr>
+          <p:cNvPr id="7" name="Rectangle 6"/>
+          <p:cNvSpPr/>
+          <p:nvPr/>
+        </p:nvSpPr>
+        <p:spPr>
+          <a:xfrm>
+            <a:off x="603504" y="2514600"/>
+            <a:ext cx="10984687" cy="16510"/>
+          </a:xfrm>
+          <a:prstGeom prst="rect">
+            <a:avLst/>
+          </a:prstGeom>
+          <a:solidFill>
+            <a:srgbClr val="0A0A0A"/>
+          </a:solidFill>
+          <a:ln>
+            <a:noFill/>
+          </a:ln>
+          <a:effectLst/>
+        </p:spPr>
+        <p:txBody>
+          <a:bodyPr rtlCol="0" anchor="ctr"/>
+          <a:lstStyle/>
+          <a:p>
+            <a:pPr algn="ctr"/>
+          </a:p>
+        </p:txBody>
+      </p:sp>
+      <p:sp>
+        <p:nvSpPr>
+          <p:cNvPr id="8" name="Rectangle 7"/>
+          <p:cNvSpPr/>
+          <p:nvPr/>
+        </p:nvSpPr>
+        <p:spPr>
+          <a:xfrm>
+            <a:off x="603504" y="4343400"/>
+            <a:ext cx="10984687" cy="12700"/>
+          </a:xfrm>
+          <a:prstGeom prst="rect">
+            <a:avLst/>
+          </a:prstGeom>
+          <a:solidFill>
+            <a:srgbClr val="E5E5E3"/>
+          </a:solidFill>
+          <a:ln>
+            <a:noFill/>
+          </a:ln>
+          <a:effectLst/>
+        </p:spPr>
+        <p:txBody>
+          <a:bodyPr rtlCol="0" anchor="ctr"/>
+          <a:lstStyle/>
+          <a:p>
+            <a:pPr algn="ctr"/>
+          </a:p>
+        </p:txBody>
+      </p:sp>
+      <p:sp>
+        <p:nvSpPr>
+          <p:cNvPr id="9" name="Rectangle 8"/>
+          <p:cNvSpPr/>
+          <p:nvPr/>
+        </p:nvSpPr>
+        <p:spPr>
+          <a:xfrm>
+            <a:off x="603504" y="6172200"/>
+            <a:ext cx="10984687" cy="12700"/>
+          </a:xfrm>
+          <a:prstGeom prst="rect">
+            <a:avLst/>
+          </a:prstGeom>
+          <a:solidFill>
+            <a:srgbClr val="E5E5E3"/>
+          </a:solidFill>
+          <a:ln>
+            <a:noFill/>
+          </a:ln>
+          <a:effectLst/>
+        </p:spPr>
+        <p:txBody>
+          <a:bodyPr rtlCol="0" anchor="ctr"/>
+          <a:lstStyle/>
+          <a:p>
+            <a:pPr algn="ctr"/>
+          </a:p>
+        </p:txBody>
+      </p:sp>
+      <p:sp>
+        <p:nvSpPr>
+          <p:cNvPr id="10" name="Rectangle 9"/>
+          <p:cNvSpPr/>
+          <p:nvPr/>
+        </p:nvSpPr>
+        <p:spPr>
+          <a:xfrm>
+            <a:off x="6090132" y="2514600"/>
+            <a:ext cx="11430" cy="3657600"/>
+          </a:xfrm>
+          <a:prstGeom prst="rect">
+            <a:avLst/>
+          </a:prstGeom>
+          <a:solidFill>
+            <a:srgbClr val="E5E5E3"/>
+          </a:solidFill>
+          <a:ln>
+            <a:noFill/>
+          </a:ln>
+          <a:effectLst/>
+        </p:spPr>
+        <p:txBody>
+          <a:bodyPr rtlCol="0" anchor="ctr"/>
+          <a:lstStyle/>
+          <a:p>
+            <a:pPr algn="ctr"/>
+          </a:p>
+        </p:txBody>
+      </p:sp>
+      <p:sp>
+        <p:nvSpPr>
+          <p:cNvPr id="11" name="TextBox 10"/>
           <p:cNvSpPr txBox="1"/>
           <p:nvPr/>
         </p:nvSpPr>
         <p:spPr>
           <a:xfrm>
-            <a:off x="640080" y="6473952"/>
-            <a:ext cx="3657600" cy="274320"/>
+            <a:off x="603504" y="2734056"/>
+            <a:ext cx="1463040" cy="1280160"/>
           </a:xfrm>
           <a:prstGeom prst="rect">
             <a:avLst/>
@@ -3756,7 +3731,7 @@
           <a:p>
             <a:pPr algn="l"/>
             <a:r>
-              <a:rPr sz="800" b="0" spc="150">
+              <a:rPr sz="3800" b="0" spc="50">
                 <a:solidFill>
                   <a:srgbClr val="A3A3A3"/>
                 </a:solidFill>
@@ -3764,21 +3739,21 @@
                 <a:ea typeface="Noto Sans KR"/>
                 <a:cs typeface="Noto Sans KR"/>
               </a:rPr>
-              <a:t>STUDIO. HOLYMOLLY</a:t>
-            </a:r>
-          </a:p>
-        </p:txBody>
-      </p:sp>
-      <p:sp>
-        <p:nvSpPr>
-          <p:cNvPr id="10" name="TextBox 9"/>
+              <a:t>01</a:t>
+            </a:r>
+          </a:p>
+        </p:txBody>
+      </p:sp>
+      <p:sp>
+        <p:nvSpPr>
+          <p:cNvPr id="12" name="TextBox 11"/>
           <p:cNvSpPr txBox="1"/>
           <p:nvPr/>
         </p:nvSpPr>
         <p:spPr>
           <a:xfrm>
-            <a:off x="10637215" y="6473952"/>
-            <a:ext cx="914400" cy="274320"/>
+            <a:off x="1837944" y="2807208"/>
+            <a:ext cx="3617824" cy="1371600"/>
           </a:xfrm>
           <a:prstGeom prst="rect">
             <a:avLst/>
@@ -3791,9 +3766,74 @@
           </a:bodyPr>
           <a:lstStyle/>
           <a:p>
-            <a:pPr algn="r"/>
-            <a:r>
-              <a:rPr sz="800" b="0" spc="150">
+            <a:pPr algn="l">
+              <a:lnSpc>
+                <a:spcPct val="145000"/>
+              </a:lnSpc>
+              <a:spcAft>
+                <a:spcPts val="600"/>
+              </a:spcAft>
+            </a:pPr>
+            <a:r>
+              <a:rPr sz="1550" b="1">
+                <a:solidFill>
+                  <a:srgbClr val="0A0A0A"/>
+                </a:solidFill>
+                <a:latin typeface="Noto Sans KR"/>
+                <a:ea typeface="Noto Sans KR"/>
+                <a:cs typeface="Noto Sans KR"/>
+              </a:rPr>
+              <a:t>디렉션이 있는 촬영</a:t>
+            </a:r>
+          </a:p>
+          <a:p>
+            <a:pPr algn="l">
+              <a:lnSpc>
+                <a:spcPct val="145000"/>
+              </a:lnSpc>
+              <a:spcAft>
+                <a:spcPts val="600"/>
+              </a:spcAft>
+            </a:pPr>
+            <a:r>
+              <a:rPr sz="1000" b="0">
+                <a:solidFill>
+                  <a:srgbClr val="6F6F6F"/>
+                </a:solidFill>
+                <a:latin typeface="Noto Sans KR"/>
+                <a:ea typeface="Noto Sans KR"/>
+                <a:cs typeface="Noto Sans KR"/>
+              </a:rPr>
+              <a:t>찍기 전에 설계합니다. 레퍼런스부터 무드보드, 세팅 계획까지 — 촬영은 기획의 마지막 단계입니다.</a:t>
+            </a:r>
+          </a:p>
+        </p:txBody>
+      </p:sp>
+      <p:sp>
+        <p:nvSpPr>
+          <p:cNvPr id="13" name="TextBox 12"/>
+          <p:cNvSpPr txBox="1"/>
+          <p:nvPr/>
+        </p:nvSpPr>
+        <p:spPr>
+          <a:xfrm>
+            <a:off x="6415887" y="2734056"/>
+            <a:ext cx="1463040" cy="1280160"/>
+          </a:xfrm>
+          <a:prstGeom prst="rect">
+            <a:avLst/>
+          </a:prstGeom>
+          <a:noFill/>
+        </p:spPr>
+        <p:txBody>
+          <a:bodyPr wrap="square" anchor="t" lIns="0" rIns="0" tIns="0" bIns="0">
+            <a:spAutoFit/>
+          </a:bodyPr>
+          <a:lstStyle/>
+          <a:p>
+            <a:pPr algn="l"/>
+            <a:r>
+              <a:rPr sz="3800" b="0" spc="50">
                 <a:solidFill>
                   <a:srgbClr val="A3A3A3"/>
                 </a:solidFill>
@@ -3801,7 +3841,276 @@
                 <a:ea typeface="Noto Sans KR"/>
                 <a:cs typeface="Noto Sans KR"/>
               </a:rPr>
-              <a:t>10</a:t>
+              <a:t>02</a:t>
+            </a:r>
+          </a:p>
+        </p:txBody>
+      </p:sp>
+      <p:sp>
+        <p:nvSpPr>
+          <p:cNvPr id="14" name="TextBox 13"/>
+          <p:cNvSpPr txBox="1"/>
+          <p:nvPr/>
+        </p:nvSpPr>
+        <p:spPr>
+          <a:xfrm>
+            <a:off x="7650327" y="2807208"/>
+            <a:ext cx="3617824" cy="1371600"/>
+          </a:xfrm>
+          <a:prstGeom prst="rect">
+            <a:avLst/>
+          </a:prstGeom>
+          <a:noFill/>
+        </p:spPr>
+        <p:txBody>
+          <a:bodyPr wrap="square" anchor="t" lIns="0" rIns="0" tIns="0" bIns="0">
+            <a:spAutoFit/>
+          </a:bodyPr>
+          <a:lstStyle/>
+          <a:p>
+            <a:pPr algn="l">
+              <a:lnSpc>
+                <a:spcPct val="145000"/>
+              </a:lnSpc>
+              <a:spcAft>
+                <a:spcPts val="600"/>
+              </a:spcAft>
+            </a:pPr>
+            <a:r>
+              <a:rPr sz="1550" b="1">
+                <a:solidFill>
+                  <a:srgbClr val="0A0A0A"/>
+                </a:solidFill>
+                <a:latin typeface="Noto Sans KR"/>
+                <a:ea typeface="Noto Sans KR"/>
+                <a:cs typeface="Noto Sans KR"/>
+              </a:rPr>
+              <a:t>질감에 강한 스튜디오</a:t>
+            </a:r>
+          </a:p>
+          <a:p>
+            <a:pPr algn="l">
+              <a:lnSpc>
+                <a:spcPct val="145000"/>
+              </a:lnSpc>
+              <a:spcAft>
+                <a:spcPts val="600"/>
+              </a:spcAft>
+            </a:pPr>
+            <a:r>
+              <a:rPr sz="1000" b="0">
+                <a:solidFill>
+                  <a:srgbClr val="6F6F6F"/>
+                </a:solidFill>
+                <a:latin typeface="Noto Sans KR"/>
+                <a:ea typeface="Noto Sans KR"/>
+                <a:cs typeface="Noto Sans KR"/>
+              </a:rPr>
+              <a:t>뷰티의 제형, F&amp;B의 시즐, 패브릭의 결. 클로즈업에서 무너지지 않는 디테일.</a:t>
+            </a:r>
+          </a:p>
+        </p:txBody>
+      </p:sp>
+      <p:sp>
+        <p:nvSpPr>
+          <p:cNvPr id="15" name="TextBox 14"/>
+          <p:cNvSpPr txBox="1"/>
+          <p:nvPr/>
+        </p:nvSpPr>
+        <p:spPr>
+          <a:xfrm>
+            <a:off x="603504" y="4562856"/>
+            <a:ext cx="1463040" cy="1280160"/>
+          </a:xfrm>
+          <a:prstGeom prst="rect">
+            <a:avLst/>
+          </a:prstGeom>
+          <a:noFill/>
+        </p:spPr>
+        <p:txBody>
+          <a:bodyPr wrap="square" anchor="t" lIns="0" rIns="0" tIns="0" bIns="0">
+            <a:spAutoFit/>
+          </a:bodyPr>
+          <a:lstStyle/>
+          <a:p>
+            <a:pPr algn="l"/>
+            <a:r>
+              <a:rPr sz="3800" b="0" spc="50">
+                <a:solidFill>
+                  <a:srgbClr val="A3A3A3"/>
+                </a:solidFill>
+                <a:latin typeface="Jost"/>
+                <a:ea typeface="Noto Sans KR"/>
+                <a:cs typeface="Noto Sans KR"/>
+              </a:rPr>
+              <a:t>03</a:t>
+            </a:r>
+          </a:p>
+        </p:txBody>
+      </p:sp>
+      <p:sp>
+        <p:nvSpPr>
+          <p:cNvPr id="16" name="TextBox 15"/>
+          <p:cNvSpPr txBox="1"/>
+          <p:nvPr/>
+        </p:nvSpPr>
+        <p:spPr>
+          <a:xfrm>
+            <a:off x="1837944" y="4636008"/>
+            <a:ext cx="3617824" cy="1371600"/>
+          </a:xfrm>
+          <a:prstGeom prst="rect">
+            <a:avLst/>
+          </a:prstGeom>
+          <a:noFill/>
+        </p:spPr>
+        <p:txBody>
+          <a:bodyPr wrap="square" anchor="t" lIns="0" rIns="0" tIns="0" bIns="0">
+            <a:spAutoFit/>
+          </a:bodyPr>
+          <a:lstStyle/>
+          <a:p>
+            <a:pPr algn="l">
+              <a:lnSpc>
+                <a:spcPct val="145000"/>
+              </a:lnSpc>
+              <a:spcAft>
+                <a:spcPts val="600"/>
+              </a:spcAft>
+            </a:pPr>
+            <a:r>
+              <a:rPr sz="1550" b="1">
+                <a:solidFill>
+                  <a:srgbClr val="0A0A0A"/>
+                </a:solidFill>
+                <a:latin typeface="Noto Sans KR"/>
+                <a:ea typeface="Noto Sans KR"/>
+                <a:cs typeface="Noto Sans KR"/>
+              </a:rPr>
+              <a:t>현장에서 한 컷 더</a:t>
+            </a:r>
+          </a:p>
+          <a:p>
+            <a:pPr algn="l">
+              <a:lnSpc>
+                <a:spcPct val="145000"/>
+              </a:lnSpc>
+              <a:spcAft>
+                <a:spcPts val="600"/>
+              </a:spcAft>
+            </a:pPr>
+            <a:r>
+              <a:rPr sz="1000" b="0">
+                <a:solidFill>
+                  <a:srgbClr val="6F6F6F"/>
+                </a:solidFill>
+                <a:latin typeface="Noto Sans KR"/>
+                <a:ea typeface="Noto Sans KR"/>
+                <a:cs typeface="Noto Sans KR"/>
+              </a:rPr>
+              <a:t>계획에 없던 세팅을 그 자리에서 추가하는 팀. 같은 예산에서 얻는 컷이 늘어납니다.</a:t>
+            </a:r>
+          </a:p>
+        </p:txBody>
+      </p:sp>
+      <p:sp>
+        <p:nvSpPr>
+          <p:cNvPr id="17" name="TextBox 16"/>
+          <p:cNvSpPr txBox="1"/>
+          <p:nvPr/>
+        </p:nvSpPr>
+        <p:spPr>
+          <a:xfrm>
+            <a:off x="6415887" y="4562856"/>
+            <a:ext cx="1463040" cy="1280160"/>
+          </a:xfrm>
+          <a:prstGeom prst="rect">
+            <a:avLst/>
+          </a:prstGeom>
+          <a:noFill/>
+        </p:spPr>
+        <p:txBody>
+          <a:bodyPr wrap="square" anchor="t" lIns="0" rIns="0" tIns="0" bIns="0">
+            <a:spAutoFit/>
+          </a:bodyPr>
+          <a:lstStyle/>
+          <a:p>
+            <a:pPr algn="l"/>
+            <a:r>
+              <a:rPr sz="3800" b="0" spc="50">
+                <a:solidFill>
+                  <a:srgbClr val="A3A3A3"/>
+                </a:solidFill>
+                <a:latin typeface="Jost"/>
+                <a:ea typeface="Noto Sans KR"/>
+                <a:cs typeface="Noto Sans KR"/>
+              </a:rPr>
+              <a:t>04</a:t>
+            </a:r>
+          </a:p>
+        </p:txBody>
+      </p:sp>
+      <p:sp>
+        <p:nvSpPr>
+          <p:cNvPr id="18" name="TextBox 17"/>
+          <p:cNvSpPr txBox="1"/>
+          <p:nvPr/>
+        </p:nvSpPr>
+        <p:spPr>
+          <a:xfrm>
+            <a:off x="7650327" y="4636008"/>
+            <a:ext cx="3617824" cy="1371600"/>
+          </a:xfrm>
+          <a:prstGeom prst="rect">
+            <a:avLst/>
+          </a:prstGeom>
+          <a:noFill/>
+        </p:spPr>
+        <p:txBody>
+          <a:bodyPr wrap="square" anchor="t" lIns="0" rIns="0" tIns="0" bIns="0">
+            <a:spAutoFit/>
+          </a:bodyPr>
+          <a:lstStyle/>
+          <a:p>
+            <a:pPr algn="l">
+              <a:lnSpc>
+                <a:spcPct val="145000"/>
+              </a:lnSpc>
+              <a:spcAft>
+                <a:spcPts val="600"/>
+              </a:spcAft>
+            </a:pPr>
+            <a:r>
+              <a:rPr sz="1550" b="1">
+                <a:solidFill>
+                  <a:srgbClr val="0A0A0A"/>
+                </a:solidFill>
+                <a:latin typeface="Noto Sans KR"/>
+                <a:ea typeface="Noto Sans KR"/>
+                <a:cs typeface="Noto Sans KR"/>
+              </a:rPr>
+              <a:t>원본부터 다른 퀄리티</a:t>
+            </a:r>
+          </a:p>
+          <a:p>
+            <a:pPr algn="l">
+              <a:lnSpc>
+                <a:spcPct val="145000"/>
+              </a:lnSpc>
+              <a:spcAft>
+                <a:spcPts val="600"/>
+              </a:spcAft>
+            </a:pPr>
+            <a:r>
+              <a:rPr sz="1000" b="0">
+                <a:solidFill>
+                  <a:srgbClr val="6F6F6F"/>
+                </a:solidFill>
+                <a:latin typeface="Noto Sans KR"/>
+                <a:ea typeface="Noto Sans KR"/>
+                <a:cs typeface="Noto Sans KR"/>
+              </a:rPr>
+              <a:t>톤 정리만 거친 원본을 그대로 보여드릴 수 있는 촬영. 보정은 마지막 손질입니다.</a:t>
             </a:r>
           </a:p>
         </p:txBody>
@@ -3839,7 +4148,7 @@
             <a:avLst/>
           </a:prstGeom>
           <a:solidFill>
-            <a:srgbClr val="FAFAF8"/>
+            <a:srgbClr val="111111"/>
           </a:solidFill>
           <a:ln>
             <a:noFill/>
@@ -3862,8 +4171,8 @@
         </p:nvSpPr>
         <p:spPr>
           <a:xfrm>
-            <a:off x="640080" y="502920"/>
-            <a:ext cx="7315200" cy="320040"/>
+            <a:off x="603504" y="310896"/>
+            <a:ext cx="8229600" cy="274320"/>
           </a:xfrm>
           <a:prstGeom prst="rect">
             <a:avLst/>
@@ -3878,15 +4187,15 @@
           <a:p>
             <a:pPr algn="l"/>
             <a:r>
-              <a:rPr sz="1000" b="0" spc="200">
-                <a:solidFill>
-                  <a:srgbClr val="6F6F6F"/>
+              <a:rPr sz="900" b="0" spc="220">
+                <a:solidFill>
+                  <a:srgbClr val="8A8A8A"/>
                 </a:solidFill>
                 <a:latin typeface="Jost"/>
                 <a:ea typeface="Noto Sans KR"/>
                 <a:cs typeface="Noto Sans KR"/>
               </a:rPr>
-              <a:t>SELECTED WORKS — CASE 04</a:t>
+              <a:t>HOW WE WORK</a:t>
             </a:r>
           </a:p>
         </p:txBody>
@@ -3899,164 +4208,14 @@
         </p:nvSpPr>
         <p:spPr>
           <a:xfrm>
-            <a:off x="640080" y="1051560"/>
-            <a:ext cx="6858000" cy="4937760"/>
+            <a:off x="603504" y="658368"/>
+            <a:ext cx="10984687" cy="12700"/>
           </a:xfrm>
           <a:prstGeom prst="rect">
             <a:avLst/>
           </a:prstGeom>
           <a:solidFill>
-            <a:srgbClr val="F0F0EE"/>
-          </a:solidFill>
-          <a:ln w="9525">
-            <a:solidFill>
-              <a:srgbClr val="E5E5E3"/>
-            </a:solidFill>
-          </a:ln>
-          <a:effectLst/>
-        </p:spPr>
-        <p:txBody>
-          <a:bodyPr rtlCol="0" anchor="ctr"/>
-          <a:lstStyle/>
-          <a:p>
-            <a:pPr algn="ctr"/>
-          </a:p>
-        </p:txBody>
-      </p:sp>
-      <p:sp>
-        <p:nvSpPr>
-          <p:cNvPr id="5" name="TextBox 4"/>
-          <p:cNvSpPr txBox="1"/>
-          <p:nvPr/>
-        </p:nvSpPr>
-        <p:spPr>
-          <a:xfrm>
-            <a:off x="640080" y="1051560"/>
-            <a:ext cx="6858000" cy="4937760"/>
-          </a:xfrm>
-          <a:prstGeom prst="rect">
-            <a:avLst/>
-          </a:prstGeom>
-          <a:noFill/>
-        </p:spPr>
-        <p:txBody>
-          <a:bodyPr wrap="square" anchor="ctr" lIns="0" rIns="0" tIns="0" bIns="0">
-            <a:spAutoFit/>
-          </a:bodyPr>
-          <a:lstStyle/>
-          <a:p>
-            <a:pPr algn="ctr">
-              <a:spcAft>
-                <a:spcPts val="400"/>
-              </a:spcAft>
-            </a:pPr>
-            <a:r>
-              <a:rPr sz="1000" b="0" spc="250">
-                <a:solidFill>
-                  <a:srgbClr val="A3A3A3"/>
-                </a:solidFill>
-                <a:latin typeface="Jost"/>
-                <a:ea typeface="Noto Sans KR"/>
-                <a:cs typeface="Noto Sans KR"/>
-              </a:rPr>
-              <a:t>IMAGE</a:t>
-            </a:r>
-          </a:p>
-          <a:p>
-            <a:pPr algn="ctr">
-              <a:spcAft>
-                <a:spcPts val="400"/>
-              </a:spcAft>
-            </a:pPr>
-            <a:r>
-              <a:rPr sz="950" b="0">
-                <a:solidFill>
-                  <a:srgbClr val="A3A3A3"/>
-                </a:solidFill>
-                <a:latin typeface="Noto Sans KR"/>
-                <a:ea typeface="Noto Sans KR"/>
-                <a:cs typeface="Noto Sans KR"/>
-              </a:rPr>
-              <a:t>라이프스타일 · 인물 대표 컷으로 교체</a:t>
-            </a:r>
-          </a:p>
-        </p:txBody>
-      </p:sp>
-      <p:sp>
-        <p:nvSpPr>
-          <p:cNvPr id="6" name="TextBox 5"/>
-          <p:cNvSpPr txBox="1"/>
-          <p:nvPr/>
-        </p:nvSpPr>
-        <p:spPr>
-          <a:xfrm>
-            <a:off x="7863840" y="1188720"/>
-            <a:ext cx="3687775" cy="1097280"/>
-          </a:xfrm>
-          <a:prstGeom prst="rect">
-            <a:avLst/>
-          </a:prstGeom>
-          <a:noFill/>
-        </p:spPr>
-        <p:txBody>
-          <a:bodyPr wrap="square" anchor="t" lIns="0" rIns="0" tIns="0" bIns="0">
-            <a:spAutoFit/>
-          </a:bodyPr>
-          <a:lstStyle/>
-          <a:p>
-            <a:pPr algn="l">
-              <a:lnSpc>
-                <a:spcPct val="135000"/>
-              </a:lnSpc>
-            </a:pPr>
-            <a:r>
-              <a:rPr sz="1600" b="1">
-                <a:solidFill>
-                  <a:srgbClr val="0A0A0A"/>
-                </a:solidFill>
-                <a:latin typeface="Noto Sans KR"/>
-                <a:ea typeface="Noto Sans KR"/>
-                <a:cs typeface="Noto Sans KR"/>
-              </a:rPr>
-              <a:t>[클라이언트/브랜드명]</a:t>
-            </a:r>
-          </a:p>
-          <a:p>
-            <a:pPr algn="l">
-              <a:lnSpc>
-                <a:spcPct val="135000"/>
-              </a:lnSpc>
-            </a:pPr>
-            <a:r>
-              <a:rPr sz="1300" b="0">
-                <a:solidFill>
-                  <a:srgbClr val="0A0A0A"/>
-                </a:solidFill>
-                <a:latin typeface="Noto Sans KR"/>
-                <a:ea typeface="Noto Sans KR"/>
-                <a:cs typeface="Noto Sans KR"/>
-              </a:rPr>
-              <a:t>[프로젝트명]</a:t>
-            </a:r>
-          </a:p>
-        </p:txBody>
-      </p:sp>
-      <p:sp>
-        <p:nvSpPr>
-          <p:cNvPr id="7" name="Rectangle 6"/>
-          <p:cNvSpPr/>
-          <p:nvPr/>
-        </p:nvSpPr>
-        <p:spPr>
-          <a:xfrm>
-            <a:off x="7863840" y="2514600"/>
-            <a:ext cx="3687775" cy="11430"/>
-          </a:xfrm>
-          <a:prstGeom prst="rect">
-            <a:avLst/>
-          </a:prstGeom>
-          <a:solidFill>
-            <a:srgbClr val="E5E5E3"/>
+            <a:srgbClr val="2E2E2E"/>
           </a:solidFill>
           <a:ln>
             <a:noFill/>
@@ -4073,14 +4232,88 @@
       </p:sp>
       <p:sp>
         <p:nvSpPr>
-          <p:cNvPr id="8" name="TextBox 7"/>
+          <p:cNvPr id="5" name="TextBox 4"/>
           <p:cNvSpPr txBox="1"/>
           <p:nvPr/>
         </p:nvSpPr>
         <p:spPr>
           <a:xfrm>
-            <a:off x="7863840" y="2743200"/>
-            <a:ext cx="3687775" cy="2926080"/>
+            <a:off x="603504" y="1234440"/>
+            <a:ext cx="10058400" cy="822960"/>
+          </a:xfrm>
+          <a:prstGeom prst="rect">
+            <a:avLst/>
+          </a:prstGeom>
+          <a:noFill/>
+        </p:spPr>
+        <p:txBody>
+          <a:bodyPr wrap="square" anchor="t" lIns="0" rIns="0" tIns="0" bIns="0">
+            <a:spAutoFit/>
+          </a:bodyPr>
+          <a:lstStyle/>
+          <a:p>
+            <a:pPr algn="l"/>
+            <a:r>
+              <a:rPr sz="3400" b="1">
+                <a:solidFill>
+                  <a:srgbClr val="FAFAF8"/>
+                </a:solidFill>
+                <a:latin typeface="Noto Sans KR"/>
+                <a:ea typeface="Noto Sans KR"/>
+                <a:cs typeface="Noto Sans KR"/>
+              </a:rPr>
+              <a:t>상담부터 전달까지, 네 걸음</a:t>
+            </a:r>
+          </a:p>
+        </p:txBody>
+      </p:sp>
+      <p:sp>
+        <p:nvSpPr>
+          <p:cNvPr id="6" name="TextBox 5"/>
+          <p:cNvSpPr txBox="1"/>
+          <p:nvPr/>
+        </p:nvSpPr>
+        <p:spPr>
+          <a:xfrm>
+            <a:off x="603504" y="2880360"/>
+            <a:ext cx="2197531" cy="1005840"/>
+          </a:xfrm>
+          <a:prstGeom prst="rect">
+            <a:avLst/>
+          </a:prstGeom>
+          <a:noFill/>
+        </p:spPr>
+        <p:txBody>
+          <a:bodyPr wrap="square" anchor="t" lIns="0" rIns="0" tIns="0" bIns="0">
+            <a:spAutoFit/>
+          </a:bodyPr>
+          <a:lstStyle/>
+          <a:p>
+            <a:pPr algn="l"/>
+            <a:r>
+              <a:rPr sz="4400" b="0" spc="50">
+                <a:solidFill>
+                  <a:srgbClr val="4A4A4A"/>
+                </a:solidFill>
+                <a:latin typeface="Jost"/>
+                <a:ea typeface="Noto Sans KR"/>
+                <a:cs typeface="Noto Sans KR"/>
+              </a:rPr>
+              <a:t>01</a:t>
+            </a:r>
+          </a:p>
+        </p:txBody>
+      </p:sp>
+      <p:sp>
+        <p:nvSpPr>
+          <p:cNvPr id="7" name="TextBox 6"/>
+          <p:cNvSpPr txBox="1"/>
+          <p:nvPr/>
+        </p:nvSpPr>
+        <p:spPr>
+          <a:xfrm>
+            <a:off x="603504" y="3977640"/>
+            <a:ext cx="2197531" cy="1737360"/>
           </a:xfrm>
           <a:prstGeom prst="rect">
             <a:avLst/>
@@ -4098,19 +4331,19 @@
                 <a:spcPct val="150000"/>
               </a:lnSpc>
               <a:spcAft>
-                <a:spcPts val="500"/>
+                <a:spcPts val="700"/>
               </a:spcAft>
             </a:pPr>
             <a:r>
-              <a:rPr sz="900" b="0" spc="200">
-                <a:solidFill>
-                  <a:srgbClr val="6F6F6F"/>
-                </a:solidFill>
-                <a:latin typeface="Jost"/>
-                <a:ea typeface="Noto Sans KR"/>
-                <a:cs typeface="Noto Sans KR"/>
-              </a:rPr>
-              <a:t>SCOPE</a:t>
+              <a:rPr sz="1500" b="1">
+                <a:solidFill>
+                  <a:srgbClr val="FAFAF8"/>
+                </a:solidFill>
+                <a:latin typeface="Noto Sans KR"/>
+                <a:ea typeface="Noto Sans KR"/>
+                <a:cs typeface="Noto Sans KR"/>
+              </a:rPr>
+              <a:t>상담 · 기획</a:t>
             </a:r>
           </a:p>
           <a:p>
@@ -4119,40 +4352,130 @@
                 <a:spcPct val="150000"/>
               </a:lnSpc>
               <a:spcAft>
-                <a:spcPts val="500"/>
+                <a:spcPts val="700"/>
               </a:spcAft>
             </a:pPr>
             <a:r>
-              <a:rPr sz="1050" b="0">
-                <a:solidFill>
-                  <a:srgbClr val="6F6F6F"/>
+              <a:rPr sz="950" b="0">
+                <a:solidFill>
+                  <a:srgbClr val="9A9A9A"/>
                 </a:solidFill>
                 <a:latin typeface="Noto Sans KR"/>
                 <a:ea typeface="Noto Sans KR"/>
                 <a:cs typeface="Noto Sans KR"/>
               </a:rPr>
-              <a:t>기획 · 촬영 · 리터칭 (해당 항목만 남기기)</a:t>
-            </a:r>
-          </a:p>
+              <a:t>24시간 안에 답장. 목적과 무드를 듣고 레퍼런스 · 세팅 · 견적을 제안합니다.</a:t>
+            </a:r>
+          </a:p>
+        </p:txBody>
+      </p:sp>
+      <p:sp>
+        <p:nvSpPr>
+          <p:cNvPr id="8" name="Rectangle 7"/>
+          <p:cNvSpPr/>
+          <p:nvPr/>
+        </p:nvSpPr>
+        <p:spPr>
+          <a:xfrm>
+            <a:off x="3343960" y="2743200"/>
+            <a:ext cx="11430" cy="3017520"/>
+          </a:xfrm>
+          <a:prstGeom prst="rect">
+            <a:avLst/>
+          </a:prstGeom>
+          <a:solidFill>
+            <a:srgbClr val="2E2E2E"/>
+          </a:solidFill>
+          <a:ln>
+            <a:noFill/>
+          </a:ln>
+          <a:effectLst/>
+        </p:spPr>
+        <p:txBody>
+          <a:bodyPr rtlCol="0" anchor="ctr"/>
+          <a:lstStyle/>
+          <a:p>
+            <a:pPr algn="ctr"/>
+          </a:p>
+        </p:txBody>
+      </p:sp>
+      <p:sp>
+        <p:nvSpPr>
+          <p:cNvPr id="9" name="TextBox 8"/>
+          <p:cNvSpPr txBox="1"/>
+          <p:nvPr/>
+        </p:nvSpPr>
+        <p:spPr>
+          <a:xfrm>
+            <a:off x="3642283" y="2880360"/>
+            <a:ext cx="2197531" cy="1005840"/>
+          </a:xfrm>
+          <a:prstGeom prst="rect">
+            <a:avLst/>
+          </a:prstGeom>
+          <a:noFill/>
+        </p:spPr>
+        <p:txBody>
+          <a:bodyPr wrap="square" anchor="t" lIns="0" rIns="0" tIns="0" bIns="0">
+            <a:spAutoFit/>
+          </a:bodyPr>
+          <a:lstStyle/>
+          <a:p>
+            <a:pPr algn="l"/>
+            <a:r>
+              <a:rPr sz="4400" b="0" spc="50">
+                <a:solidFill>
+                  <a:srgbClr val="4A4A4A"/>
+                </a:solidFill>
+                <a:latin typeface="Jost"/>
+                <a:ea typeface="Noto Sans KR"/>
+                <a:cs typeface="Noto Sans KR"/>
+              </a:rPr>
+              <a:t>02</a:t>
+            </a:r>
+          </a:p>
+        </p:txBody>
+      </p:sp>
+      <p:sp>
+        <p:nvSpPr>
+          <p:cNvPr id="10" name="TextBox 9"/>
+          <p:cNvSpPr txBox="1"/>
+          <p:nvPr/>
+        </p:nvSpPr>
+        <p:spPr>
+          <a:xfrm>
+            <a:off x="3642283" y="3977640"/>
+            <a:ext cx="2197531" cy="1737360"/>
+          </a:xfrm>
+          <a:prstGeom prst="rect">
+            <a:avLst/>
+          </a:prstGeom>
+          <a:noFill/>
+        </p:spPr>
+        <p:txBody>
+          <a:bodyPr wrap="square" anchor="t" lIns="0" rIns="0" tIns="0" bIns="0">
+            <a:spAutoFit/>
+          </a:bodyPr>
+          <a:lstStyle/>
           <a:p>
             <a:pPr algn="l">
               <a:lnSpc>
                 <a:spcPct val="150000"/>
               </a:lnSpc>
               <a:spcAft>
-                <a:spcPts val="500"/>
+                <a:spcPts val="700"/>
               </a:spcAft>
             </a:pPr>
             <a:r>
-              <a:rPr sz="800" b="0">
-                <a:solidFill>
-                  <a:srgbClr val="6F6F6F"/>
-                </a:solidFill>
-                <a:latin typeface="Jost"/>
-                <a:ea typeface="Noto Sans KR"/>
-                <a:cs typeface="Noto Sans KR"/>
-              </a:rPr>
-              <a:t/>
+              <a:rPr sz="1500" b="1">
+                <a:solidFill>
+                  <a:srgbClr val="FAFAF8"/>
+                </a:solidFill>
+                <a:latin typeface="Noto Sans KR"/>
+                <a:ea typeface="Noto Sans KR"/>
+                <a:cs typeface="Noto Sans KR"/>
+              </a:rPr>
+              <a:t>촬영</a:t>
             </a:r>
           </a:p>
           <a:p>
@@ -4161,54 +4484,195 @@
                 <a:spcPct val="150000"/>
               </a:lnSpc>
               <a:spcAft>
-                <a:spcPts val="500"/>
+                <a:spcPts val="700"/>
               </a:spcAft>
             </a:pPr>
             <a:r>
-              <a:rPr sz="900" b="0" spc="200">
-                <a:solidFill>
-                  <a:srgbClr val="6F6F6F"/>
+              <a:rPr sz="950" b="0">
+                <a:solidFill>
+                  <a:srgbClr val="9A9A9A"/>
+                </a:solidFill>
+                <a:latin typeface="Noto Sans KR"/>
+                <a:ea typeface="Noto Sans KR"/>
+                <a:cs typeface="Noto Sans KR"/>
+              </a:rPr>
+              <a:t>역삼 스튜디오 또는 로케이션. 현장에서 컷을 함께 확인하며 진행합니다.</a:t>
+            </a:r>
+          </a:p>
+        </p:txBody>
+      </p:sp>
+      <p:sp>
+        <p:nvSpPr>
+          <p:cNvPr id="11" name="Rectangle 10"/>
+          <p:cNvSpPr/>
+          <p:nvPr/>
+        </p:nvSpPr>
+        <p:spPr>
+          <a:xfrm>
+            <a:off x="6090132" y="2743200"/>
+            <a:ext cx="11430" cy="3017520"/>
+          </a:xfrm>
+          <a:prstGeom prst="rect">
+            <a:avLst/>
+          </a:prstGeom>
+          <a:solidFill>
+            <a:srgbClr val="2E2E2E"/>
+          </a:solidFill>
+          <a:ln>
+            <a:noFill/>
+          </a:ln>
+          <a:effectLst/>
+        </p:spPr>
+        <p:txBody>
+          <a:bodyPr rtlCol="0" anchor="ctr"/>
+          <a:lstStyle/>
+          <a:p>
+            <a:pPr algn="ctr"/>
+          </a:p>
+        </p:txBody>
+      </p:sp>
+      <p:sp>
+        <p:nvSpPr>
+          <p:cNvPr id="12" name="TextBox 11"/>
+          <p:cNvSpPr txBox="1"/>
+          <p:nvPr/>
+        </p:nvSpPr>
+        <p:spPr>
+          <a:xfrm>
+            <a:off x="6388455" y="2880360"/>
+            <a:ext cx="2197531" cy="1005840"/>
+          </a:xfrm>
+          <a:prstGeom prst="rect">
+            <a:avLst/>
+          </a:prstGeom>
+          <a:noFill/>
+        </p:spPr>
+        <p:txBody>
+          <a:bodyPr wrap="square" anchor="t" lIns="0" rIns="0" tIns="0" bIns="0">
+            <a:spAutoFit/>
+          </a:bodyPr>
+          <a:lstStyle/>
+          <a:p>
+            <a:pPr algn="l"/>
+            <a:r>
+              <a:rPr sz="4400" b="0" spc="50">
+                <a:solidFill>
+                  <a:srgbClr val="4A4A4A"/>
                 </a:solidFill>
                 <a:latin typeface="Jost"/>
                 <a:ea typeface="Noto Sans KR"/>
                 <a:cs typeface="Noto Sans KR"/>
               </a:rPr>
-              <a:t>SUMMARY</a:t>
-            </a:r>
-          </a:p>
+              <a:t>03</a:t>
+            </a:r>
+          </a:p>
+        </p:txBody>
+      </p:sp>
+      <p:sp>
+        <p:nvSpPr>
+          <p:cNvPr id="13" name="TextBox 12"/>
+          <p:cNvSpPr txBox="1"/>
+          <p:nvPr/>
+        </p:nvSpPr>
+        <p:spPr>
+          <a:xfrm>
+            <a:off x="6388455" y="3977640"/>
+            <a:ext cx="2197531" cy="1737360"/>
+          </a:xfrm>
+          <a:prstGeom prst="rect">
+            <a:avLst/>
+          </a:prstGeom>
+          <a:noFill/>
+        </p:spPr>
+        <p:txBody>
+          <a:bodyPr wrap="square" anchor="t" lIns="0" rIns="0" tIns="0" bIns="0">
+            <a:spAutoFit/>
+          </a:bodyPr>
+          <a:lstStyle/>
           <a:p>
             <a:pPr algn="l">
               <a:lnSpc>
                 <a:spcPct val="150000"/>
               </a:lnSpc>
               <a:spcAft>
-                <a:spcPts val="500"/>
+                <a:spcPts val="700"/>
               </a:spcAft>
             </a:pPr>
             <a:r>
-              <a:rPr sz="1050" b="0">
-                <a:solidFill>
-                  <a:srgbClr val="6F6F6F"/>
+              <a:rPr sz="1500" b="1">
+                <a:solidFill>
+                  <a:srgbClr val="FAFAF8"/>
                 </a:solidFill>
                 <a:latin typeface="Noto Sans KR"/>
                 <a:ea typeface="Noto Sans KR"/>
                 <a:cs typeface="Noto Sans KR"/>
               </a:rPr>
-              <a:t>[한 줄 요약 — 무엇을 해결했는지. 예: 신제품 론칭 상세페이지 전체 비주얼]</a:t>
-            </a:r>
-          </a:p>
-        </p:txBody>
-      </p:sp>
-      <p:sp>
-        <p:nvSpPr>
-          <p:cNvPr id="9" name="TextBox 8"/>
+              <a:t>셀렉 · 리터칭</a:t>
+            </a:r>
+          </a:p>
+          <a:p>
+            <a:pPr algn="l">
+              <a:lnSpc>
+                <a:spcPct val="150000"/>
+              </a:lnSpc>
+              <a:spcAft>
+                <a:spcPts val="700"/>
+              </a:spcAft>
+            </a:pPr>
+            <a:r>
+              <a:rPr sz="950" b="0">
+                <a:solidFill>
+                  <a:srgbClr val="9A9A9A"/>
+                </a:solidFill>
+                <a:latin typeface="Noto Sans KR"/>
+                <a:ea typeface="Noto Sans KR"/>
+                <a:cs typeface="Noto Sans KR"/>
+              </a:rPr>
+              <a:t>정리된 컷에서 고르시면, 피드백을 반영해 정성껏 보정합니다.</a:t>
+            </a:r>
+          </a:p>
+        </p:txBody>
+      </p:sp>
+      <p:sp>
+        <p:nvSpPr>
+          <p:cNvPr id="14" name="Rectangle 13"/>
+          <p:cNvSpPr/>
+          <p:nvPr/>
+        </p:nvSpPr>
+        <p:spPr>
+          <a:xfrm>
+            <a:off x="8836304" y="2743200"/>
+            <a:ext cx="11430" cy="3017520"/>
+          </a:xfrm>
+          <a:prstGeom prst="rect">
+            <a:avLst/>
+          </a:prstGeom>
+          <a:solidFill>
+            <a:srgbClr val="2E2E2E"/>
+          </a:solidFill>
+          <a:ln>
+            <a:noFill/>
+          </a:ln>
+          <a:effectLst/>
+        </p:spPr>
+        <p:txBody>
+          <a:bodyPr rtlCol="0" anchor="ctr"/>
+          <a:lstStyle/>
+          <a:p>
+            <a:pPr algn="ctr"/>
+          </a:p>
+        </p:txBody>
+      </p:sp>
+      <p:sp>
+        <p:nvSpPr>
+          <p:cNvPr id="15" name="TextBox 14"/>
           <p:cNvSpPr txBox="1"/>
           <p:nvPr/>
         </p:nvSpPr>
         <p:spPr>
           <a:xfrm>
-            <a:off x="640080" y="6473952"/>
-            <a:ext cx="3657600" cy="274320"/>
+            <a:off x="9134627" y="2880360"/>
+            <a:ext cx="2197531" cy="1005840"/>
           </a:xfrm>
           <a:prstGeom prst="rect">
             <a:avLst/>
@@ -4223,29 +4687,29 @@
           <a:p>
             <a:pPr algn="l"/>
             <a:r>
-              <a:rPr sz="800" b="0" spc="150">
-                <a:solidFill>
-                  <a:srgbClr val="A3A3A3"/>
+              <a:rPr sz="4400" b="0" spc="50">
+                <a:solidFill>
+                  <a:srgbClr val="4A4A4A"/>
                 </a:solidFill>
                 <a:latin typeface="Jost"/>
                 <a:ea typeface="Noto Sans KR"/>
                 <a:cs typeface="Noto Sans KR"/>
               </a:rPr>
-              <a:t>STUDIO. HOLYMOLLY</a:t>
-            </a:r>
-          </a:p>
-        </p:txBody>
-      </p:sp>
-      <p:sp>
-        <p:nvSpPr>
-          <p:cNvPr id="10" name="TextBox 9"/>
+              <a:t>04</a:t>
+            </a:r>
+          </a:p>
+        </p:txBody>
+      </p:sp>
+      <p:sp>
+        <p:nvSpPr>
+          <p:cNvPr id="16" name="TextBox 15"/>
           <p:cNvSpPr txBox="1"/>
           <p:nvPr/>
         </p:nvSpPr>
         <p:spPr>
           <a:xfrm>
-            <a:off x="10637215" y="6473952"/>
-            <a:ext cx="914400" cy="274320"/>
+            <a:off x="9134627" y="3977640"/>
+            <a:ext cx="2197531" cy="1737360"/>
           </a:xfrm>
           <a:prstGeom prst="rect">
             <a:avLst/>
@@ -4258,11 +4722,106 @@
           </a:bodyPr>
           <a:lstStyle/>
           <a:p>
+            <a:pPr algn="l">
+              <a:lnSpc>
+                <a:spcPct val="150000"/>
+              </a:lnSpc>
+              <a:spcAft>
+                <a:spcPts val="700"/>
+              </a:spcAft>
+            </a:pPr>
+            <a:r>
+              <a:rPr sz="1500" b="1">
+                <a:solidFill>
+                  <a:srgbClr val="FAFAF8"/>
+                </a:solidFill>
+                <a:latin typeface="Noto Sans KR"/>
+                <a:ea typeface="Noto Sans KR"/>
+                <a:cs typeface="Noto Sans KR"/>
+              </a:rPr>
+              <a:t>전달</a:t>
+            </a:r>
+          </a:p>
+          <a:p>
+            <a:pPr algn="l">
+              <a:lnSpc>
+                <a:spcPct val="150000"/>
+              </a:lnSpc>
+              <a:spcAft>
+                <a:spcPts val="700"/>
+              </a:spcAft>
+            </a:pPr>
+            <a:r>
+              <a:rPr sz="950" b="0">
+                <a:solidFill>
+                  <a:srgbClr val="9A9A9A"/>
+                </a:solidFill>
+                <a:latin typeface="Noto Sans KR"/>
+                <a:ea typeface="Noto Sans KR"/>
+                <a:cs typeface="Noto Sans KR"/>
+              </a:rPr>
+              <a:t>고해상도 완성본을 일정에 맞춰. 채널별 포맷 정리까지 함께.</a:t>
+            </a:r>
+          </a:p>
+        </p:txBody>
+      </p:sp>
+      <p:sp>
+        <p:nvSpPr>
+          <p:cNvPr id="17" name="Rectangle 16"/>
+          <p:cNvSpPr/>
+          <p:nvPr/>
+        </p:nvSpPr>
+        <p:spPr>
+          <a:xfrm>
+            <a:off x="603504" y="2743200"/>
+            <a:ext cx="10984687" cy="12700"/>
+          </a:xfrm>
+          <a:prstGeom prst="rect">
+            <a:avLst/>
+          </a:prstGeom>
+          <a:solidFill>
+            <a:srgbClr val="2E2E2E"/>
+          </a:solidFill>
+          <a:ln>
+            <a:noFill/>
+          </a:ln>
+          <a:effectLst/>
+        </p:spPr>
+        <p:txBody>
+          <a:bodyPr rtlCol="0" anchor="ctr"/>
+          <a:lstStyle/>
+          <a:p>
+            <a:pPr algn="ctr"/>
+          </a:p>
+        </p:txBody>
+      </p:sp>
+      <p:sp>
+        <p:nvSpPr>
+          <p:cNvPr id="18" name="TextBox 17"/>
+          <p:cNvSpPr txBox="1"/>
+          <p:nvPr/>
+        </p:nvSpPr>
+        <p:spPr>
+          <a:xfrm>
+            <a:off x="10490911" y="6309360"/>
+            <a:ext cx="1097280" cy="274320"/>
+          </a:xfrm>
+          <a:prstGeom prst="rect">
+            <a:avLst/>
+          </a:prstGeom>
+          <a:noFill/>
+        </p:spPr>
+        <p:txBody>
+          <a:bodyPr wrap="square" anchor="t" lIns="0" rIns="0" tIns="0" bIns="0">
+            <a:spAutoFit/>
+          </a:bodyPr>
+          <a:lstStyle/>
+          <a:p>
             <a:pPr algn="r"/>
             <a:r>
-              <a:rPr sz="800" b="0" spc="150">
-                <a:solidFill>
-                  <a:srgbClr val="A3A3A3"/>
+              <a:rPr sz="900" b="0" spc="220">
+                <a:solidFill>
+                  <a:srgbClr val="8A8A8A"/>
                 </a:solidFill>
                 <a:latin typeface="Jost"/>
                 <a:ea typeface="Noto Sans KR"/>
@@ -4323,98 +4882,20 @@
       </p:sp>
       <p:sp>
         <p:nvSpPr>
-          <p:cNvPr id="3" name="TextBox 2"/>
-          <p:cNvSpPr txBox="1"/>
-          <p:nvPr/>
-        </p:nvSpPr>
-        <p:spPr>
-          <a:xfrm>
-            <a:off x="640080" y="502920"/>
-            <a:ext cx="7315200" cy="320040"/>
-          </a:xfrm>
-          <a:prstGeom prst="rect">
-            <a:avLst/>
-          </a:prstGeom>
-          <a:noFill/>
-        </p:spPr>
-        <p:txBody>
-          <a:bodyPr wrap="square" anchor="t" lIns="0" rIns="0" tIns="0" bIns="0">
-            <a:spAutoFit/>
-          </a:bodyPr>
-          <a:lstStyle/>
-          <a:p>
-            <a:pPr algn="l"/>
-            <a:r>
-              <a:rPr sz="1000" b="0" spc="200">
-                <a:solidFill>
-                  <a:srgbClr val="6F6F6F"/>
-                </a:solidFill>
-                <a:latin typeface="Jost"/>
-                <a:ea typeface="Noto Sans KR"/>
-                <a:cs typeface="Noto Sans KR"/>
-              </a:rPr>
-              <a:t>WHY HOLYMOLLY</a:t>
-            </a:r>
-          </a:p>
-        </p:txBody>
-      </p:sp>
-      <p:sp>
-        <p:nvSpPr>
-          <p:cNvPr id="4" name="TextBox 3"/>
-          <p:cNvSpPr txBox="1"/>
-          <p:nvPr/>
-        </p:nvSpPr>
-        <p:spPr>
-          <a:xfrm>
-            <a:off x="640080" y="914400"/>
-            <a:ext cx="10911535" cy="1188720"/>
-          </a:xfrm>
-          <a:prstGeom prst="rect">
-            <a:avLst/>
-          </a:prstGeom>
-          <a:noFill/>
-        </p:spPr>
-        <p:txBody>
-          <a:bodyPr wrap="square" anchor="t" lIns="0" rIns="0" tIns="0" bIns="0">
-            <a:spAutoFit/>
-          </a:bodyPr>
-          <a:lstStyle/>
-          <a:p>
-            <a:pPr algn="l">
-              <a:lnSpc>
-                <a:spcPct val="115000"/>
-              </a:lnSpc>
-            </a:pPr>
-            <a:r>
-              <a:rPr sz="2400" b="1">
-                <a:solidFill>
-                  <a:srgbClr val="0A0A0A"/>
-                </a:solidFill>
-                <a:latin typeface="Noto Sans KR"/>
-                <a:ea typeface="Noto Sans KR"/>
-                <a:cs typeface="Noto Sans KR"/>
-              </a:rPr>
-              <a:t>홀리몰리와 찍으면 다른 것</a:t>
-            </a:r>
-          </a:p>
-        </p:txBody>
-      </p:sp>
-      <p:sp>
-        <p:nvSpPr>
-          <p:cNvPr id="5" name="Rectangle 4"/>
+          <p:cNvPr id="3" name="Rectangle 2"/>
           <p:cNvSpPr/>
           <p:nvPr/>
         </p:nvSpPr>
         <p:spPr>
           <a:xfrm>
-            <a:off x="640080" y="2148840"/>
-            <a:ext cx="10911535" cy="17780"/>
+            <a:off x="6583680" y="0"/>
+            <a:ext cx="5608015" cy="6858000"/>
           </a:xfrm>
           <a:prstGeom prst="rect">
             <a:avLst/>
           </a:prstGeom>
           <a:solidFill>
-            <a:srgbClr val="0A0A0A"/>
+            <a:srgbClr val="EFEFED"/>
           </a:solidFill>
           <a:ln>
             <a:noFill/>
@@ -4431,14 +4912,74 @@
       </p:sp>
       <p:sp>
         <p:nvSpPr>
-          <p:cNvPr id="6" name="TextBox 5"/>
+          <p:cNvPr id="4" name="TextBox 3"/>
           <p:cNvSpPr txBox="1"/>
           <p:nvPr/>
         </p:nvSpPr>
         <p:spPr>
           <a:xfrm>
-            <a:off x="640080" y="2423160"/>
-            <a:ext cx="4815687" cy="1600200"/>
+            <a:off x="6583680" y="0"/>
+            <a:ext cx="5608015" cy="6858000"/>
+          </a:xfrm>
+          <a:prstGeom prst="rect">
+            <a:avLst/>
+          </a:prstGeom>
+          <a:noFill/>
+        </p:spPr>
+        <p:txBody>
+          <a:bodyPr wrap="square" anchor="ctr" lIns="0" rIns="0" tIns="0" bIns="0">
+            <a:spAutoFit/>
+          </a:bodyPr>
+          <a:lstStyle/>
+          <a:p>
+            <a:pPr algn="ctr">
+              <a:spcAft>
+                <a:spcPts val="400"/>
+              </a:spcAft>
+            </a:pPr>
+            <a:r>
+              <a:rPr sz="1000" b="0" spc="280">
+                <a:solidFill>
+                  <a:srgbClr val="A3A3A3"/>
+                </a:solidFill>
+                <a:latin typeface="Jost"/>
+                <a:ea typeface="Noto Sans KR"/>
+                <a:cs typeface="Noto Sans KR"/>
+              </a:rPr>
+              <a:t>IMAGE</a:t>
+            </a:r>
+          </a:p>
+          <a:p>
+            <a:pPr algn="ctr">
+              <a:spcAft>
+                <a:spcPts val="400"/>
+              </a:spcAft>
+            </a:pPr>
+            <a:r>
+              <a:rPr sz="950" b="0">
+                <a:solidFill>
+                  <a:srgbClr val="A3A3A3"/>
+                </a:solidFill>
+                <a:latin typeface="Noto Sans KR"/>
+                <a:ea typeface="Noto Sans KR"/>
+                <a:cs typeface="Noto Sans KR"/>
+              </a:rPr>
+              <a:t>스튜디오 공간 컷으로 교체
+(풀블리드)</a:t>
+            </a:r>
+          </a:p>
+        </p:txBody>
+      </p:sp>
+      <p:sp>
+        <p:nvSpPr>
+          <p:cNvPr id="5" name="TextBox 4"/>
+          <p:cNvSpPr txBox="1"/>
+          <p:nvPr/>
+        </p:nvSpPr>
+        <p:spPr>
+          <a:xfrm>
+            <a:off x="603504" y="310896"/>
+            <a:ext cx="5486400" cy="274320"/>
           </a:xfrm>
           <a:prstGeom prst="rect">
             <a:avLst/>
@@ -4451,166 +4992,31 @@
           </a:bodyPr>
           <a:lstStyle/>
           <a:p>
-            <a:pPr algn="l">
-              <a:lnSpc>
-                <a:spcPct val="145000"/>
-              </a:lnSpc>
-              <a:spcAft>
-                <a:spcPts val="600"/>
-              </a:spcAft>
-            </a:pPr>
-            <a:r>
-              <a:rPr sz="1000" b="0" spc="150">
-                <a:solidFill>
-                  <a:srgbClr val="A3A3A3"/>
+            <a:pPr algn="l"/>
+            <a:r>
+              <a:rPr sz="900" b="0" spc="220">
+                <a:solidFill>
+                  <a:srgbClr val="6F6F6F"/>
                 </a:solidFill>
                 <a:latin typeface="Jost"/>
                 <a:ea typeface="Noto Sans KR"/>
                 <a:cs typeface="Noto Sans KR"/>
               </a:rPr>
-              <a:t>01</a:t>
-            </a:r>
-          </a:p>
-          <a:p>
-            <a:pPr algn="l">
-              <a:lnSpc>
-                <a:spcPct val="145000"/>
-              </a:lnSpc>
-              <a:spcAft>
-                <a:spcPts val="600"/>
-              </a:spcAft>
-            </a:pPr>
-            <a:r>
-              <a:rPr sz="1500" b="1">
-                <a:solidFill>
-                  <a:srgbClr val="0A0A0A"/>
-                </a:solidFill>
-                <a:latin typeface="Noto Sans KR"/>
-                <a:ea typeface="Noto Sans KR"/>
-                <a:cs typeface="Noto Sans KR"/>
-              </a:rPr>
-              <a:t>디렉션이 있는 촬영</a:t>
-            </a:r>
-          </a:p>
-          <a:p>
-            <a:pPr algn="l">
-              <a:lnSpc>
-                <a:spcPct val="145000"/>
-              </a:lnSpc>
-              <a:spcAft>
-                <a:spcPts val="600"/>
-              </a:spcAft>
-            </a:pPr>
-            <a:r>
-              <a:rPr sz="1050" b="0">
-                <a:solidFill>
-                  <a:srgbClr val="6F6F6F"/>
-                </a:solidFill>
-                <a:latin typeface="Noto Sans KR"/>
-                <a:ea typeface="Noto Sans KR"/>
-                <a:cs typeface="Noto Sans KR"/>
-              </a:rPr>
-              <a:t>찍기 전에 설계합니다. 레퍼런스 정리부터 무드보드, 세팅 계획까지 — 촬영은 기획의 마지막 단계입니다.</a:t>
-            </a:r>
-          </a:p>
-        </p:txBody>
-      </p:sp>
-      <p:sp>
-        <p:nvSpPr>
-          <p:cNvPr id="7" name="TextBox 6"/>
-          <p:cNvSpPr txBox="1"/>
-          <p:nvPr/>
-        </p:nvSpPr>
-        <p:spPr>
-          <a:xfrm>
-            <a:off x="6415887" y="2423160"/>
-            <a:ext cx="4815687" cy="1600200"/>
-          </a:xfrm>
-          <a:prstGeom prst="rect">
-            <a:avLst/>
-          </a:prstGeom>
-          <a:noFill/>
-        </p:spPr>
-        <p:txBody>
-          <a:bodyPr wrap="square" anchor="t" lIns="0" rIns="0" tIns="0" bIns="0">
-            <a:spAutoFit/>
-          </a:bodyPr>
-          <a:lstStyle/>
-          <a:p>
-            <a:pPr algn="l">
-              <a:lnSpc>
-                <a:spcPct val="145000"/>
-              </a:lnSpc>
-              <a:spcAft>
-                <a:spcPts val="600"/>
-              </a:spcAft>
-            </a:pPr>
-            <a:r>
-              <a:rPr sz="1000" b="0" spc="150">
-                <a:solidFill>
-                  <a:srgbClr val="A3A3A3"/>
-                </a:solidFill>
-                <a:latin typeface="Jost"/>
-                <a:ea typeface="Noto Sans KR"/>
-                <a:cs typeface="Noto Sans KR"/>
-              </a:rPr>
-              <a:t>02</a:t>
-            </a:r>
-          </a:p>
-          <a:p>
-            <a:pPr algn="l">
-              <a:lnSpc>
-                <a:spcPct val="145000"/>
-              </a:lnSpc>
-              <a:spcAft>
-                <a:spcPts val="600"/>
-              </a:spcAft>
-            </a:pPr>
-            <a:r>
-              <a:rPr sz="1500" b="1">
-                <a:solidFill>
-                  <a:srgbClr val="0A0A0A"/>
-                </a:solidFill>
-                <a:latin typeface="Noto Sans KR"/>
-                <a:ea typeface="Noto Sans KR"/>
-                <a:cs typeface="Noto Sans KR"/>
-              </a:rPr>
-              <a:t>질감에 강한 스튜디오</a:t>
-            </a:r>
-          </a:p>
-          <a:p>
-            <a:pPr algn="l">
-              <a:lnSpc>
-                <a:spcPct val="145000"/>
-              </a:lnSpc>
-              <a:spcAft>
-                <a:spcPts val="600"/>
-              </a:spcAft>
-            </a:pPr>
-            <a:r>
-              <a:rPr sz="1050" b="0">
-                <a:solidFill>
-                  <a:srgbClr val="6F6F6F"/>
-                </a:solidFill>
-                <a:latin typeface="Noto Sans KR"/>
-                <a:ea typeface="Noto Sans KR"/>
-                <a:cs typeface="Noto Sans KR"/>
-              </a:rPr>
-              <a:t>뷰티의 제형, F&amp;B의 시즐, 패브릭의 결. 클로즈업에서 무너지지 않는 디테일을 만듭니다.</a:t>
-            </a:r>
-          </a:p>
-        </p:txBody>
-      </p:sp>
-      <p:sp>
-        <p:nvSpPr>
-          <p:cNvPr id="8" name="Rectangle 7"/>
+              <a:t>STUDIO</a:t>
+            </a:r>
+          </a:p>
+        </p:txBody>
+      </p:sp>
+      <p:sp>
+        <p:nvSpPr>
+          <p:cNvPr id="6" name="Rectangle 5"/>
           <p:cNvSpPr/>
           <p:nvPr/>
         </p:nvSpPr>
         <p:spPr>
           <a:xfrm>
-            <a:off x="640080" y="4206240"/>
-            <a:ext cx="10911535" cy="11430"/>
+            <a:off x="603504" y="658368"/>
+            <a:ext cx="5577840" cy="12700"/>
           </a:xfrm>
           <a:prstGeom prst="rect">
             <a:avLst/>
@@ -4633,14 +5039,14 @@
       </p:sp>
       <p:sp>
         <p:nvSpPr>
-          <p:cNvPr id="9" name="TextBox 8"/>
+          <p:cNvPr id="7" name="TextBox 6"/>
           <p:cNvSpPr txBox="1"/>
           <p:nvPr/>
         </p:nvSpPr>
         <p:spPr>
           <a:xfrm>
-            <a:off x="640080" y="4480560"/>
-            <a:ext cx="4815687" cy="1600200"/>
+            <a:off x="603504" y="1737360"/>
+            <a:ext cx="5669280" cy="2194560"/>
           </a:xfrm>
           <a:prstGeom prst="rect">
             <a:avLst/>
@@ -4655,108 +5061,51 @@
           <a:p>
             <a:pPr algn="l">
               <a:lnSpc>
-                <a:spcPct val="145000"/>
+                <a:spcPct val="110000"/>
               </a:lnSpc>
-              <a:spcAft>
-                <a:spcPts val="600"/>
-              </a:spcAft>
             </a:pPr>
             <a:r>
-              <a:rPr sz="1000" b="0" spc="150">
-                <a:solidFill>
-                  <a:srgbClr val="A3A3A3"/>
+              <a:rPr sz="5800" b="0" spc="150">
+                <a:solidFill>
+                  <a:srgbClr val="0A0A0A"/>
                 </a:solidFill>
                 <a:latin typeface="Jost"/>
                 <a:ea typeface="Noto Sans KR"/>
                 <a:cs typeface="Noto Sans KR"/>
               </a:rPr>
-              <a:t>03</a:t>
+              <a:t>SEOUL,</a:t>
             </a:r>
           </a:p>
           <a:p>
             <a:pPr algn="l">
               <a:lnSpc>
-                <a:spcPct val="145000"/>
+                <a:spcPct val="110000"/>
               </a:lnSpc>
-              <a:spcAft>
-                <a:spcPts val="600"/>
-              </a:spcAft>
             </a:pPr>
             <a:r>
-              <a:rPr sz="1500" b="1">
+              <a:rPr sz="5800" b="0" spc="150">
                 <a:solidFill>
                   <a:srgbClr val="0A0A0A"/>
                 </a:solidFill>
-                <a:latin typeface="Noto Sans KR"/>
-                <a:ea typeface="Noto Sans KR"/>
-                <a:cs typeface="Noto Sans KR"/>
-              </a:rPr>
-              <a:t>현장에서 한 컷 더</a:t>
-            </a:r>
-          </a:p>
-          <a:p>
-            <a:pPr algn="l">
-              <a:lnSpc>
-                <a:spcPct val="145000"/>
-              </a:lnSpc>
-              <a:spcAft>
-                <a:spcPts val="600"/>
-              </a:spcAft>
-            </a:pPr>
-            <a:r>
-              <a:rPr sz="1050" b="0">
-                <a:solidFill>
-                  <a:srgbClr val="6F6F6F"/>
-                </a:solidFill>
-                <a:latin typeface="Noto Sans KR"/>
-                <a:ea typeface="Noto Sans KR"/>
-                <a:cs typeface="Noto Sans KR"/>
-              </a:rPr>
-              <a:t>촬영이 잘 풀리는 날, 계획에 없던 세팅을 그 자리에서 추가하는 팀입니다. 같은 예산에서 얻어가는 컷이 늘어납니다.</a:t>
-            </a:r>
-          </a:p>
-        </p:txBody>
-      </p:sp>
-      <p:sp>
-        <p:nvSpPr>
-          <p:cNvPr id="10" name="Rectangle 9"/>
-          <p:cNvSpPr/>
-          <p:nvPr/>
-        </p:nvSpPr>
-        <p:spPr>
-          <a:xfrm>
-            <a:off x="640080" y="4206240"/>
-            <a:ext cx="10911535" cy="11430"/>
-          </a:xfrm>
-          <a:prstGeom prst="rect">
-            <a:avLst/>
-          </a:prstGeom>
-          <a:solidFill>
-            <a:srgbClr val="E5E5E3"/>
-          </a:solidFill>
-          <a:ln>
-            <a:noFill/>
-          </a:ln>
-          <a:effectLst/>
-        </p:spPr>
-        <p:txBody>
-          <a:bodyPr rtlCol="0" anchor="ctr"/>
-          <a:lstStyle/>
-          <a:p>
-            <a:pPr algn="ctr"/>
-          </a:p>
-        </p:txBody>
-      </p:sp>
-      <p:sp>
-        <p:nvSpPr>
-          <p:cNvPr id="11" name="TextBox 10"/>
+                <a:latin typeface="Jost"/>
+                <a:ea typeface="Noto Sans KR"/>
+                <a:cs typeface="Noto Sans KR"/>
+              </a:rPr>
+              <a:t>YEOKSAM.</a:t>
+            </a:r>
+          </a:p>
+        </p:txBody>
+      </p:sp>
+      <p:sp>
+        <p:nvSpPr>
+          <p:cNvPr id="8" name="TextBox 7"/>
           <p:cNvSpPr txBox="1"/>
           <p:nvPr/>
         </p:nvSpPr>
         <p:spPr>
           <a:xfrm>
-            <a:off x="6415887" y="4480560"/>
-            <a:ext cx="4815687" cy="1600200"/>
+            <a:off x="603504" y="3794760"/>
+            <a:ext cx="5577840" cy="548640"/>
           </a:xfrm>
           <a:prstGeom prst="rect">
             <a:avLst/>
@@ -4769,37 +5118,9 @@
           </a:bodyPr>
           <a:lstStyle/>
           <a:p>
-            <a:pPr algn="l">
-              <a:lnSpc>
-                <a:spcPct val="145000"/>
-              </a:lnSpc>
-              <a:spcAft>
-                <a:spcPts val="600"/>
-              </a:spcAft>
-            </a:pPr>
-            <a:r>
-              <a:rPr sz="1000" b="0" spc="150">
-                <a:solidFill>
-                  <a:srgbClr val="A3A3A3"/>
-                </a:solidFill>
-                <a:latin typeface="Jost"/>
-                <a:ea typeface="Noto Sans KR"/>
-                <a:cs typeface="Noto Sans KR"/>
-              </a:rPr>
-              <a:t>04</a:t>
-            </a:r>
-          </a:p>
-          <a:p>
-            <a:pPr algn="l">
-              <a:lnSpc>
-                <a:spcPct val="145000"/>
-              </a:lnSpc>
-              <a:spcAft>
-                <a:spcPts val="600"/>
-              </a:spcAft>
-            </a:pPr>
-            <a:r>
-              <a:rPr sz="1500" b="1">
+            <a:pPr algn="l"/>
+            <a:r>
+              <a:rPr sz="1600" b="1">
                 <a:solidFill>
                   <a:srgbClr val="0A0A0A"/>
                 </a:solidFill>
@@ -4807,72 +5128,21 @@
                 <a:ea typeface="Noto Sans KR"/>
                 <a:cs typeface="Noto Sans KR"/>
               </a:rPr>
-              <a:t>원본부터 다른 퀄리티</a:t>
-            </a:r>
-          </a:p>
-          <a:p>
-            <a:pPr algn="l">
-              <a:lnSpc>
-                <a:spcPct val="145000"/>
-              </a:lnSpc>
-              <a:spcAft>
-                <a:spcPts val="600"/>
-              </a:spcAft>
-            </a:pPr>
-            <a:r>
-              <a:rPr sz="1050" b="0">
-                <a:solidFill>
-                  <a:srgbClr val="6F6F6F"/>
-                </a:solidFill>
-                <a:latin typeface="Noto Sans KR"/>
-                <a:ea typeface="Noto Sans KR"/>
-                <a:cs typeface="Noto Sans KR"/>
-              </a:rPr>
-              <a:t>톤 정리만 거친 원본을 그대로 보여드릴 수 있는 촬영을 지향합니다. 보정은 원본을 살리는 마지막 손질입니다.</a:t>
-            </a:r>
-          </a:p>
-        </p:txBody>
-      </p:sp>
-      <p:sp>
-        <p:nvSpPr>
-          <p:cNvPr id="12" name="Rectangle 11"/>
-          <p:cNvSpPr/>
-          <p:nvPr/>
-        </p:nvSpPr>
-        <p:spPr>
-          <a:xfrm>
-            <a:off x="6090132" y="2148840"/>
-            <a:ext cx="11430" cy="4114800"/>
-          </a:xfrm>
-          <a:prstGeom prst="rect">
-            <a:avLst/>
-          </a:prstGeom>
-          <a:solidFill>
-            <a:srgbClr val="E5E5E3"/>
-          </a:solidFill>
-          <a:ln>
-            <a:noFill/>
-          </a:ln>
-          <a:effectLst/>
-        </p:spPr>
-        <p:txBody>
-          <a:bodyPr rtlCol="0" anchor="ctr"/>
-          <a:lstStyle/>
-          <a:p>
-            <a:pPr algn="ctr"/>
-          </a:p>
-        </p:txBody>
-      </p:sp>
-      <p:sp>
-        <p:nvSpPr>
-          <p:cNvPr id="13" name="TextBox 12"/>
+              <a:t>서울 강남구 역삼동 783-2, B1</a:t>
+            </a:r>
+          </a:p>
+        </p:txBody>
+      </p:sp>
+      <p:sp>
+        <p:nvSpPr>
+          <p:cNvPr id="9" name="TextBox 8"/>
           <p:cNvSpPr txBox="1"/>
           <p:nvPr/>
         </p:nvSpPr>
         <p:spPr>
           <a:xfrm>
-            <a:off x="640080" y="6473952"/>
-            <a:ext cx="3657600" cy="274320"/>
+            <a:off x="603504" y="4434840"/>
+            <a:ext cx="5394960" cy="1645920"/>
           </a:xfrm>
           <a:prstGeom prst="rect">
             <a:avLst/>
@@ -4885,31 +5155,59 @@
           </a:bodyPr>
           <a:lstStyle/>
           <a:p>
-            <a:pPr algn="l"/>
-            <a:r>
-              <a:rPr sz="800" b="0" spc="150">
-                <a:solidFill>
-                  <a:srgbClr val="A3A3A3"/>
-                </a:solidFill>
-                <a:latin typeface="Jost"/>
-                <a:ea typeface="Noto Sans KR"/>
-                <a:cs typeface="Noto Sans KR"/>
-              </a:rPr>
-              <a:t>STUDIO. HOLYMOLLY</a:t>
-            </a:r>
-          </a:p>
-        </p:txBody>
-      </p:sp>
-      <p:sp>
-        <p:nvSpPr>
-          <p:cNvPr id="14" name="TextBox 13"/>
+            <a:pPr algn="l">
+              <a:lnSpc>
+                <a:spcPct val="160000"/>
+              </a:lnSpc>
+              <a:spcAft>
+                <a:spcPts val="800"/>
+              </a:spcAft>
+            </a:pPr>
+            <a:r>
+              <a:rPr sz="1050" b="0">
+                <a:solidFill>
+                  <a:srgbClr val="6F6F6F"/>
+                </a:solidFill>
+                <a:latin typeface="Noto Sans KR"/>
+                <a:ea typeface="Noto Sans KR"/>
+                <a:cs typeface="Noto Sans KR"/>
+              </a:rPr>
+              <a:t>제품 · 뷰티 · F&amp;B 촬영에 맞춘 세팅으로 운영하며, 컨셉에 따라 로케이션 촬영도 진행합니다.</a:t>
+            </a:r>
+          </a:p>
+          <a:p>
+            <a:pPr algn="l">
+              <a:lnSpc>
+                <a:spcPct val="160000"/>
+              </a:lnSpc>
+              <a:spcAft>
+                <a:spcPts val="800"/>
+              </a:spcAft>
+            </a:pPr>
+            <a:r>
+              <a:rPr sz="1050" b="0">
+                <a:solidFill>
+                  <a:srgbClr val="6F6F6F"/>
+                </a:solidFill>
+                <a:latin typeface="Noto Sans KR"/>
+                <a:ea typeface="Noto Sans KR"/>
+                <a:cs typeface="Noto Sans KR"/>
+              </a:rPr>
+              <a:t>방문 상담은 이메일 또는 문의 폼으로 일정을 잡아주세요.</a:t>
+            </a:r>
+          </a:p>
+        </p:txBody>
+      </p:sp>
+      <p:sp>
+        <p:nvSpPr>
+          <p:cNvPr id="10" name="TextBox 9"/>
           <p:cNvSpPr txBox="1"/>
           <p:nvPr/>
         </p:nvSpPr>
         <p:spPr>
           <a:xfrm>
-            <a:off x="10637215" y="6473952"/>
-            <a:ext cx="914400" cy="274320"/>
+            <a:off x="603504" y="6309360"/>
+            <a:ext cx="1097280" cy="274320"/>
           </a:xfrm>
           <a:prstGeom prst="rect">
             <a:avLst/>
@@ -4922,11 +5220,11 @@
           </a:bodyPr>
           <a:lstStyle/>
           <a:p>
-            <a:pPr algn="r"/>
-            <a:r>
-              <a:rPr sz="800" b="0" spc="150">
-                <a:solidFill>
-                  <a:srgbClr val="A3A3A3"/>
+            <a:pPr algn="l"/>
+            <a:r>
+              <a:rPr sz="900" b="0" spc="220">
+                <a:solidFill>
+                  <a:srgbClr val="6F6F6F"/>
                 </a:solidFill>
                 <a:latin typeface="Jost"/>
                 <a:ea typeface="Noto Sans KR"/>
@@ -4993,8 +5291,8 @@
         </p:nvSpPr>
         <p:spPr>
           <a:xfrm>
-            <a:off x="640080" y="502920"/>
-            <a:ext cx="7315200" cy="320040"/>
+            <a:off x="603504" y="310896"/>
+            <a:ext cx="8229600" cy="274320"/>
           </a:xfrm>
           <a:prstGeom prst="rect">
             <a:avLst/>
@@ -5009,7 +5307,7 @@
           <a:p>
             <a:pPr algn="l"/>
             <a:r>
-              <a:rPr sz="1000" b="0" spc="200">
+              <a:rPr sz="900" b="0" spc="220">
                 <a:solidFill>
                   <a:srgbClr val="8A8A8A"/>
                 </a:solidFill>
@@ -5017,7 +5315,7 @@
                 <a:ea typeface="Noto Sans KR"/>
                 <a:cs typeface="Noto Sans KR"/>
               </a:rPr>
-              <a:t>PROCESS</a:t>
+              <a:t>CONTACT</a:t>
             </a:r>
           </a:p>
         </p:txBody>
@@ -5030,8 +5328,8 @@
         </p:nvSpPr>
         <p:spPr>
           <a:xfrm>
-            <a:off x="640080" y="914400"/>
-            <a:ext cx="10911535" cy="822960"/>
+            <a:off x="566928" y="1234440"/>
+            <a:ext cx="12344400" cy="3657600"/>
           </a:xfrm>
           <a:prstGeom prst="rect">
             <a:avLst/>
@@ -5044,17 +5342,39 @@
           </a:bodyPr>
           <a:lstStyle/>
           <a:p>
-            <a:pPr algn="l"/>
-            <a:r>
-              <a:rPr sz="2400" b="1">
+            <a:pPr algn="l">
+              <a:lnSpc>
+                <a:spcPct val="102000"/>
+              </a:lnSpc>
+            </a:pPr>
+            <a:r>
+              <a:rPr sz="12000" b="0" spc="150">
                 <a:solidFill>
                   <a:srgbClr val="FAFAF8"/>
                 </a:solidFill>
-                <a:latin typeface="Noto Sans KR"/>
-                <a:ea typeface="Noto Sans KR"/>
-                <a:cs typeface="Noto Sans KR"/>
-              </a:rPr>
-              <a:t>상담부터 전달까지, 네 걸음</a:t>
+                <a:latin typeface="Jost"/>
+                <a:ea typeface="Noto Sans KR"/>
+                <a:cs typeface="Noto Sans KR"/>
+              </a:rPr>
+              <a:t>START</a:t>
+            </a:r>
+          </a:p>
+          <a:p>
+            <a:pPr algn="l">
+              <a:lnSpc>
+                <a:spcPct val="102000"/>
+              </a:lnSpc>
+            </a:pPr>
+            <a:r>
+              <a:rPr sz="12000" b="0" spc="150">
+                <a:solidFill>
+                  <a:srgbClr val="FAFAF8"/>
+                </a:solidFill>
+                <a:latin typeface="Jost"/>
+                <a:ea typeface="Noto Sans KR"/>
+                <a:cs typeface="Noto Sans KR"/>
+              </a:rPr>
+              <a:t>A PROJECT →</a:t>
             </a:r>
           </a:p>
         </p:txBody>
@@ -5067,8 +5387,8 @@
         </p:nvSpPr>
         <p:spPr>
           <a:xfrm>
-            <a:off x="640080" y="2194560"/>
-            <a:ext cx="10911535" cy="11430"/>
+            <a:off x="603504" y="5394960"/>
+            <a:ext cx="10984687" cy="12700"/>
           </a:xfrm>
           <a:prstGeom prst="rect">
             <a:avLst/>
@@ -5097,8 +5417,8 @@
         </p:nvSpPr>
         <p:spPr>
           <a:xfrm>
-            <a:off x="640080" y="2606040"/>
-            <a:ext cx="2224963" cy="2926080"/>
+            <a:off x="603504" y="5650992"/>
+            <a:ext cx="2426131" cy="914400"/>
           </a:xfrm>
           <a:prstGeom prst="rect">
             <a:avLst/>
@@ -5113,108 +5433,51 @@
           <a:p>
             <a:pPr algn="l">
               <a:lnSpc>
-                <a:spcPct val="150000"/>
+                <a:spcPct val="180000"/>
               </a:lnSpc>
-              <a:spcAft>
-                <a:spcPts val="800"/>
-              </a:spcAft>
             </a:pPr>
             <a:r>
-              <a:rPr sz="1000" b="0" spc="150">
-                <a:solidFill>
-                  <a:srgbClr val="6F6F6F"/>
+              <a:rPr sz="850" b="0" spc="200">
+                <a:solidFill>
+                  <a:srgbClr val="8A8A8A"/>
                 </a:solidFill>
                 <a:latin typeface="Jost"/>
                 <a:ea typeface="Noto Sans KR"/>
                 <a:cs typeface="Noto Sans KR"/>
               </a:rPr>
-              <a:t>01</a:t>
+              <a:t>EMAIL</a:t>
             </a:r>
           </a:p>
           <a:p>
             <a:pPr algn="l">
               <a:lnSpc>
-                <a:spcPct val="150000"/>
+                <a:spcPct val="180000"/>
               </a:lnSpc>
-              <a:spcAft>
-                <a:spcPts val="800"/>
-              </a:spcAft>
             </a:pPr>
             <a:r>
-              <a:rPr sz="1450" b="1">
+              <a:rPr sz="1050" b="1">
                 <a:solidFill>
                   <a:srgbClr val="FAFAF8"/>
                 </a:solidFill>
-                <a:latin typeface="Noto Sans KR"/>
-                <a:ea typeface="Noto Sans KR"/>
-                <a:cs typeface="Noto Sans KR"/>
-              </a:rPr>
-              <a:t>상담 · 기획</a:t>
-            </a:r>
-          </a:p>
-          <a:p>
-            <a:pPr algn="l">
-              <a:lnSpc>
-                <a:spcPct val="150000"/>
-              </a:lnSpc>
-              <a:spcAft>
-                <a:spcPts val="800"/>
-              </a:spcAft>
-            </a:pPr>
-            <a:r>
-              <a:rPr sz="1000" b="0">
-                <a:solidFill>
-                  <a:srgbClr val="909090"/>
-                </a:solidFill>
-                <a:latin typeface="Noto Sans KR"/>
-                <a:ea typeface="Noto Sans KR"/>
-                <a:cs typeface="Noto Sans KR"/>
-              </a:rPr>
-              <a:t>문의 주시면 24시간 안에 답장드립니다. 목적과 무드를 듣고, 레퍼런스와 세팅 방향, 견적을 제안합니다.</a:t>
-            </a:r>
-          </a:p>
-        </p:txBody>
-      </p:sp>
-      <p:sp>
-        <p:nvSpPr>
-          <p:cNvPr id="7" name="Rectangle 6"/>
-          <p:cNvSpPr/>
-          <p:nvPr/>
-        </p:nvSpPr>
-        <p:spPr>
-          <a:xfrm>
-            <a:off x="3362248" y="2194560"/>
-            <a:ext cx="11430" cy="3291840"/>
-          </a:xfrm>
-          <a:prstGeom prst="rect">
-            <a:avLst/>
-          </a:prstGeom>
-          <a:solidFill>
-            <a:srgbClr val="2E2E2E"/>
-          </a:solidFill>
-          <a:ln>
-            <a:noFill/>
-          </a:ln>
-          <a:effectLst/>
-        </p:spPr>
-        <p:txBody>
-          <a:bodyPr rtlCol="0" anchor="ctr"/>
-          <a:lstStyle/>
-          <a:p>
-            <a:pPr algn="ctr"/>
-          </a:p>
-        </p:txBody>
-      </p:sp>
-      <p:sp>
-        <p:nvSpPr>
-          <p:cNvPr id="8" name="TextBox 7"/>
+                <a:latin typeface="Jost"/>
+                <a:ea typeface="Noto Sans KR"/>
+                <a:cs typeface="Noto Sans KR"/>
+              </a:rPr>
+              <a:t>studio.holymolly@gmail.com</a:t>
+            </a:r>
+          </a:p>
+        </p:txBody>
+      </p:sp>
+      <p:sp>
+        <p:nvSpPr>
+          <p:cNvPr id="7" name="TextBox 6"/>
           <p:cNvSpPr txBox="1"/>
           <p:nvPr/>
         </p:nvSpPr>
         <p:spPr>
           <a:xfrm>
-            <a:off x="3642283" y="2606040"/>
-            <a:ext cx="2224963" cy="2926080"/>
+            <a:off x="3349675" y="5650992"/>
+            <a:ext cx="2426131" cy="914400"/>
           </a:xfrm>
           <a:prstGeom prst="rect">
             <a:avLst/>
@@ -5229,108 +5492,51 @@
           <a:p>
             <a:pPr algn="l">
               <a:lnSpc>
-                <a:spcPct val="150000"/>
+                <a:spcPct val="180000"/>
               </a:lnSpc>
-              <a:spcAft>
-                <a:spcPts val="800"/>
-              </a:spcAft>
             </a:pPr>
             <a:r>
-              <a:rPr sz="1000" b="0" spc="150">
-                <a:solidFill>
-                  <a:srgbClr val="6F6F6F"/>
+              <a:rPr sz="850" b="0" spc="200">
+                <a:solidFill>
+                  <a:srgbClr val="8A8A8A"/>
                 </a:solidFill>
                 <a:latin typeface="Jost"/>
                 <a:ea typeface="Noto Sans KR"/>
                 <a:cs typeface="Noto Sans KR"/>
               </a:rPr>
-              <a:t>02</a:t>
+              <a:t>INSTAGRAM · THREADS</a:t>
             </a:r>
           </a:p>
           <a:p>
             <a:pPr algn="l">
               <a:lnSpc>
-                <a:spcPct val="150000"/>
+                <a:spcPct val="180000"/>
               </a:lnSpc>
-              <a:spcAft>
-                <a:spcPts val="800"/>
-              </a:spcAft>
             </a:pPr>
             <a:r>
-              <a:rPr sz="1450" b="1">
+              <a:rPr sz="1150" b="1">
                 <a:solidFill>
                   <a:srgbClr val="FAFAF8"/>
                 </a:solidFill>
-                <a:latin typeface="Noto Sans KR"/>
-                <a:ea typeface="Noto Sans KR"/>
-                <a:cs typeface="Noto Sans KR"/>
-              </a:rPr>
-              <a:t>촬영</a:t>
-            </a:r>
-          </a:p>
-          <a:p>
-            <a:pPr algn="l">
-              <a:lnSpc>
-                <a:spcPct val="150000"/>
-              </a:lnSpc>
-              <a:spcAft>
-                <a:spcPts val="800"/>
-              </a:spcAft>
-            </a:pPr>
-            <a:r>
-              <a:rPr sz="1000" b="0">
-                <a:solidFill>
-                  <a:srgbClr val="909090"/>
-                </a:solidFill>
-                <a:latin typeface="Noto Sans KR"/>
-                <a:ea typeface="Noto Sans KR"/>
-                <a:cs typeface="Noto Sans KR"/>
-              </a:rPr>
-              <a:t>역삼 스튜디오 또는 로케이션에서. 현장에서 컷을 함께 확인하며, 좋은 장면이 보이면 그 자리에서 더 만듭니다.</a:t>
-            </a:r>
-          </a:p>
-        </p:txBody>
-      </p:sp>
-      <p:sp>
-        <p:nvSpPr>
-          <p:cNvPr id="9" name="Rectangle 8"/>
-          <p:cNvSpPr/>
-          <p:nvPr/>
-        </p:nvSpPr>
-        <p:spPr>
-          <a:xfrm>
-            <a:off x="6090132" y="2194560"/>
-            <a:ext cx="11430" cy="3291840"/>
-          </a:xfrm>
-          <a:prstGeom prst="rect">
-            <a:avLst/>
-          </a:prstGeom>
-          <a:solidFill>
-            <a:srgbClr val="2E2E2E"/>
-          </a:solidFill>
-          <a:ln>
-            <a:noFill/>
-          </a:ln>
-          <a:effectLst/>
-        </p:spPr>
-        <p:txBody>
-          <a:bodyPr rtlCol="0" anchor="ctr"/>
-          <a:lstStyle/>
-          <a:p>
-            <a:pPr algn="ctr"/>
-          </a:p>
-        </p:txBody>
-      </p:sp>
-      <p:sp>
-        <p:nvSpPr>
-          <p:cNvPr id="10" name="TextBox 9"/>
+                <a:latin typeface="Jost"/>
+                <a:ea typeface="Noto Sans KR"/>
+                <a:cs typeface="Noto Sans KR"/>
+              </a:rPr>
+              <a:t>@studio_holymolly</a:t>
+            </a:r>
+          </a:p>
+        </p:txBody>
+      </p:sp>
+      <p:sp>
+        <p:nvSpPr>
+          <p:cNvPr id="8" name="TextBox 7"/>
           <p:cNvSpPr txBox="1"/>
           <p:nvPr/>
         </p:nvSpPr>
         <p:spPr>
           <a:xfrm>
-            <a:off x="6370167" y="2606040"/>
-            <a:ext cx="2224963" cy="2926080"/>
+            <a:off x="6095847" y="5650992"/>
+            <a:ext cx="2426131" cy="914400"/>
           </a:xfrm>
           <a:prstGeom prst="rect">
             <a:avLst/>
@@ -5345,108 +5551,51 @@
           <a:p>
             <a:pPr algn="l">
               <a:lnSpc>
-                <a:spcPct val="150000"/>
+                <a:spcPct val="180000"/>
               </a:lnSpc>
-              <a:spcAft>
-                <a:spcPts val="800"/>
-              </a:spcAft>
             </a:pPr>
             <a:r>
-              <a:rPr sz="1000" b="0" spc="150">
-                <a:solidFill>
-                  <a:srgbClr val="6F6F6F"/>
+              <a:rPr sz="850" b="0" spc="200">
+                <a:solidFill>
+                  <a:srgbClr val="8A8A8A"/>
                 </a:solidFill>
                 <a:latin typeface="Jost"/>
                 <a:ea typeface="Noto Sans KR"/>
                 <a:cs typeface="Noto Sans KR"/>
               </a:rPr>
-              <a:t>03</a:t>
+              <a:t>PORTFOLIO</a:t>
             </a:r>
           </a:p>
           <a:p>
             <a:pPr algn="l">
               <a:lnSpc>
-                <a:spcPct val="150000"/>
+                <a:spcPct val="180000"/>
               </a:lnSpc>
-              <a:spcAft>
-                <a:spcPts val="800"/>
-              </a:spcAft>
             </a:pPr>
             <a:r>
-              <a:rPr sz="1450" b="1">
+              <a:rPr sz="950" b="1">
                 <a:solidFill>
                   <a:srgbClr val="FAFAF8"/>
                 </a:solidFill>
-                <a:latin typeface="Noto Sans KR"/>
-                <a:ea typeface="Noto Sans KR"/>
-                <a:cs typeface="Noto Sans KR"/>
-              </a:rPr>
-              <a:t>셀렉 · 리터칭</a:t>
-            </a:r>
-          </a:p>
-          <a:p>
-            <a:pPr algn="l">
-              <a:lnSpc>
-                <a:spcPct val="150000"/>
-              </a:lnSpc>
-              <a:spcAft>
-                <a:spcPts val="800"/>
-              </a:spcAft>
-            </a:pPr>
-            <a:r>
-              <a:rPr sz="1000" b="0">
-                <a:solidFill>
-                  <a:srgbClr val="909090"/>
-                </a:solidFill>
-                <a:latin typeface="Noto Sans KR"/>
-                <a:ea typeface="Noto Sans KR"/>
-                <a:cs typeface="Noto Sans KR"/>
-              </a:rPr>
-              <a:t>촬영 컷을 정리해 보내드리고, 고르신 컷을 정성껏 보정합니다. 피드백을 주고받으며 디테일을 다듬습니다.</a:t>
-            </a:r>
-          </a:p>
-        </p:txBody>
-      </p:sp>
-      <p:sp>
-        <p:nvSpPr>
-          <p:cNvPr id="11" name="Rectangle 10"/>
-          <p:cNvSpPr/>
-          <p:nvPr/>
-        </p:nvSpPr>
-        <p:spPr>
-          <a:xfrm>
-            <a:off x="8818016" y="2194560"/>
-            <a:ext cx="11430" cy="3291840"/>
-          </a:xfrm>
-          <a:prstGeom prst="rect">
-            <a:avLst/>
-          </a:prstGeom>
-          <a:solidFill>
-            <a:srgbClr val="2E2E2E"/>
-          </a:solidFill>
-          <a:ln>
-            <a:noFill/>
-          </a:ln>
-          <a:effectLst/>
-        </p:spPr>
-        <p:txBody>
-          <a:bodyPr rtlCol="0" anchor="ctr"/>
-          <a:lstStyle/>
-          <a:p>
-            <a:pPr algn="ctr"/>
-          </a:p>
-        </p:txBody>
-      </p:sp>
-      <p:sp>
-        <p:nvSpPr>
-          <p:cNvPr id="12" name="TextBox 11"/>
+                <a:latin typeface="Jost"/>
+                <a:ea typeface="Noto Sans KR"/>
+                <a:cs typeface="Noto Sans KR"/>
+              </a:rPr>
+              <a:t>studioholymolly.myportfolio.com</a:t>
+            </a:r>
+          </a:p>
+        </p:txBody>
+      </p:sp>
+      <p:sp>
+        <p:nvSpPr>
+          <p:cNvPr id="9" name="TextBox 8"/>
           <p:cNvSpPr txBox="1"/>
           <p:nvPr/>
         </p:nvSpPr>
         <p:spPr>
           <a:xfrm>
-            <a:off x="9098051" y="2606040"/>
-            <a:ext cx="2224963" cy="2926080"/>
+            <a:off x="8842019" y="5650992"/>
+            <a:ext cx="2426131" cy="914400"/>
           </a:xfrm>
           <a:prstGeom prst="rect">
             <a:avLst/>
@@ -5461,35 +5610,29 @@
           <a:p>
             <a:pPr algn="l">
               <a:lnSpc>
-                <a:spcPct val="150000"/>
+                <a:spcPct val="180000"/>
               </a:lnSpc>
-              <a:spcAft>
-                <a:spcPts val="800"/>
-              </a:spcAft>
             </a:pPr>
             <a:r>
-              <a:rPr sz="1000" b="0" spc="150">
-                <a:solidFill>
-                  <a:srgbClr val="6F6F6F"/>
+              <a:rPr sz="850" b="0" spc="200">
+                <a:solidFill>
+                  <a:srgbClr val="8A8A8A"/>
                 </a:solidFill>
                 <a:latin typeface="Jost"/>
                 <a:ea typeface="Noto Sans KR"/>
                 <a:cs typeface="Noto Sans KR"/>
               </a:rPr>
-              <a:t>04</a:t>
+              <a:t>ADDRESS</a:t>
             </a:r>
           </a:p>
           <a:p>
             <a:pPr algn="l">
               <a:lnSpc>
-                <a:spcPct val="150000"/>
+                <a:spcPct val="180000"/>
               </a:lnSpc>
-              <a:spcAft>
-                <a:spcPts val="800"/>
-              </a:spcAft>
             </a:pPr>
             <a:r>
-              <a:rPr sz="1450" b="1">
+              <a:rPr sz="1150" b="1">
                 <a:solidFill>
                   <a:srgbClr val="FAFAF8"/>
                 </a:solidFill>
@@ -5497,102 +5640,7 @@
                 <a:ea typeface="Noto Sans KR"/>
                 <a:cs typeface="Noto Sans KR"/>
               </a:rPr>
-              <a:t>전달</a:t>
-            </a:r>
-          </a:p>
-          <a:p>
-            <a:pPr algn="l">
-              <a:lnSpc>
-                <a:spcPct val="150000"/>
-              </a:lnSpc>
-              <a:spcAft>
-                <a:spcPts val="800"/>
-              </a:spcAft>
-            </a:pPr>
-            <a:r>
-              <a:rPr sz="1000" b="0">
-                <a:solidFill>
-                  <a:srgbClr val="909090"/>
-                </a:solidFill>
-                <a:latin typeface="Noto Sans KR"/>
-                <a:ea typeface="Noto Sans KR"/>
-                <a:cs typeface="Noto Sans KR"/>
-              </a:rPr>
-              <a:t>합의된 일정에 고해상도 완성본을 전달합니다. 사용하실 채널에 맞춘 포맷 정리도 함께합니다.</a:t>
-            </a:r>
-          </a:p>
-        </p:txBody>
-      </p:sp>
-      <p:sp>
-        <p:nvSpPr>
-          <p:cNvPr id="13" name="TextBox 12"/>
-          <p:cNvSpPr txBox="1"/>
-          <p:nvPr/>
-        </p:nvSpPr>
-        <p:spPr>
-          <a:xfrm>
-            <a:off x="640080" y="6473952"/>
-            <a:ext cx="3657600" cy="274320"/>
-          </a:xfrm>
-          <a:prstGeom prst="rect">
-            <a:avLst/>
-          </a:prstGeom>
-          <a:noFill/>
-        </p:spPr>
-        <p:txBody>
-          <a:bodyPr wrap="square" anchor="t" lIns="0" rIns="0" tIns="0" bIns="0">
-            <a:spAutoFit/>
-          </a:bodyPr>
-          <a:lstStyle/>
-          <a:p>
-            <a:pPr algn="l"/>
-            <a:r>
-              <a:rPr sz="800" b="0" spc="150">
-                <a:solidFill>
-                  <a:srgbClr val="6F6F6F"/>
-                </a:solidFill>
-                <a:latin typeface="Jost"/>
-                <a:ea typeface="Noto Sans KR"/>
-                <a:cs typeface="Noto Sans KR"/>
-              </a:rPr>
-              <a:t>STUDIO. HOLYMOLLY</a:t>
-            </a:r>
-          </a:p>
-        </p:txBody>
-      </p:sp>
-      <p:sp>
-        <p:nvSpPr>
-          <p:cNvPr id="14" name="TextBox 13"/>
-          <p:cNvSpPr txBox="1"/>
-          <p:nvPr/>
-        </p:nvSpPr>
-        <p:spPr>
-          <a:xfrm>
-            <a:off x="10637215" y="6473952"/>
-            <a:ext cx="914400" cy="274320"/>
-          </a:xfrm>
-          <a:prstGeom prst="rect">
-            <a:avLst/>
-          </a:prstGeom>
-          <a:noFill/>
-        </p:spPr>
-        <p:txBody>
-          <a:bodyPr wrap="square" anchor="t" lIns="0" rIns="0" tIns="0" bIns="0">
-            <a:spAutoFit/>
-          </a:bodyPr>
-          <a:lstStyle/>
-          <a:p>
-            <a:pPr algn="r"/>
-            <a:r>
-              <a:rPr sz="800" b="0" spc="150">
-                <a:solidFill>
-                  <a:srgbClr val="6F6F6F"/>
-                </a:solidFill>
-                <a:latin typeface="Jost"/>
-                <a:ea typeface="Noto Sans KR"/>
-                <a:cs typeface="Noto Sans KR"/>
-              </a:rPr>
-              <a:t>13</a:t>
+              <a:t>역삼동 783-2, B1</a:t>
             </a:r>
           </a:p>
         </p:txBody>
@@ -5653,8 +5701,8 @@
         </p:nvSpPr>
         <p:spPr>
           <a:xfrm>
-            <a:off x="640080" y="502920"/>
-            <a:ext cx="7315200" cy="320040"/>
+            <a:off x="0" y="2880360"/>
+            <a:ext cx="12191695" cy="640080"/>
           </a:xfrm>
           <a:prstGeom prst="rect">
             <a:avLst/>
@@ -5667,17 +5715,17 @@
           </a:bodyPr>
           <a:lstStyle/>
           <a:p>
-            <a:pPr algn="l"/>
-            <a:r>
-              <a:rPr sz="1000" b="0" spc="200">
-                <a:solidFill>
-                  <a:srgbClr val="6F6F6F"/>
+            <a:pPr algn="ctr"/>
+            <a:r>
+              <a:rPr sz="2200" b="0" spc="350">
+                <a:solidFill>
+                  <a:srgbClr val="0A0A0A"/>
                 </a:solidFill>
                 <a:latin typeface="Jost"/>
                 <a:ea typeface="Noto Sans KR"/>
                 <a:cs typeface="Noto Sans KR"/>
               </a:rPr>
-              <a:t>STUDIO</a:t>
+              <a:t>STUDIO. HOLYMOLLY</a:t>
             </a:r>
           </a:p>
         </p:txBody>
@@ -5690,8 +5738,8 @@
         </p:nvSpPr>
         <p:spPr>
           <a:xfrm>
-            <a:off x="640080" y="1828800"/>
-            <a:ext cx="5303520" cy="731520"/>
+            <a:off x="0" y="3703320"/>
+            <a:ext cx="12191695" cy="365760"/>
           </a:xfrm>
           <a:prstGeom prst="rect">
             <a:avLst/>
@@ -5704,673 +5752,17 @@
           </a:bodyPr>
           <a:lstStyle/>
           <a:p>
-            <a:pPr algn="l"/>
-            <a:r>
-              <a:rPr sz="2400" b="1">
-                <a:solidFill>
-                  <a:srgbClr val="0A0A0A"/>
+            <a:pPr algn="ctr"/>
+            <a:r>
+              <a:rPr sz="900" b="0" spc="100">
+                <a:solidFill>
+                  <a:srgbClr val="A3A3A3"/>
                 </a:solidFill>
                 <a:latin typeface="Noto Sans KR"/>
                 <a:ea typeface="Noto Sans KR"/>
                 <a:cs typeface="Noto Sans KR"/>
               </a:rPr>
-              <a:t>역삼에 있습니다</a:t>
-            </a:r>
-          </a:p>
-        </p:txBody>
-      </p:sp>
-      <p:sp>
-        <p:nvSpPr>
-          <p:cNvPr id="5" name="TextBox 4"/>
-          <p:cNvSpPr txBox="1"/>
-          <p:nvPr/>
-        </p:nvSpPr>
-        <p:spPr>
-          <a:xfrm>
-            <a:off x="640080" y="2834640"/>
-            <a:ext cx="5029200" cy="2377440"/>
-          </a:xfrm>
-          <a:prstGeom prst="rect">
-            <a:avLst/>
-          </a:prstGeom>
-          <a:noFill/>
-        </p:spPr>
-        <p:txBody>
-          <a:bodyPr wrap="square" anchor="t" lIns="0" rIns="0" tIns="0" bIns="0">
-            <a:spAutoFit/>
-          </a:bodyPr>
-          <a:lstStyle/>
-          <a:p>
-            <a:pPr algn="l">
-              <a:lnSpc>
-                <a:spcPct val="155000"/>
-              </a:lnSpc>
-              <a:spcAft>
-                <a:spcPts val="600"/>
-              </a:spcAft>
-            </a:pPr>
-            <a:r>
-              <a:rPr sz="1400" b="1">
-                <a:solidFill>
-                  <a:srgbClr val="0A0A0A"/>
-                </a:solidFill>
-                <a:latin typeface="Noto Sans KR"/>
-                <a:ea typeface="Noto Sans KR"/>
-                <a:cs typeface="Noto Sans KR"/>
-              </a:rPr>
-              <a:t>서울 강남구 역삼동 783-2, B1</a:t>
-            </a:r>
-          </a:p>
-          <a:p>
-            <a:pPr algn="l">
-              <a:lnSpc>
-                <a:spcPct val="155000"/>
-              </a:lnSpc>
-              <a:spcAft>
-                <a:spcPts val="600"/>
-              </a:spcAft>
-            </a:pPr>
-            <a:r>
-              <a:rPr sz="800" b="0">
-                <a:solidFill>
-                  <a:srgbClr val="6F6F6F"/>
-                </a:solidFill>
-                <a:latin typeface="Jost"/>
-                <a:ea typeface="Noto Sans KR"/>
-                <a:cs typeface="Noto Sans KR"/>
-              </a:rPr>
-              <a:t/>
-            </a:r>
-          </a:p>
-          <a:p>
-            <a:pPr algn="l">
-              <a:lnSpc>
-                <a:spcPct val="155000"/>
-              </a:lnSpc>
-              <a:spcAft>
-                <a:spcPts val="600"/>
-              </a:spcAft>
-            </a:pPr>
-            <a:r>
-              <a:rPr sz="1150" b="0">
-                <a:solidFill>
-                  <a:srgbClr val="6F6F6F"/>
-                </a:solidFill>
-                <a:latin typeface="Noto Sans KR"/>
-                <a:ea typeface="Noto Sans KR"/>
-                <a:cs typeface="Noto Sans KR"/>
-              </a:rPr>
-              <a:t>제품 · 뷰티 · F&amp;B 촬영에 맞춘 세팅으로 운영하며, 컨셉에 따라 로케이션 촬영도 진행합니다.</a:t>
-            </a:r>
-          </a:p>
-          <a:p>
-            <a:pPr algn="l">
-              <a:lnSpc>
-                <a:spcPct val="155000"/>
-              </a:lnSpc>
-              <a:spcAft>
-                <a:spcPts val="600"/>
-              </a:spcAft>
-            </a:pPr>
-            <a:r>
-              <a:rPr sz="1150" b="0">
-                <a:solidFill>
-                  <a:srgbClr val="6F6F6F"/>
-                </a:solidFill>
-                <a:latin typeface="Noto Sans KR"/>
-                <a:ea typeface="Noto Sans KR"/>
-                <a:cs typeface="Noto Sans KR"/>
-              </a:rPr>
-              <a:t>방문 상담은 이메일 또는 문의 폼으로 일정을 잡아주세요.</a:t>
-            </a:r>
-          </a:p>
-        </p:txBody>
-      </p:sp>
-      <p:sp>
-        <p:nvSpPr>
-          <p:cNvPr id="6" name="Rectangle 5"/>
-          <p:cNvSpPr/>
-          <p:nvPr/>
-        </p:nvSpPr>
-        <p:spPr>
-          <a:xfrm>
-            <a:off x="6492240" y="1051560"/>
-            <a:ext cx="5029200" cy="4937760"/>
-          </a:xfrm>
-          <a:prstGeom prst="rect">
-            <a:avLst/>
-          </a:prstGeom>
-          <a:solidFill>
-            <a:srgbClr val="F0F0EE"/>
-          </a:solidFill>
-          <a:ln w="9525">
-            <a:solidFill>
-              <a:srgbClr val="E5E5E3"/>
-            </a:solidFill>
-          </a:ln>
-          <a:effectLst/>
-        </p:spPr>
-        <p:txBody>
-          <a:bodyPr rtlCol="0" anchor="ctr"/>
-          <a:lstStyle/>
-          <a:p>
-            <a:pPr algn="ctr"/>
-          </a:p>
-        </p:txBody>
-      </p:sp>
-      <p:sp>
-        <p:nvSpPr>
-          <p:cNvPr id="7" name="TextBox 6"/>
-          <p:cNvSpPr txBox="1"/>
-          <p:nvPr/>
-        </p:nvSpPr>
-        <p:spPr>
-          <a:xfrm>
-            <a:off x="6492240" y="1051560"/>
-            <a:ext cx="5029200" cy="4937760"/>
-          </a:xfrm>
-          <a:prstGeom prst="rect">
-            <a:avLst/>
-          </a:prstGeom>
-          <a:noFill/>
-        </p:spPr>
-        <p:txBody>
-          <a:bodyPr wrap="square" anchor="ctr" lIns="0" rIns="0" tIns="0" bIns="0">
-            <a:spAutoFit/>
-          </a:bodyPr>
-          <a:lstStyle/>
-          <a:p>
-            <a:pPr algn="ctr">
-              <a:spcAft>
-                <a:spcPts val="400"/>
-              </a:spcAft>
-            </a:pPr>
-            <a:r>
-              <a:rPr sz="1000" b="0" spc="250">
-                <a:solidFill>
-                  <a:srgbClr val="A3A3A3"/>
-                </a:solidFill>
-                <a:latin typeface="Jost"/>
-                <a:ea typeface="Noto Sans KR"/>
-                <a:cs typeface="Noto Sans KR"/>
-              </a:rPr>
-              <a:t>IMAGE</a:t>
-            </a:r>
-          </a:p>
-          <a:p>
-            <a:pPr algn="ctr">
-              <a:spcAft>
-                <a:spcPts val="400"/>
-              </a:spcAft>
-            </a:pPr>
-            <a:r>
-              <a:rPr sz="950" b="0">
-                <a:solidFill>
-                  <a:srgbClr val="A3A3A3"/>
-                </a:solidFill>
-                <a:latin typeface="Noto Sans KR"/>
-                <a:ea typeface="Noto Sans KR"/>
-                <a:cs typeface="Noto Sans KR"/>
-              </a:rPr>
-              <a:t>스튜디오 공간 컷으로 교체</a:t>
-            </a:r>
-          </a:p>
-        </p:txBody>
-      </p:sp>
-      <p:sp>
-        <p:nvSpPr>
-          <p:cNvPr id="8" name="TextBox 7"/>
-          <p:cNvSpPr txBox="1"/>
-          <p:nvPr/>
-        </p:nvSpPr>
-        <p:spPr>
-          <a:xfrm>
-            <a:off x="640080" y="6473952"/>
-            <a:ext cx="3657600" cy="274320"/>
-          </a:xfrm>
-          <a:prstGeom prst="rect">
-            <a:avLst/>
-          </a:prstGeom>
-          <a:noFill/>
-        </p:spPr>
-        <p:txBody>
-          <a:bodyPr wrap="square" anchor="t" lIns="0" rIns="0" tIns="0" bIns="0">
-            <a:spAutoFit/>
-          </a:bodyPr>
-          <a:lstStyle/>
-          <a:p>
-            <a:pPr algn="l"/>
-            <a:r>
-              <a:rPr sz="800" b="0" spc="150">
-                <a:solidFill>
-                  <a:srgbClr val="A3A3A3"/>
-                </a:solidFill>
-                <a:latin typeface="Jost"/>
-                <a:ea typeface="Noto Sans KR"/>
-                <a:cs typeface="Noto Sans KR"/>
-              </a:rPr>
-              <a:t>STUDIO. HOLYMOLLY</a:t>
-            </a:r>
-          </a:p>
-        </p:txBody>
-      </p:sp>
-      <p:sp>
-        <p:nvSpPr>
-          <p:cNvPr id="9" name="TextBox 8"/>
-          <p:cNvSpPr txBox="1"/>
-          <p:nvPr/>
-        </p:nvSpPr>
-        <p:spPr>
-          <a:xfrm>
-            <a:off x="10637215" y="6473952"/>
-            <a:ext cx="914400" cy="274320"/>
-          </a:xfrm>
-          <a:prstGeom prst="rect">
-            <a:avLst/>
-          </a:prstGeom>
-          <a:noFill/>
-        </p:spPr>
-        <p:txBody>
-          <a:bodyPr wrap="square" anchor="t" lIns="0" rIns="0" tIns="0" bIns="0">
-            <a:spAutoFit/>
-          </a:bodyPr>
-          <a:lstStyle/>
-          <a:p>
-            <a:pPr algn="r"/>
-            <a:r>
-              <a:rPr sz="800" b="0" spc="150">
-                <a:solidFill>
-                  <a:srgbClr val="A3A3A3"/>
-                </a:solidFill>
-                <a:latin typeface="Jost"/>
-                <a:ea typeface="Noto Sans KR"/>
-                <a:cs typeface="Noto Sans KR"/>
-              </a:rPr>
-              <a:t>14</a:t>
-            </a:r>
-          </a:p>
-        </p:txBody>
-      </p:sp>
-    </p:spTree>
-  </p:cSld>
-  <p:clrMapOvr>
-    <a:masterClrMapping/>
-  </p:clrMapOvr>
-</p:sld>
-</file>
-
-<file path=ppt/slides/slide15.xml><?xml version="1.0" encoding="utf-8"?>
-<p:sld xmlns:a="http://schemas.openxmlformats.org/drawingml/2006/main" xmlns:p="http://schemas.openxmlformats.org/presentationml/2006/main" xmlns:r="http://schemas.openxmlformats.org/officeDocument/2006/relationships">
-  <p:cSld>
-    <p:spTree>
-      <p:nvGrpSpPr>
-        <p:cNvPr id="1" name=""/>
-        <p:cNvGrpSpPr/>
-        <p:nvPr/>
-      </p:nvGrpSpPr>
-      <p:grpSpPr/>
-      <p:sp>
-        <p:nvSpPr>
-          <p:cNvPr id="2" name="Rectangle 1"/>
-          <p:cNvSpPr/>
-          <p:nvPr/>
-        </p:nvSpPr>
-        <p:spPr>
-          <a:xfrm>
-            <a:off x="0" y="0"/>
-            <a:ext cx="12191695" cy="6858000"/>
-          </a:xfrm>
-          <a:prstGeom prst="rect">
-            <a:avLst/>
-          </a:prstGeom>
-          <a:solidFill>
-            <a:srgbClr val="FAFAF8"/>
-          </a:solidFill>
-          <a:ln>
-            <a:noFill/>
-          </a:ln>
-          <a:effectLst/>
-        </p:spPr>
-        <p:txBody>
-          <a:bodyPr rtlCol="0" anchor="ctr"/>
-          <a:lstStyle/>
-          <a:p>
-            <a:pPr algn="ctr"/>
-          </a:p>
-        </p:txBody>
-      </p:sp>
-      <p:sp>
-        <p:nvSpPr>
-          <p:cNvPr id="3" name="TextBox 2"/>
-          <p:cNvSpPr txBox="1"/>
-          <p:nvPr/>
-        </p:nvSpPr>
-        <p:spPr>
-          <a:xfrm>
-            <a:off x="640080" y="502920"/>
-            <a:ext cx="7315200" cy="320040"/>
-          </a:xfrm>
-          <a:prstGeom prst="rect">
-            <a:avLst/>
-          </a:prstGeom>
-          <a:noFill/>
-        </p:spPr>
-        <p:txBody>
-          <a:bodyPr wrap="square" anchor="t" lIns="0" rIns="0" tIns="0" bIns="0">
-            <a:spAutoFit/>
-          </a:bodyPr>
-          <a:lstStyle/>
-          <a:p>
-            <a:pPr algn="l"/>
-            <a:r>
-              <a:rPr sz="1000" b="0" spc="200">
-                <a:solidFill>
-                  <a:srgbClr val="6F6F6F"/>
-                </a:solidFill>
-                <a:latin typeface="Jost"/>
-                <a:ea typeface="Noto Sans KR"/>
-                <a:cs typeface="Noto Sans KR"/>
-              </a:rPr>
-              <a:t>CONTACT</a:t>
-            </a:r>
-          </a:p>
-        </p:txBody>
-      </p:sp>
-      <p:sp>
-        <p:nvSpPr>
-          <p:cNvPr id="4" name="TextBox 3"/>
-          <p:cNvSpPr txBox="1"/>
-          <p:nvPr/>
-        </p:nvSpPr>
-        <p:spPr>
-          <a:xfrm>
-            <a:off x="612648" y="1828800"/>
-            <a:ext cx="10911535" cy="1463040"/>
-          </a:xfrm>
-          <a:prstGeom prst="rect">
-            <a:avLst/>
-          </a:prstGeom>
-          <a:noFill/>
-        </p:spPr>
-        <p:txBody>
-          <a:bodyPr wrap="square" anchor="t" lIns="0" rIns="0" tIns="0" bIns="0">
-            <a:spAutoFit/>
-          </a:bodyPr>
-          <a:lstStyle/>
-          <a:p>
-            <a:pPr algn="l"/>
-            <a:r>
-              <a:rPr sz="6400" b="0" spc="250">
-                <a:solidFill>
-                  <a:srgbClr val="0A0A0A"/>
-                </a:solidFill>
-                <a:latin typeface="Jost"/>
-                <a:ea typeface="Noto Sans KR"/>
-                <a:cs typeface="Noto Sans KR"/>
-              </a:rPr>
-              <a:t>START A PROJECT</a:t>
-            </a:r>
-          </a:p>
-        </p:txBody>
-      </p:sp>
-      <p:sp>
-        <p:nvSpPr>
-          <p:cNvPr id="5" name="Rectangle 4"/>
-          <p:cNvSpPr/>
-          <p:nvPr/>
-        </p:nvSpPr>
-        <p:spPr>
-          <a:xfrm>
-            <a:off x="640080" y="3657600"/>
-            <a:ext cx="10911535" cy="11430"/>
-          </a:xfrm>
-          <a:prstGeom prst="rect">
-            <a:avLst/>
-          </a:prstGeom>
-          <a:solidFill>
-            <a:srgbClr val="E5E5E3"/>
-          </a:solidFill>
-          <a:ln>
-            <a:noFill/>
-          </a:ln>
-          <a:effectLst/>
-        </p:spPr>
-        <p:txBody>
-          <a:bodyPr rtlCol="0" anchor="ctr"/>
-          <a:lstStyle/>
-          <a:p>
-            <a:pPr algn="ctr"/>
-          </a:p>
-        </p:txBody>
-      </p:sp>
-      <p:sp>
-        <p:nvSpPr>
-          <p:cNvPr id="6" name="TextBox 5"/>
-          <p:cNvSpPr txBox="1"/>
-          <p:nvPr/>
-        </p:nvSpPr>
-        <p:spPr>
-          <a:xfrm>
-            <a:off x="640080" y="4023360"/>
-            <a:ext cx="3271418" cy="1097280"/>
-          </a:xfrm>
-          <a:prstGeom prst="rect">
-            <a:avLst/>
-          </a:prstGeom>
-          <a:noFill/>
-        </p:spPr>
-        <p:txBody>
-          <a:bodyPr wrap="square" anchor="t" lIns="0" rIns="0" tIns="0" bIns="0">
-            <a:spAutoFit/>
-          </a:bodyPr>
-          <a:lstStyle/>
-          <a:p>
-            <a:pPr algn="l">
-              <a:lnSpc>
-                <a:spcPct val="160000"/>
-              </a:lnSpc>
-              <a:spcAft>
-                <a:spcPts val="600"/>
-              </a:spcAft>
-            </a:pPr>
-            <a:r>
-              <a:rPr sz="900" b="0" spc="200">
-                <a:solidFill>
-                  <a:srgbClr val="6F6F6F"/>
-                </a:solidFill>
-                <a:latin typeface="Jost"/>
-                <a:ea typeface="Noto Sans KR"/>
-                <a:cs typeface="Noto Sans KR"/>
-              </a:rPr>
-              <a:t>EMAIL</a:t>
-            </a:r>
-          </a:p>
-          <a:p>
-            <a:pPr algn="l">
-              <a:lnSpc>
-                <a:spcPct val="160000"/>
-              </a:lnSpc>
-              <a:spcAft>
-                <a:spcPts val="600"/>
-              </a:spcAft>
-            </a:pPr>
-            <a:r>
-              <a:rPr sz="1300" b="1">
-                <a:solidFill>
-                  <a:srgbClr val="0A0A0A"/>
-                </a:solidFill>
-                <a:latin typeface="Jost"/>
-                <a:ea typeface="Noto Sans KR"/>
-                <a:cs typeface="Noto Sans KR"/>
-              </a:rPr>
-              <a:t>studio.holymolly@gmail.com</a:t>
-            </a:r>
-          </a:p>
-        </p:txBody>
-      </p:sp>
-      <p:sp>
-        <p:nvSpPr>
-          <p:cNvPr id="7" name="TextBox 6"/>
-          <p:cNvSpPr txBox="1"/>
-          <p:nvPr/>
-        </p:nvSpPr>
-        <p:spPr>
-          <a:xfrm>
-            <a:off x="4277258" y="4023360"/>
-            <a:ext cx="3271418" cy="1097280"/>
-          </a:xfrm>
-          <a:prstGeom prst="rect">
-            <a:avLst/>
-          </a:prstGeom>
-          <a:noFill/>
-        </p:spPr>
-        <p:txBody>
-          <a:bodyPr wrap="square" anchor="t" lIns="0" rIns="0" tIns="0" bIns="0">
-            <a:spAutoFit/>
-          </a:bodyPr>
-          <a:lstStyle/>
-          <a:p>
-            <a:pPr algn="l">
-              <a:lnSpc>
-                <a:spcPct val="160000"/>
-              </a:lnSpc>
-              <a:spcAft>
-                <a:spcPts val="600"/>
-              </a:spcAft>
-            </a:pPr>
-            <a:r>
-              <a:rPr sz="900" b="0" spc="200">
-                <a:solidFill>
-                  <a:srgbClr val="6F6F6F"/>
-                </a:solidFill>
-                <a:latin typeface="Jost"/>
-                <a:ea typeface="Noto Sans KR"/>
-                <a:cs typeface="Noto Sans KR"/>
-              </a:rPr>
-              <a:t>INSTAGRAM · THREADS</a:t>
-            </a:r>
-          </a:p>
-          <a:p>
-            <a:pPr algn="l">
-              <a:lnSpc>
-                <a:spcPct val="160000"/>
-              </a:lnSpc>
-              <a:spcAft>
-                <a:spcPts val="600"/>
-              </a:spcAft>
-            </a:pPr>
-            <a:r>
-              <a:rPr sz="1300" b="1">
-                <a:solidFill>
-                  <a:srgbClr val="0A0A0A"/>
-                </a:solidFill>
-                <a:latin typeface="Jost"/>
-                <a:ea typeface="Noto Sans KR"/>
-                <a:cs typeface="Noto Sans KR"/>
-              </a:rPr>
-              <a:t>@studio_holymolly</a:t>
-            </a:r>
-          </a:p>
-        </p:txBody>
-      </p:sp>
-      <p:sp>
-        <p:nvSpPr>
-          <p:cNvPr id="8" name="TextBox 7"/>
-          <p:cNvSpPr txBox="1"/>
-          <p:nvPr/>
-        </p:nvSpPr>
-        <p:spPr>
-          <a:xfrm>
-            <a:off x="7914436" y="4023360"/>
-            <a:ext cx="3271418" cy="1097280"/>
-          </a:xfrm>
-          <a:prstGeom prst="rect">
-            <a:avLst/>
-          </a:prstGeom>
-          <a:noFill/>
-        </p:spPr>
-        <p:txBody>
-          <a:bodyPr wrap="square" anchor="t" lIns="0" rIns="0" tIns="0" bIns="0">
-            <a:spAutoFit/>
-          </a:bodyPr>
-          <a:lstStyle/>
-          <a:p>
-            <a:pPr algn="l">
-              <a:lnSpc>
-                <a:spcPct val="160000"/>
-              </a:lnSpc>
-              <a:spcAft>
-                <a:spcPts val="600"/>
-              </a:spcAft>
-            </a:pPr>
-            <a:r>
-              <a:rPr sz="900" b="0" spc="200">
-                <a:solidFill>
-                  <a:srgbClr val="6F6F6F"/>
-                </a:solidFill>
-                <a:latin typeface="Jost"/>
-                <a:ea typeface="Noto Sans KR"/>
-                <a:cs typeface="Noto Sans KR"/>
-              </a:rPr>
-              <a:t>PORTFOLIO</a:t>
-            </a:r>
-          </a:p>
-          <a:p>
-            <a:pPr algn="l">
-              <a:lnSpc>
-                <a:spcPct val="160000"/>
-              </a:lnSpc>
-              <a:spcAft>
-                <a:spcPts val="600"/>
-              </a:spcAft>
-            </a:pPr>
-            <a:r>
-              <a:rPr sz="1300" b="1">
-                <a:solidFill>
-                  <a:srgbClr val="0A0A0A"/>
-                </a:solidFill>
-                <a:latin typeface="Jost"/>
-                <a:ea typeface="Noto Sans KR"/>
-                <a:cs typeface="Noto Sans KR"/>
-              </a:rPr>
-              <a:t>studioholymolly.myportfolio.com</a:t>
-            </a:r>
-          </a:p>
-        </p:txBody>
-      </p:sp>
-      <p:sp>
-        <p:nvSpPr>
-          <p:cNvPr id="9" name="TextBox 8"/>
-          <p:cNvSpPr txBox="1"/>
-          <p:nvPr/>
-        </p:nvSpPr>
-        <p:spPr>
-          <a:xfrm>
-            <a:off x="640080" y="5943600"/>
-            <a:ext cx="10911535" cy="457200"/>
-          </a:xfrm>
-          <a:prstGeom prst="rect">
-            <a:avLst/>
-          </a:prstGeom>
-          <a:noFill/>
-        </p:spPr>
-        <p:txBody>
-          <a:bodyPr wrap="square" anchor="t" lIns="0" rIns="0" tIns="0" bIns="0">
-            <a:spAutoFit/>
-          </a:bodyPr>
-          <a:lstStyle/>
-          <a:p>
-            <a:pPr algn="l"/>
-            <a:r>
-              <a:rPr sz="1000" b="0">
-                <a:solidFill>
-                  <a:srgbClr val="A3A3A3"/>
-                </a:solidFill>
-                <a:latin typeface="Noto Sans KR"/>
-                <a:ea typeface="Noto Sans KR"/>
-                <a:cs typeface="Noto Sans KR"/>
-              </a:rPr>
-              <a:t>스튜디오 홀리몰리 — 서울 강남구 역삼동 783-2, B1</a:t>
+              <a:t>© 2026 — 서울 강남구 역삼동 783-2, B1</a:t>
             </a:r>
           </a:p>
         </p:txBody>
@@ -6408,7 +5800,7 @@
             <a:avLst/>
           </a:prstGeom>
           <a:solidFill>
-            <a:srgbClr val="FAFAF8"/>
+            <a:srgbClr val="111111"/>
           </a:solidFill>
           <a:ln>
             <a:noFill/>
@@ -6431,8 +5823,8 @@
         </p:nvSpPr>
         <p:spPr>
           <a:xfrm>
-            <a:off x="640080" y="502920"/>
-            <a:ext cx="7315200" cy="320040"/>
+            <a:off x="603504" y="310896"/>
+            <a:ext cx="8229600" cy="274320"/>
           </a:xfrm>
           <a:prstGeom prst="rect">
             <a:avLst/>
@@ -6447,9 +5839,9 @@
           <a:p>
             <a:pPr algn="l"/>
             <a:r>
-              <a:rPr sz="1000" b="0" spc="200">
-                <a:solidFill>
-                  <a:srgbClr val="6F6F6F"/>
+              <a:rPr sz="900" b="0" spc="220">
+                <a:solidFill>
+                  <a:srgbClr val="8A8A8A"/>
                 </a:solidFill>
                 <a:latin typeface="Jost"/>
                 <a:ea typeface="Noto Sans KR"/>
@@ -6468,8 +5860,8 @@
         </p:nvSpPr>
         <p:spPr>
           <a:xfrm>
-            <a:off x="640080" y="1920240"/>
-            <a:ext cx="10911535" cy="2651760"/>
+            <a:off x="603504" y="2011680"/>
+            <a:ext cx="11155680" cy="3291840"/>
           </a:xfrm>
           <a:prstGeom prst="rect">
             <a:avLst/>
@@ -6484,13 +5876,13 @@
           <a:p>
             <a:pPr algn="l">
               <a:lnSpc>
-                <a:spcPct val="140000"/>
+                <a:spcPct val="132000"/>
               </a:lnSpc>
             </a:pPr>
             <a:r>
-              <a:rPr sz="3000" b="1">
-                <a:solidFill>
-                  <a:srgbClr val="0A0A0A"/>
+              <a:rPr sz="4400" b="1">
+                <a:solidFill>
+                  <a:srgbClr val="FAFAF8"/>
                 </a:solidFill>
                 <a:latin typeface="Noto Sans KR"/>
                 <a:ea typeface="Noto Sans KR"/>
@@ -6502,37 +5894,37 @@
           <a:p>
             <a:pPr algn="l">
               <a:lnSpc>
-                <a:spcPct val="140000"/>
+                <a:spcPct val="132000"/>
               </a:lnSpc>
             </a:pPr>
             <a:r>
-              <a:rPr sz="3000" b="1">
-                <a:solidFill>
-                  <a:srgbClr val="0A0A0A"/>
+              <a:rPr sz="4400" b="1">
+                <a:solidFill>
+                  <a:srgbClr val="FAFAF8"/>
                 </a:solidFill>
                 <a:latin typeface="Noto Sans KR"/>
                 <a:ea typeface="Noto Sans KR"/>
                 <a:cs typeface="Noto Sans KR"/>
               </a:rPr>
-              <a:t>그 컷이 브랜드 안에서 어떻게 보일지를</a:t>
+              <a:t>그 컷이 브랜드 안에서 어떻게</a:t>
             </a:r>
           </a:p>
           <a:p>
             <a:pPr algn="l">
               <a:lnSpc>
-                <a:spcPct val="140000"/>
+                <a:spcPct val="132000"/>
               </a:lnSpc>
             </a:pPr>
             <a:r>
-              <a:rPr sz="3000" b="1">
-                <a:solidFill>
-                  <a:srgbClr val="0A0A0A"/>
+              <a:rPr sz="4400" b="1">
+                <a:solidFill>
+                  <a:srgbClr val="FAFAF8"/>
                 </a:solidFill>
                 <a:latin typeface="Noto Sans KR"/>
                 <a:ea typeface="Noto Sans KR"/>
                 <a:cs typeface="Noto Sans KR"/>
               </a:rPr>
-              <a:t>먼저 생각합니다.</a:t>
+              <a:t>보일지를 먼저 생각합니다.</a:t>
             </a:r>
           </a:p>
         </p:txBody>
@@ -6545,8 +5937,8 @@
         </p:nvSpPr>
         <p:spPr>
           <a:xfrm>
-            <a:off x="640080" y="5029200"/>
-            <a:ext cx="8412480" cy="1097280"/>
+            <a:off x="10490911" y="6309360"/>
+            <a:ext cx="1097280" cy="274320"/>
           </a:xfrm>
           <a:prstGeom prst="rect">
             <a:avLst/>
@@ -6559,89 +5951,11 @@
           </a:bodyPr>
           <a:lstStyle/>
           <a:p>
-            <a:pPr algn="l">
-              <a:lnSpc>
-                <a:spcPct val="160000"/>
-              </a:lnSpc>
-            </a:pPr>
-            <a:r>
-              <a:rPr sz="1250" b="0">
-                <a:solidFill>
-                  <a:srgbClr val="6F6F6F"/>
-                </a:solidFill>
-                <a:latin typeface="Noto Sans KR"/>
-                <a:ea typeface="Noto Sans KR"/>
-                <a:cs typeface="Noto Sans KR"/>
-              </a:rPr>
-              <a:t>스튜디오 홀리몰리는 서울 역삼의 비주얼 디렉션 스튜디오입니다. 사진과 영상, 그리고 BX 디자인까지 — 하나의 무드로 이어지는 장면을 설계합니다.</a:t>
-            </a:r>
-          </a:p>
-        </p:txBody>
-      </p:sp>
-      <p:sp>
-        <p:nvSpPr>
-          <p:cNvPr id="6" name="TextBox 5"/>
-          <p:cNvSpPr txBox="1"/>
-          <p:nvPr/>
-        </p:nvSpPr>
-        <p:spPr>
-          <a:xfrm>
-            <a:off x="640080" y="6473952"/>
-            <a:ext cx="3657600" cy="274320"/>
-          </a:xfrm>
-          <a:prstGeom prst="rect">
-            <a:avLst/>
-          </a:prstGeom>
-          <a:noFill/>
-        </p:spPr>
-        <p:txBody>
-          <a:bodyPr wrap="square" anchor="t" lIns="0" rIns="0" tIns="0" bIns="0">
-            <a:spAutoFit/>
-          </a:bodyPr>
-          <a:lstStyle/>
-          <a:p>
-            <a:pPr algn="l"/>
-            <a:r>
-              <a:rPr sz="800" b="0" spc="150">
-                <a:solidFill>
-                  <a:srgbClr val="A3A3A3"/>
-                </a:solidFill>
-                <a:latin typeface="Jost"/>
-                <a:ea typeface="Noto Sans KR"/>
-                <a:cs typeface="Noto Sans KR"/>
-              </a:rPr>
-              <a:t>STUDIO. HOLYMOLLY</a:t>
-            </a:r>
-          </a:p>
-        </p:txBody>
-      </p:sp>
-      <p:sp>
-        <p:nvSpPr>
-          <p:cNvPr id="7" name="TextBox 6"/>
-          <p:cNvSpPr txBox="1"/>
-          <p:nvPr/>
-        </p:nvSpPr>
-        <p:spPr>
-          <a:xfrm>
-            <a:off x="10637215" y="6473952"/>
-            <a:ext cx="914400" cy="274320"/>
-          </a:xfrm>
-          <a:prstGeom prst="rect">
-            <a:avLst/>
-          </a:prstGeom>
-          <a:noFill/>
-        </p:spPr>
-        <p:txBody>
-          <a:bodyPr wrap="square" anchor="t" lIns="0" rIns="0" tIns="0" bIns="0">
-            <a:spAutoFit/>
-          </a:bodyPr>
-          <a:lstStyle/>
-          <a:p>
             <a:pPr algn="r"/>
             <a:r>
-              <a:rPr sz="800" b="0" spc="150">
-                <a:solidFill>
-                  <a:srgbClr val="A3A3A3"/>
+              <a:rPr sz="900" b="0" spc="220">
+                <a:solidFill>
+                  <a:srgbClr val="8A8A8A"/>
                 </a:solidFill>
                 <a:latin typeface="Jost"/>
                 <a:ea typeface="Noto Sans KR"/>
@@ -6708,8 +6022,8 @@
         </p:nvSpPr>
         <p:spPr>
           <a:xfrm>
-            <a:off x="640080" y="502920"/>
-            <a:ext cx="7315200" cy="320040"/>
+            <a:off x="603504" y="310896"/>
+            <a:ext cx="8229600" cy="274320"/>
           </a:xfrm>
           <a:prstGeom prst="rect">
             <a:avLst/>
@@ -6724,7 +6038,7 @@
           <a:p>
             <a:pPr algn="l"/>
             <a:r>
-              <a:rPr sz="1000" b="0" spc="200">
+              <a:rPr sz="900" b="0" spc="220">
                 <a:solidFill>
                   <a:srgbClr val="6F6F6F"/>
                 </a:solidFill>
@@ -6732,7 +6046,7 @@
                 <a:ea typeface="Noto Sans KR"/>
                 <a:cs typeface="Noto Sans KR"/>
               </a:rPr>
-              <a:t>PERSPECTIVE</a:t>
+              <a:t>WHO WE ARE</a:t>
             </a:r>
           </a:p>
         </p:txBody>
@@ -6745,8 +6059,8 @@
         </p:nvSpPr>
         <p:spPr>
           <a:xfrm>
-            <a:off x="640080" y="1828800"/>
-            <a:ext cx="5303520" cy="1463040"/>
+            <a:off x="10490911" y="310896"/>
+            <a:ext cx="1097280" cy="274320"/>
           </a:xfrm>
           <a:prstGeom prst="rect">
             <a:avLst/>
@@ -6759,13 +6073,80 @@
           </a:bodyPr>
           <a:lstStyle/>
           <a:p>
+            <a:pPr algn="r"/>
+            <a:r>
+              <a:rPr sz="900" b="0" spc="220">
+                <a:solidFill>
+                  <a:srgbClr val="6F6F6F"/>
+                </a:solidFill>
+                <a:latin typeface="Jost"/>
+                <a:ea typeface="Noto Sans KR"/>
+                <a:cs typeface="Noto Sans KR"/>
+              </a:rPr>
+              <a:t>03</a:t>
+            </a:r>
+          </a:p>
+        </p:txBody>
+      </p:sp>
+      <p:sp>
+        <p:nvSpPr>
+          <p:cNvPr id="5" name="Rectangle 4"/>
+          <p:cNvSpPr/>
+          <p:nvPr/>
+        </p:nvSpPr>
+        <p:spPr>
+          <a:xfrm>
+            <a:off x="603504" y="658368"/>
+            <a:ext cx="10984687" cy="12700"/>
+          </a:xfrm>
+          <a:prstGeom prst="rect">
+            <a:avLst/>
+          </a:prstGeom>
+          <a:solidFill>
+            <a:srgbClr val="E5E5E3"/>
+          </a:solidFill>
+          <a:ln>
+            <a:noFill/>
+          </a:ln>
+          <a:effectLst/>
+        </p:spPr>
+        <p:txBody>
+          <a:bodyPr rtlCol="0" anchor="ctr"/>
+          <a:lstStyle/>
+          <a:p>
+            <a:pPr algn="ctr"/>
+          </a:p>
+        </p:txBody>
+      </p:sp>
+      <p:sp>
+        <p:nvSpPr>
+          <p:cNvPr id="6" name="TextBox 5"/>
+          <p:cNvSpPr txBox="1"/>
+          <p:nvPr/>
+        </p:nvSpPr>
+        <p:spPr>
+          <a:xfrm>
+            <a:off x="603504" y="1325880"/>
+            <a:ext cx="6583680" cy="2011680"/>
+          </a:xfrm>
+          <a:prstGeom prst="rect">
+            <a:avLst/>
+          </a:prstGeom>
+          <a:noFill/>
+        </p:spPr>
+        <p:txBody>
+          <a:bodyPr wrap="square" anchor="t" lIns="0" rIns="0" tIns="0" bIns="0">
+            <a:spAutoFit/>
+          </a:bodyPr>
+          <a:lstStyle/>
+          <a:p>
             <a:pPr algn="l">
               <a:lnSpc>
-                <a:spcPct val="125000"/>
+                <a:spcPct val="128000"/>
               </a:lnSpc>
             </a:pPr>
             <a:r>
-              <a:rPr sz="2400" b="1">
+              <a:rPr sz="4000" b="1">
                 <a:solidFill>
                   <a:srgbClr val="0A0A0A"/>
                 </a:solidFill>
@@ -6773,17 +6154,17 @@
                 <a:ea typeface="Noto Sans KR"/>
                 <a:cs typeface="Noto Sans KR"/>
               </a:rPr>
-              <a:t>질감이 전부인 카테고리에서</a:t>
+              <a:t>서울 역삼,</a:t>
             </a:r>
           </a:p>
           <a:p>
             <a:pPr algn="l">
               <a:lnSpc>
-                <a:spcPct val="125000"/>
+                <a:spcPct val="128000"/>
               </a:lnSpc>
             </a:pPr>
             <a:r>
-              <a:rPr sz="2400" b="1">
+              <a:rPr sz="4000" b="1">
                 <a:solidFill>
                   <a:srgbClr val="0A0A0A"/>
                 </a:solidFill>
@@ -6791,21 +6172,21 @@
                 <a:ea typeface="Noto Sans KR"/>
                 <a:cs typeface="Noto Sans KR"/>
               </a:rPr>
-              <a:t>시작했습니다</a:t>
-            </a:r>
-          </a:p>
-        </p:txBody>
-      </p:sp>
-      <p:sp>
-        <p:nvSpPr>
-          <p:cNvPr id="5" name="TextBox 4"/>
+              <a:t>비주얼 디렉션 스튜디오.</a:t>
+            </a:r>
+          </a:p>
+        </p:txBody>
+      </p:sp>
+      <p:sp>
+        <p:nvSpPr>
+          <p:cNvPr id="7" name="TextBox 6"/>
           <p:cNvSpPr txBox="1"/>
           <p:nvPr/>
         </p:nvSpPr>
         <p:spPr>
           <a:xfrm>
-            <a:off x="640080" y="3383280"/>
-            <a:ext cx="5029200" cy="2743200"/>
+            <a:off x="7635240" y="1481328"/>
+            <a:ext cx="3952951" cy="3017520"/>
           </a:xfrm>
           <a:prstGeom prst="rect">
             <a:avLst/>
@@ -6823,11 +6204,11 @@
                 <a:spcPct val="160000"/>
               </a:lnSpc>
               <a:spcAft>
-                <a:spcPts val="1000"/>
+                <a:spcPts val="1200"/>
               </a:spcAft>
             </a:pPr>
             <a:r>
-              <a:rPr sz="1200" b="0">
+              <a:rPr sz="1100" b="0">
                 <a:solidFill>
                   <a:srgbClr val="6F6F6F"/>
                 </a:solidFill>
@@ -6835,7 +6216,7 @@
                 <a:ea typeface="Noto Sans KR"/>
                 <a:cs typeface="Noto Sans KR"/>
               </a:rPr>
-              <a:t>뷰티와 F&amp;B — 화면 속 질감이 곧 구매가 되는 카테고리에서 출발해, 제품 · 라이프스타일 · 패션 · 인물로 영역을 넓혀왔습니다.</a:t>
+              <a:t>스튜디오 홀리몰리는 사진과 영상, 그리고 BX 디자인까지 — 하나의 무드로 이어지는 장면을 설계합니다.</a:t>
             </a:r>
           </a:p>
           <a:p>
@@ -6844,11 +6225,11 @@
                 <a:spcPct val="160000"/>
               </a:lnSpc>
               <a:spcAft>
-                <a:spcPts val="1000"/>
+                <a:spcPts val="1200"/>
               </a:spcAft>
             </a:pPr>
             <a:r>
-              <a:rPr sz="1200" b="0">
+              <a:rPr sz="1100" b="0">
                 <a:solidFill>
                   <a:srgbClr val="6F6F6F"/>
                 </a:solidFill>
@@ -6856,32 +6237,30 @@
                 <a:ea typeface="Noto Sans KR"/>
                 <a:cs typeface="Noto Sans KR"/>
               </a:rPr>
-              <a:t>촬영 전 기획 단계에서 무드와 톤을 함께 설계하고, 현장에서는 계획에 없던 장면도 그 자리에서 만들어냅니다. 그렇게 찍은 컷이 상세페이지가 되고, 캠페인이 되고, 브랜드의 얼굴이 됩니다.</a:t>
-            </a:r>
-          </a:p>
-        </p:txBody>
-      </p:sp>
-      <p:sp>
-        <p:nvSpPr>
-          <p:cNvPr id="6" name="Rectangle 5"/>
+              <a:t>뷰티와 F&amp;B, 화면 속 질감이 곧 구매가 되는 카테고리에서 출발해 제품 · 라이프스타일 · 패션 · 인물로 영역을 넓혀왔습니다. 그렇게 찍은 컷이 상세페이지가 되고, 캠페인이 되고, 브랜드의 얼굴이 됩니다.</a:t>
+            </a:r>
+          </a:p>
+        </p:txBody>
+      </p:sp>
+      <p:sp>
+        <p:nvSpPr>
+          <p:cNvPr id="8" name="Rectangle 7"/>
           <p:cNvSpPr/>
           <p:nvPr/>
         </p:nvSpPr>
         <p:spPr>
           <a:xfrm>
-            <a:off x="6492240" y="1051560"/>
-            <a:ext cx="5029200" cy="4937760"/>
+            <a:off x="603504" y="4892040"/>
+            <a:ext cx="10984687" cy="16510"/>
           </a:xfrm>
           <a:prstGeom prst="rect">
             <a:avLst/>
           </a:prstGeom>
           <a:solidFill>
-            <a:srgbClr val="F0F0EE"/>
+            <a:srgbClr val="0A0A0A"/>
           </a:solidFill>
-          <a:ln w="9525">
-            <a:solidFill>
-              <a:srgbClr val="E5E5E3"/>
-            </a:solidFill>
+          <a:ln>
+            <a:noFill/>
           </a:ln>
           <a:effectLst/>
         </p:spPr>
@@ -6895,73 +6274,14 @@
       </p:sp>
       <p:sp>
         <p:nvSpPr>
-          <p:cNvPr id="7" name="TextBox 6"/>
+          <p:cNvPr id="9" name="TextBox 8"/>
           <p:cNvSpPr txBox="1"/>
           <p:nvPr/>
         </p:nvSpPr>
         <p:spPr>
           <a:xfrm>
-            <a:off x="6492240" y="1051560"/>
-            <a:ext cx="5029200" cy="4937760"/>
-          </a:xfrm>
-          <a:prstGeom prst="rect">
-            <a:avLst/>
-          </a:prstGeom>
-          <a:noFill/>
-        </p:spPr>
-        <p:txBody>
-          <a:bodyPr wrap="square" anchor="ctr" lIns="0" rIns="0" tIns="0" bIns="0">
-            <a:spAutoFit/>
-          </a:bodyPr>
-          <a:lstStyle/>
-          <a:p>
-            <a:pPr algn="ctr">
-              <a:spcAft>
-                <a:spcPts val="400"/>
-              </a:spcAft>
-            </a:pPr>
-            <a:r>
-              <a:rPr sz="1000" b="0" spc="250">
-                <a:solidFill>
-                  <a:srgbClr val="A3A3A3"/>
-                </a:solidFill>
-                <a:latin typeface="Jost"/>
-                <a:ea typeface="Noto Sans KR"/>
-                <a:cs typeface="Noto Sans KR"/>
-              </a:rPr>
-              <a:t>IMAGE</a:t>
-            </a:r>
-          </a:p>
-          <a:p>
-            <a:pPr algn="ctr">
-              <a:spcAft>
-                <a:spcPts val="400"/>
-              </a:spcAft>
-            </a:pPr>
-            <a:r>
-              <a:rPr sz="950" b="0">
-                <a:solidFill>
-                  <a:srgbClr val="A3A3A3"/>
-                </a:solidFill>
-                <a:latin typeface="Noto Sans KR"/>
-                <a:ea typeface="Noto Sans KR"/>
-                <a:cs typeface="Noto Sans KR"/>
-              </a:rPr>
-              <a:t>질감 클로즈업 컷으로 교체 (뷰티 제형 / F&amp;B 시즐)</a:t>
-            </a:r>
-          </a:p>
-        </p:txBody>
-      </p:sp>
-      <p:sp>
-        <p:nvSpPr>
-          <p:cNvPr id="8" name="TextBox 7"/>
-          <p:cNvSpPr txBox="1"/>
-          <p:nvPr/>
-        </p:nvSpPr>
-        <p:spPr>
-          <a:xfrm>
-            <a:off x="640080" y="6473952"/>
-            <a:ext cx="3657600" cy="274320"/>
+            <a:off x="603504" y="5166360"/>
+            <a:ext cx="2243251" cy="1005840"/>
           </a:xfrm>
           <a:prstGeom prst="rect">
             <a:avLst/>
@@ -6974,31 +6294,83 @@
           </a:bodyPr>
           <a:lstStyle/>
           <a:p>
-            <a:pPr algn="l"/>
-            <a:r>
-              <a:rPr sz="800" b="0" spc="150">
-                <a:solidFill>
-                  <a:srgbClr val="A3A3A3"/>
+            <a:pPr algn="l">
+              <a:lnSpc>
+                <a:spcPct val="175000"/>
+              </a:lnSpc>
+            </a:pPr>
+            <a:r>
+              <a:rPr sz="850" b="0" spc="220">
+                <a:solidFill>
+                  <a:srgbClr val="6F6F6F"/>
                 </a:solidFill>
                 <a:latin typeface="Jost"/>
                 <a:ea typeface="Noto Sans KR"/>
                 <a:cs typeface="Noto Sans KR"/>
               </a:rPr>
-              <a:t>STUDIO. HOLYMOLLY</a:t>
-            </a:r>
-          </a:p>
-        </p:txBody>
-      </p:sp>
-      <p:sp>
-        <p:nvSpPr>
-          <p:cNvPr id="9" name="TextBox 8"/>
+              <a:t>FIELD</a:t>
+            </a:r>
+          </a:p>
+          <a:p>
+            <a:pPr algn="l">
+              <a:lnSpc>
+                <a:spcPct val="175000"/>
+              </a:lnSpc>
+            </a:pPr>
+            <a:r>
+              <a:rPr sz="1300" b="1">
+                <a:solidFill>
+                  <a:srgbClr val="0A0A0A"/>
+                </a:solidFill>
+                <a:latin typeface="Jost"/>
+                <a:ea typeface="Noto Sans KR"/>
+                <a:cs typeface="Noto Sans KR"/>
+              </a:rPr>
+              <a:t>Photo · Film · Branding</a:t>
+            </a:r>
+          </a:p>
+        </p:txBody>
+      </p:sp>
+      <p:sp>
+        <p:nvSpPr>
+          <p:cNvPr id="10" name="Rectangle 9"/>
+          <p:cNvSpPr/>
+          <p:nvPr/>
+        </p:nvSpPr>
+        <p:spPr>
+          <a:xfrm>
+            <a:off x="3343960" y="4892040"/>
+            <a:ext cx="11430" cy="1371600"/>
+          </a:xfrm>
+          <a:prstGeom prst="rect">
+            <a:avLst/>
+          </a:prstGeom>
+          <a:solidFill>
+            <a:srgbClr val="E5E5E3"/>
+          </a:solidFill>
+          <a:ln>
+            <a:noFill/>
+          </a:ln>
+          <a:effectLst/>
+        </p:spPr>
+        <p:txBody>
+          <a:bodyPr rtlCol="0" anchor="ctr"/>
+          <a:lstStyle/>
+          <a:p>
+            <a:pPr algn="ctr"/>
+          </a:p>
+        </p:txBody>
+      </p:sp>
+      <p:sp>
+        <p:nvSpPr>
+          <p:cNvPr id="11" name="TextBox 10"/>
           <p:cNvSpPr txBox="1"/>
           <p:nvPr/>
         </p:nvSpPr>
         <p:spPr>
           <a:xfrm>
-            <a:off x="10637215" y="6473952"/>
-            <a:ext cx="914400" cy="274320"/>
+            <a:off x="3623995" y="5166360"/>
+            <a:ext cx="2243251" cy="1005840"/>
           </a:xfrm>
           <a:prstGeom prst="rect">
             <a:avLst/>
@@ -7011,18 +6383,248 @@
           </a:bodyPr>
           <a:lstStyle/>
           <a:p>
-            <a:pPr algn="r"/>
-            <a:r>
-              <a:rPr sz="800" b="0" spc="150">
-                <a:solidFill>
-                  <a:srgbClr val="A3A3A3"/>
+            <a:pPr algn="l">
+              <a:lnSpc>
+                <a:spcPct val="175000"/>
+              </a:lnSpc>
+            </a:pPr>
+            <a:r>
+              <a:rPr sz="850" b="0" spc="220">
+                <a:solidFill>
+                  <a:srgbClr val="6F6F6F"/>
                 </a:solidFill>
                 <a:latin typeface="Jost"/>
                 <a:ea typeface="Noto Sans KR"/>
                 <a:cs typeface="Noto Sans KR"/>
               </a:rPr>
-              <a:t>03</a:t>
-            </a:r>
+              <a:t>CATEGORY</a:t>
+            </a:r>
+          </a:p>
+          <a:p>
+            <a:pPr algn="l">
+              <a:lnSpc>
+                <a:spcPct val="175000"/>
+              </a:lnSpc>
+            </a:pPr>
+            <a:r>
+              <a:rPr sz="1300" b="1">
+                <a:solidFill>
+                  <a:srgbClr val="0A0A0A"/>
+                </a:solidFill>
+                <a:latin typeface="Jost"/>
+                <a:ea typeface="Noto Sans KR"/>
+                <a:cs typeface="Noto Sans KR"/>
+              </a:rPr>
+              <a:t>Beauty · F&amp;B · Lifestyle</a:t>
+            </a:r>
+          </a:p>
+        </p:txBody>
+      </p:sp>
+      <p:sp>
+        <p:nvSpPr>
+          <p:cNvPr id="12" name="Rectangle 11"/>
+          <p:cNvSpPr/>
+          <p:nvPr/>
+        </p:nvSpPr>
+        <p:spPr>
+          <a:xfrm>
+            <a:off x="6090132" y="4892040"/>
+            <a:ext cx="11430" cy="1371600"/>
+          </a:xfrm>
+          <a:prstGeom prst="rect">
+            <a:avLst/>
+          </a:prstGeom>
+          <a:solidFill>
+            <a:srgbClr val="E5E5E3"/>
+          </a:solidFill>
+          <a:ln>
+            <a:noFill/>
+          </a:ln>
+          <a:effectLst/>
+        </p:spPr>
+        <p:txBody>
+          <a:bodyPr rtlCol="0" anchor="ctr"/>
+          <a:lstStyle/>
+          <a:p>
+            <a:pPr algn="ctr"/>
+          </a:p>
+        </p:txBody>
+      </p:sp>
+      <p:sp>
+        <p:nvSpPr>
+          <p:cNvPr id="13" name="TextBox 12"/>
+          <p:cNvSpPr txBox="1"/>
+          <p:nvPr/>
+        </p:nvSpPr>
+        <p:spPr>
+          <a:xfrm>
+            <a:off x="6370167" y="5166360"/>
+            <a:ext cx="2243251" cy="1005840"/>
+          </a:xfrm>
+          <a:prstGeom prst="rect">
+            <a:avLst/>
+          </a:prstGeom>
+          <a:noFill/>
+        </p:spPr>
+        <p:txBody>
+          <a:bodyPr wrap="square" anchor="t" lIns="0" rIns="0" tIns="0" bIns="0">
+            <a:spAutoFit/>
+          </a:bodyPr>
+          <a:lstStyle/>
+          <a:p>
+            <a:pPr algn="l">
+              <a:lnSpc>
+                <a:spcPct val="175000"/>
+              </a:lnSpc>
+            </a:pPr>
+            <a:r>
+              <a:rPr sz="850" b="0" spc="220">
+                <a:solidFill>
+                  <a:srgbClr val="6F6F6F"/>
+                </a:solidFill>
+                <a:latin typeface="Jost"/>
+                <a:ea typeface="Noto Sans KR"/>
+                <a:cs typeface="Noto Sans KR"/>
+              </a:rPr>
+              <a:t>LOCATION</a:t>
+            </a:r>
+          </a:p>
+          <a:p>
+            <a:pPr algn="l">
+              <a:lnSpc>
+                <a:spcPct val="175000"/>
+              </a:lnSpc>
+            </a:pPr>
+            <a:r>
+              <a:rPr sz="1300" b="1">
+                <a:solidFill>
+                  <a:srgbClr val="0A0A0A"/>
+                </a:solidFill>
+                <a:latin typeface="Noto Sans KR"/>
+                <a:ea typeface="Noto Sans KR"/>
+                <a:cs typeface="Noto Sans KR"/>
+              </a:rPr>
+              <a:t>역삼동 783-2, B1</a:t>
+            </a:r>
+          </a:p>
+        </p:txBody>
+      </p:sp>
+      <p:sp>
+        <p:nvSpPr>
+          <p:cNvPr id="14" name="Rectangle 13"/>
+          <p:cNvSpPr/>
+          <p:nvPr/>
+        </p:nvSpPr>
+        <p:spPr>
+          <a:xfrm>
+            <a:off x="8836304" y="4892040"/>
+            <a:ext cx="11430" cy="1371600"/>
+          </a:xfrm>
+          <a:prstGeom prst="rect">
+            <a:avLst/>
+          </a:prstGeom>
+          <a:solidFill>
+            <a:srgbClr val="E5E5E3"/>
+          </a:solidFill>
+          <a:ln>
+            <a:noFill/>
+          </a:ln>
+          <a:effectLst/>
+        </p:spPr>
+        <p:txBody>
+          <a:bodyPr rtlCol="0" anchor="ctr"/>
+          <a:lstStyle/>
+          <a:p>
+            <a:pPr algn="ctr"/>
+          </a:p>
+        </p:txBody>
+      </p:sp>
+      <p:sp>
+        <p:nvSpPr>
+          <p:cNvPr id="15" name="TextBox 14"/>
+          <p:cNvSpPr txBox="1"/>
+          <p:nvPr/>
+        </p:nvSpPr>
+        <p:spPr>
+          <a:xfrm>
+            <a:off x="9116339" y="5166360"/>
+            <a:ext cx="2243251" cy="1005840"/>
+          </a:xfrm>
+          <a:prstGeom prst="rect">
+            <a:avLst/>
+          </a:prstGeom>
+          <a:noFill/>
+        </p:spPr>
+        <p:txBody>
+          <a:bodyPr wrap="square" anchor="t" lIns="0" rIns="0" tIns="0" bIns="0">
+            <a:spAutoFit/>
+          </a:bodyPr>
+          <a:lstStyle/>
+          <a:p>
+            <a:pPr algn="l">
+              <a:lnSpc>
+                <a:spcPct val="175000"/>
+              </a:lnSpc>
+            </a:pPr>
+            <a:r>
+              <a:rPr sz="850" b="0" spc="220">
+                <a:solidFill>
+                  <a:srgbClr val="6F6F6F"/>
+                </a:solidFill>
+                <a:latin typeface="Jost"/>
+                <a:ea typeface="Noto Sans KR"/>
+                <a:cs typeface="Noto Sans KR"/>
+              </a:rPr>
+              <a:t>CONTACT</a:t>
+            </a:r>
+          </a:p>
+          <a:p>
+            <a:pPr algn="l">
+              <a:lnSpc>
+                <a:spcPct val="175000"/>
+              </a:lnSpc>
+            </a:pPr>
+            <a:r>
+              <a:rPr sz="1000" b="1">
+                <a:solidFill>
+                  <a:srgbClr val="0A0A0A"/>
+                </a:solidFill>
+                <a:latin typeface="Jost"/>
+                <a:ea typeface="Noto Sans KR"/>
+                <a:cs typeface="Noto Sans KR"/>
+              </a:rPr>
+              <a:t>studio.holymolly@gmail.com</a:t>
+            </a:r>
+          </a:p>
+        </p:txBody>
+      </p:sp>
+      <p:sp>
+        <p:nvSpPr>
+          <p:cNvPr id="16" name="Rectangle 15"/>
+          <p:cNvSpPr/>
+          <p:nvPr/>
+        </p:nvSpPr>
+        <p:spPr>
+          <a:xfrm>
+            <a:off x="603504" y="6263640"/>
+            <a:ext cx="10984687" cy="12700"/>
+          </a:xfrm>
+          <a:prstGeom prst="rect">
+            <a:avLst/>
+          </a:prstGeom>
+          <a:solidFill>
+            <a:srgbClr val="E5E5E3"/>
+          </a:solidFill>
+          <a:ln>
+            <a:noFill/>
+          </a:ln>
+          <a:effectLst/>
+        </p:spPr>
+        <p:txBody>
+          <a:bodyPr rtlCol="0" anchor="ctr"/>
+          <a:lstStyle/>
+          <a:p>
+            <a:pPr algn="ctr"/>
           </a:p>
         </p:txBody>
       </p:sp>
@@ -7082,8 +6684,8 @@
         </p:nvSpPr>
         <p:spPr>
           <a:xfrm>
-            <a:off x="640080" y="502920"/>
-            <a:ext cx="7315200" cy="320040"/>
+            <a:off x="603504" y="310896"/>
+            <a:ext cx="8229600" cy="274320"/>
           </a:xfrm>
           <a:prstGeom prst="rect">
             <a:avLst/>
@@ -7098,7 +6700,7 @@
           <a:p>
             <a:pPr algn="l"/>
             <a:r>
-              <a:rPr sz="1000" b="0" spc="200">
+              <a:rPr sz="900" b="0" spc="220">
                 <a:solidFill>
                   <a:srgbClr val="6F6F6F"/>
                 </a:solidFill>
@@ -7106,21 +6708,783 @@
                 <a:ea typeface="Noto Sans KR"/>
                 <a:cs typeface="Noto Sans KR"/>
               </a:rPr>
-              <a:t>AT A GLANCE</a:t>
-            </a:r>
-          </a:p>
-        </p:txBody>
-      </p:sp>
-      <p:sp>
-        <p:nvSpPr>
-          <p:cNvPr id="4" name="Rectangle 3"/>
+              <a:t>WHAT WE DO</a:t>
+            </a:r>
+          </a:p>
+        </p:txBody>
+      </p:sp>
+      <p:sp>
+        <p:nvSpPr>
+          <p:cNvPr id="4" name="TextBox 3"/>
+          <p:cNvSpPr txBox="1"/>
+          <p:nvPr/>
+        </p:nvSpPr>
+        <p:spPr>
+          <a:xfrm>
+            <a:off x="10490911" y="310896"/>
+            <a:ext cx="1097280" cy="274320"/>
+          </a:xfrm>
+          <a:prstGeom prst="rect">
+            <a:avLst/>
+          </a:prstGeom>
+          <a:noFill/>
+        </p:spPr>
+        <p:txBody>
+          <a:bodyPr wrap="square" anchor="t" lIns="0" rIns="0" tIns="0" bIns="0">
+            <a:spAutoFit/>
+          </a:bodyPr>
+          <a:lstStyle/>
+          <a:p>
+            <a:pPr algn="r"/>
+            <a:r>
+              <a:rPr sz="900" b="0" spc="220">
+                <a:solidFill>
+                  <a:srgbClr val="6F6F6F"/>
+                </a:solidFill>
+                <a:latin typeface="Jost"/>
+                <a:ea typeface="Noto Sans KR"/>
+                <a:cs typeface="Noto Sans KR"/>
+              </a:rPr>
+              <a:t>04</a:t>
+            </a:r>
+          </a:p>
+        </p:txBody>
+      </p:sp>
+      <p:sp>
+        <p:nvSpPr>
+          <p:cNvPr id="5" name="Rectangle 4"/>
           <p:cNvSpPr/>
           <p:nvPr/>
         </p:nvSpPr>
         <p:spPr>
           <a:xfrm>
-            <a:off x="640080" y="1828800"/>
-            <a:ext cx="10911535" cy="17780"/>
+            <a:off x="603504" y="658368"/>
+            <a:ext cx="10984687" cy="12700"/>
+          </a:xfrm>
+          <a:prstGeom prst="rect">
+            <a:avLst/>
+          </a:prstGeom>
+          <a:solidFill>
+            <a:srgbClr val="E5E5E3"/>
+          </a:solidFill>
+          <a:ln>
+            <a:noFill/>
+          </a:ln>
+          <a:effectLst/>
+        </p:spPr>
+        <p:txBody>
+          <a:bodyPr rtlCol="0" anchor="ctr"/>
+          <a:lstStyle/>
+          <a:p>
+            <a:pPr algn="ctr"/>
+          </a:p>
+        </p:txBody>
+      </p:sp>
+      <p:sp>
+        <p:nvSpPr>
+          <p:cNvPr id="6" name="TextBox 5"/>
+          <p:cNvSpPr txBox="1"/>
+          <p:nvPr/>
+        </p:nvSpPr>
+        <p:spPr>
+          <a:xfrm>
+            <a:off x="603504" y="1399032"/>
+            <a:ext cx="1188720" cy="548640"/>
+          </a:xfrm>
+          <a:prstGeom prst="rect">
+            <a:avLst/>
+          </a:prstGeom>
+          <a:noFill/>
+        </p:spPr>
+        <p:txBody>
+          <a:bodyPr wrap="square" anchor="t" lIns="0" rIns="0" tIns="0" bIns="0">
+            <a:spAutoFit/>
+          </a:bodyPr>
+          <a:lstStyle/>
+          <a:p>
+            <a:pPr algn="l"/>
+            <a:r>
+              <a:rPr sz="2400" b="0" spc="100">
+                <a:solidFill>
+                  <a:srgbClr val="A3A3A3"/>
+                </a:solidFill>
+                <a:latin typeface="Jost"/>
+                <a:ea typeface="Noto Sans KR"/>
+                <a:cs typeface="Noto Sans KR"/>
+              </a:rPr>
+              <a:t>01</a:t>
+            </a:r>
+          </a:p>
+        </p:txBody>
+      </p:sp>
+      <p:sp>
+        <p:nvSpPr>
+          <p:cNvPr id="7" name="TextBox 6"/>
+          <p:cNvSpPr txBox="1"/>
+          <p:nvPr/>
+        </p:nvSpPr>
+        <p:spPr>
+          <a:xfrm>
+            <a:off x="2020824" y="1362456"/>
+            <a:ext cx="5120640" cy="640080"/>
+          </a:xfrm>
+          <a:prstGeom prst="rect">
+            <a:avLst/>
+          </a:prstGeom>
+          <a:noFill/>
+        </p:spPr>
+        <p:txBody>
+          <a:bodyPr wrap="square" anchor="t" lIns="0" rIns="0" tIns="0" bIns="0">
+            <a:spAutoFit/>
+          </a:bodyPr>
+          <a:lstStyle/>
+          <a:p>
+            <a:pPr algn="l"/>
+            <a:r>
+              <a:rPr sz="2300" b="1">
+                <a:solidFill>
+                  <a:srgbClr val="0A0A0A"/>
+                </a:solidFill>
+                <a:latin typeface="Noto Sans KR"/>
+                <a:ea typeface="Noto Sans KR"/>
+                <a:cs typeface="Noto Sans KR"/>
+              </a:rPr>
+              <a:t>뷰티 &amp; 제품</a:t>
+            </a:r>
+          </a:p>
+        </p:txBody>
+      </p:sp>
+      <p:sp>
+        <p:nvSpPr>
+          <p:cNvPr id="8" name="TextBox 7"/>
+          <p:cNvSpPr txBox="1"/>
+          <p:nvPr/>
+        </p:nvSpPr>
+        <p:spPr>
+          <a:xfrm>
+            <a:off x="6903720" y="1453896"/>
+            <a:ext cx="4684471" cy="640080"/>
+          </a:xfrm>
+          <a:prstGeom prst="rect">
+            <a:avLst/>
+          </a:prstGeom>
+          <a:noFill/>
+        </p:spPr>
+        <p:txBody>
+          <a:bodyPr wrap="square" anchor="t" lIns="0" rIns="0" tIns="0" bIns="0">
+            <a:spAutoFit/>
+          </a:bodyPr>
+          <a:lstStyle/>
+          <a:p>
+            <a:pPr algn="l">
+              <a:lnSpc>
+                <a:spcPct val="145000"/>
+              </a:lnSpc>
+            </a:pPr>
+            <a:r>
+              <a:rPr sz="950" b="0">
+                <a:solidFill>
+                  <a:srgbClr val="6F6F6F"/>
+                </a:solidFill>
+                <a:latin typeface="Noto Sans KR"/>
+                <a:ea typeface="Noto Sans KR"/>
+                <a:cs typeface="Noto Sans KR"/>
+              </a:rPr>
+              <a:t>제형과 컬러, 형태와 소재를 정교하게. 커머스 컷부터 캠페인까지, 제품이 팔리게 하는 컷.</a:t>
+            </a:r>
+          </a:p>
+        </p:txBody>
+      </p:sp>
+      <p:sp>
+        <p:nvSpPr>
+          <p:cNvPr id="9" name="Rectangle 8"/>
+          <p:cNvSpPr/>
+          <p:nvPr/>
+        </p:nvSpPr>
+        <p:spPr>
+          <a:xfrm>
+            <a:off x="603504" y="2112264"/>
+            <a:ext cx="10984687" cy="12700"/>
+          </a:xfrm>
+          <a:prstGeom prst="rect">
+            <a:avLst/>
+          </a:prstGeom>
+          <a:solidFill>
+            <a:srgbClr val="E5E5E3"/>
+          </a:solidFill>
+          <a:ln>
+            <a:noFill/>
+          </a:ln>
+          <a:effectLst/>
+        </p:spPr>
+        <p:txBody>
+          <a:bodyPr rtlCol="0" anchor="ctr"/>
+          <a:lstStyle/>
+          <a:p>
+            <a:pPr algn="ctr"/>
+          </a:p>
+        </p:txBody>
+      </p:sp>
+      <p:sp>
+        <p:nvSpPr>
+          <p:cNvPr id="10" name="TextBox 9"/>
+          <p:cNvSpPr txBox="1"/>
+          <p:nvPr/>
+        </p:nvSpPr>
+        <p:spPr>
+          <a:xfrm>
+            <a:off x="603504" y="2368296"/>
+            <a:ext cx="1188720" cy="548640"/>
+          </a:xfrm>
+          <a:prstGeom prst="rect">
+            <a:avLst/>
+          </a:prstGeom>
+          <a:noFill/>
+        </p:spPr>
+        <p:txBody>
+          <a:bodyPr wrap="square" anchor="t" lIns="0" rIns="0" tIns="0" bIns="0">
+            <a:spAutoFit/>
+          </a:bodyPr>
+          <a:lstStyle/>
+          <a:p>
+            <a:pPr algn="l"/>
+            <a:r>
+              <a:rPr sz="2400" b="0" spc="100">
+                <a:solidFill>
+                  <a:srgbClr val="A3A3A3"/>
+                </a:solidFill>
+                <a:latin typeface="Jost"/>
+                <a:ea typeface="Noto Sans KR"/>
+                <a:cs typeface="Noto Sans KR"/>
+              </a:rPr>
+              <a:t>02</a:t>
+            </a:r>
+          </a:p>
+        </p:txBody>
+      </p:sp>
+      <p:sp>
+        <p:nvSpPr>
+          <p:cNvPr id="11" name="TextBox 10"/>
+          <p:cNvSpPr txBox="1"/>
+          <p:nvPr/>
+        </p:nvSpPr>
+        <p:spPr>
+          <a:xfrm>
+            <a:off x="2020824" y="2331720"/>
+            <a:ext cx="5120640" cy="640080"/>
+          </a:xfrm>
+          <a:prstGeom prst="rect">
+            <a:avLst/>
+          </a:prstGeom>
+          <a:noFill/>
+        </p:spPr>
+        <p:txBody>
+          <a:bodyPr wrap="square" anchor="t" lIns="0" rIns="0" tIns="0" bIns="0">
+            <a:spAutoFit/>
+          </a:bodyPr>
+          <a:lstStyle/>
+          <a:p>
+            <a:pPr algn="l"/>
+            <a:r>
+              <a:rPr sz="2300" b="1">
+                <a:solidFill>
+                  <a:srgbClr val="0A0A0A"/>
+                </a:solidFill>
+                <a:latin typeface="Noto Sans KR"/>
+                <a:ea typeface="Noto Sans KR"/>
+                <a:cs typeface="Noto Sans KR"/>
+              </a:rPr>
+              <a:t>F&amp;B &amp; 라이프스타일</a:t>
+            </a:r>
+          </a:p>
+        </p:txBody>
+      </p:sp>
+      <p:sp>
+        <p:nvSpPr>
+          <p:cNvPr id="12" name="TextBox 11"/>
+          <p:cNvSpPr txBox="1"/>
+          <p:nvPr/>
+        </p:nvSpPr>
+        <p:spPr>
+          <a:xfrm>
+            <a:off x="6903720" y="2423160"/>
+            <a:ext cx="4684471" cy="640080"/>
+          </a:xfrm>
+          <a:prstGeom prst="rect">
+            <a:avLst/>
+          </a:prstGeom>
+          <a:noFill/>
+        </p:spPr>
+        <p:txBody>
+          <a:bodyPr wrap="square" anchor="t" lIns="0" rIns="0" tIns="0" bIns="0">
+            <a:spAutoFit/>
+          </a:bodyPr>
+          <a:lstStyle/>
+          <a:p>
+            <a:pPr algn="l">
+              <a:lnSpc>
+                <a:spcPct val="145000"/>
+              </a:lnSpc>
+            </a:pPr>
+            <a:r>
+              <a:rPr sz="950" b="0">
+                <a:solidFill>
+                  <a:srgbClr val="6F6F6F"/>
+                </a:solidFill>
+                <a:latin typeface="Noto Sans KR"/>
+                <a:ea typeface="Noto Sans KR"/>
+                <a:cs typeface="Noto Sans KR"/>
+              </a:rPr>
+              <a:t>시즐과 온도, 쓰는 장면과 먹는 순간. 제품이 놓일 실제 삶의 장면을 만듭니다.</a:t>
+            </a:r>
+          </a:p>
+        </p:txBody>
+      </p:sp>
+      <p:sp>
+        <p:nvSpPr>
+          <p:cNvPr id="13" name="Rectangle 12"/>
+          <p:cNvSpPr/>
+          <p:nvPr/>
+        </p:nvSpPr>
+        <p:spPr>
+          <a:xfrm>
+            <a:off x="603504" y="3081528"/>
+            <a:ext cx="10984687" cy="12700"/>
+          </a:xfrm>
+          <a:prstGeom prst="rect">
+            <a:avLst/>
+          </a:prstGeom>
+          <a:solidFill>
+            <a:srgbClr val="E5E5E3"/>
+          </a:solidFill>
+          <a:ln>
+            <a:noFill/>
+          </a:ln>
+          <a:effectLst/>
+        </p:spPr>
+        <p:txBody>
+          <a:bodyPr rtlCol="0" anchor="ctr"/>
+          <a:lstStyle/>
+          <a:p>
+            <a:pPr algn="ctr"/>
+          </a:p>
+        </p:txBody>
+      </p:sp>
+      <p:sp>
+        <p:nvSpPr>
+          <p:cNvPr id="14" name="TextBox 13"/>
+          <p:cNvSpPr txBox="1"/>
+          <p:nvPr/>
+        </p:nvSpPr>
+        <p:spPr>
+          <a:xfrm>
+            <a:off x="603504" y="3337560"/>
+            <a:ext cx="1188720" cy="548640"/>
+          </a:xfrm>
+          <a:prstGeom prst="rect">
+            <a:avLst/>
+          </a:prstGeom>
+          <a:noFill/>
+        </p:spPr>
+        <p:txBody>
+          <a:bodyPr wrap="square" anchor="t" lIns="0" rIns="0" tIns="0" bIns="0">
+            <a:spAutoFit/>
+          </a:bodyPr>
+          <a:lstStyle/>
+          <a:p>
+            <a:pPr algn="l"/>
+            <a:r>
+              <a:rPr sz="2400" b="0" spc="100">
+                <a:solidFill>
+                  <a:srgbClr val="A3A3A3"/>
+                </a:solidFill>
+                <a:latin typeface="Jost"/>
+                <a:ea typeface="Noto Sans KR"/>
+                <a:cs typeface="Noto Sans KR"/>
+              </a:rPr>
+              <a:t>03</a:t>
+            </a:r>
+          </a:p>
+        </p:txBody>
+      </p:sp>
+      <p:sp>
+        <p:nvSpPr>
+          <p:cNvPr id="15" name="TextBox 14"/>
+          <p:cNvSpPr txBox="1"/>
+          <p:nvPr/>
+        </p:nvSpPr>
+        <p:spPr>
+          <a:xfrm>
+            <a:off x="2020824" y="3300984"/>
+            <a:ext cx="5120640" cy="640080"/>
+          </a:xfrm>
+          <a:prstGeom prst="rect">
+            <a:avLst/>
+          </a:prstGeom>
+          <a:noFill/>
+        </p:spPr>
+        <p:txBody>
+          <a:bodyPr wrap="square" anchor="t" lIns="0" rIns="0" tIns="0" bIns="0">
+            <a:spAutoFit/>
+          </a:bodyPr>
+          <a:lstStyle/>
+          <a:p>
+            <a:pPr algn="l"/>
+            <a:r>
+              <a:rPr sz="2300" b="1">
+                <a:solidFill>
+                  <a:srgbClr val="0A0A0A"/>
+                </a:solidFill>
+                <a:latin typeface="Noto Sans KR"/>
+                <a:ea typeface="Noto Sans KR"/>
+                <a:cs typeface="Noto Sans KR"/>
+              </a:rPr>
+              <a:t>패션 &amp; 인물</a:t>
+            </a:r>
+          </a:p>
+        </p:txBody>
+      </p:sp>
+      <p:sp>
+        <p:nvSpPr>
+          <p:cNvPr id="16" name="TextBox 15"/>
+          <p:cNvSpPr txBox="1"/>
+          <p:nvPr/>
+        </p:nvSpPr>
+        <p:spPr>
+          <a:xfrm>
+            <a:off x="6903720" y="3392424"/>
+            <a:ext cx="4684471" cy="640080"/>
+          </a:xfrm>
+          <a:prstGeom prst="rect">
+            <a:avLst/>
+          </a:prstGeom>
+          <a:noFill/>
+        </p:spPr>
+        <p:txBody>
+          <a:bodyPr wrap="square" anchor="t" lIns="0" rIns="0" tIns="0" bIns="0">
+            <a:spAutoFit/>
+          </a:bodyPr>
+          <a:lstStyle/>
+          <a:p>
+            <a:pPr algn="l">
+              <a:lnSpc>
+                <a:spcPct val="145000"/>
+              </a:lnSpc>
+            </a:pPr>
+            <a:r>
+              <a:rPr sz="950" b="0">
+                <a:solidFill>
+                  <a:srgbClr val="6F6F6F"/>
+                </a:solidFill>
+                <a:latin typeface="Noto Sans KR"/>
+                <a:ea typeface="Noto Sans KR"/>
+                <a:cs typeface="Noto Sans KR"/>
+              </a:rPr>
+              <a:t>시즌 룩북과 커머스 화보, 브랜드를 이끄는 사람들. 브랜드의 결을 인물로 옮깁니다.</a:t>
+            </a:r>
+          </a:p>
+        </p:txBody>
+      </p:sp>
+      <p:sp>
+        <p:nvSpPr>
+          <p:cNvPr id="17" name="Rectangle 16"/>
+          <p:cNvSpPr/>
+          <p:nvPr/>
+        </p:nvSpPr>
+        <p:spPr>
+          <a:xfrm>
+            <a:off x="603504" y="4050792"/>
+            <a:ext cx="10984687" cy="12700"/>
+          </a:xfrm>
+          <a:prstGeom prst="rect">
+            <a:avLst/>
+          </a:prstGeom>
+          <a:solidFill>
+            <a:srgbClr val="E5E5E3"/>
+          </a:solidFill>
+          <a:ln>
+            <a:noFill/>
+          </a:ln>
+          <a:effectLst/>
+        </p:spPr>
+        <p:txBody>
+          <a:bodyPr rtlCol="0" anchor="ctr"/>
+          <a:lstStyle/>
+          <a:p>
+            <a:pPr algn="ctr"/>
+          </a:p>
+        </p:txBody>
+      </p:sp>
+      <p:sp>
+        <p:nvSpPr>
+          <p:cNvPr id="18" name="TextBox 17"/>
+          <p:cNvSpPr txBox="1"/>
+          <p:nvPr/>
+        </p:nvSpPr>
+        <p:spPr>
+          <a:xfrm>
+            <a:off x="603504" y="4306824"/>
+            <a:ext cx="1188720" cy="548640"/>
+          </a:xfrm>
+          <a:prstGeom prst="rect">
+            <a:avLst/>
+          </a:prstGeom>
+          <a:noFill/>
+        </p:spPr>
+        <p:txBody>
+          <a:bodyPr wrap="square" anchor="t" lIns="0" rIns="0" tIns="0" bIns="0">
+            <a:spAutoFit/>
+          </a:bodyPr>
+          <a:lstStyle/>
+          <a:p>
+            <a:pPr algn="l"/>
+            <a:r>
+              <a:rPr sz="2400" b="0" spc="100">
+                <a:solidFill>
+                  <a:srgbClr val="A3A3A3"/>
+                </a:solidFill>
+                <a:latin typeface="Jost"/>
+                <a:ea typeface="Noto Sans KR"/>
+                <a:cs typeface="Noto Sans KR"/>
+              </a:rPr>
+              <a:t>04</a:t>
+            </a:r>
+          </a:p>
+        </p:txBody>
+      </p:sp>
+      <p:sp>
+        <p:nvSpPr>
+          <p:cNvPr id="19" name="TextBox 18"/>
+          <p:cNvSpPr txBox="1"/>
+          <p:nvPr/>
+        </p:nvSpPr>
+        <p:spPr>
+          <a:xfrm>
+            <a:off x="2020824" y="4270248"/>
+            <a:ext cx="5120640" cy="640080"/>
+          </a:xfrm>
+          <a:prstGeom prst="rect">
+            <a:avLst/>
+          </a:prstGeom>
+          <a:noFill/>
+        </p:spPr>
+        <p:txBody>
+          <a:bodyPr wrap="square" anchor="t" lIns="0" rIns="0" tIns="0" bIns="0">
+            <a:spAutoFit/>
+          </a:bodyPr>
+          <a:lstStyle/>
+          <a:p>
+            <a:pPr algn="l"/>
+            <a:r>
+              <a:rPr sz="2300" b="1">
+                <a:solidFill>
+                  <a:srgbClr val="0A0A0A"/>
+                </a:solidFill>
+                <a:latin typeface="Noto Sans KR"/>
+                <a:ea typeface="Noto Sans KR"/>
+                <a:cs typeface="Noto Sans KR"/>
+              </a:rPr>
+              <a:t>영상</a:t>
+            </a:r>
+          </a:p>
+        </p:txBody>
+      </p:sp>
+      <p:sp>
+        <p:nvSpPr>
+          <p:cNvPr id="20" name="TextBox 19"/>
+          <p:cNvSpPr txBox="1"/>
+          <p:nvPr/>
+        </p:nvSpPr>
+        <p:spPr>
+          <a:xfrm>
+            <a:off x="6903720" y="4361688"/>
+            <a:ext cx="4684471" cy="640080"/>
+          </a:xfrm>
+          <a:prstGeom prst="rect">
+            <a:avLst/>
+          </a:prstGeom>
+          <a:noFill/>
+        </p:spPr>
+        <p:txBody>
+          <a:bodyPr wrap="square" anchor="t" lIns="0" rIns="0" tIns="0" bIns="0">
+            <a:spAutoFit/>
+          </a:bodyPr>
+          <a:lstStyle/>
+          <a:p>
+            <a:pPr algn="l">
+              <a:lnSpc>
+                <a:spcPct val="145000"/>
+              </a:lnSpc>
+            </a:pPr>
+            <a:r>
+              <a:rPr sz="950" b="0">
+                <a:solidFill>
+                  <a:srgbClr val="6F6F6F"/>
+                </a:solidFill>
+                <a:latin typeface="Noto Sans KR"/>
+                <a:ea typeface="Noto Sans KR"/>
+                <a:cs typeface="Noto Sans KR"/>
+              </a:rPr>
+              <a:t>브랜드 필름, 커머스 영상, 소셜 콘텐츠. 같은 무드를 무빙으로 확장합니다.</a:t>
+            </a:r>
+          </a:p>
+        </p:txBody>
+      </p:sp>
+      <p:sp>
+        <p:nvSpPr>
+          <p:cNvPr id="21" name="Rectangle 20"/>
+          <p:cNvSpPr/>
+          <p:nvPr/>
+        </p:nvSpPr>
+        <p:spPr>
+          <a:xfrm>
+            <a:off x="603504" y="5020056"/>
+            <a:ext cx="10984687" cy="12700"/>
+          </a:xfrm>
+          <a:prstGeom prst="rect">
+            <a:avLst/>
+          </a:prstGeom>
+          <a:solidFill>
+            <a:srgbClr val="E5E5E3"/>
+          </a:solidFill>
+          <a:ln>
+            <a:noFill/>
+          </a:ln>
+          <a:effectLst/>
+        </p:spPr>
+        <p:txBody>
+          <a:bodyPr rtlCol="0" anchor="ctr"/>
+          <a:lstStyle/>
+          <a:p>
+            <a:pPr algn="ctr"/>
+          </a:p>
+        </p:txBody>
+      </p:sp>
+      <p:sp>
+        <p:nvSpPr>
+          <p:cNvPr id="22" name="TextBox 21"/>
+          <p:cNvSpPr txBox="1"/>
+          <p:nvPr/>
+        </p:nvSpPr>
+        <p:spPr>
+          <a:xfrm>
+            <a:off x="603504" y="5276088"/>
+            <a:ext cx="1188720" cy="548640"/>
+          </a:xfrm>
+          <a:prstGeom prst="rect">
+            <a:avLst/>
+          </a:prstGeom>
+          <a:noFill/>
+        </p:spPr>
+        <p:txBody>
+          <a:bodyPr wrap="square" anchor="t" lIns="0" rIns="0" tIns="0" bIns="0">
+            <a:spAutoFit/>
+          </a:bodyPr>
+          <a:lstStyle/>
+          <a:p>
+            <a:pPr algn="l"/>
+            <a:r>
+              <a:rPr sz="2400" b="0" spc="100">
+                <a:solidFill>
+                  <a:srgbClr val="A3A3A3"/>
+                </a:solidFill>
+                <a:latin typeface="Jost"/>
+                <a:ea typeface="Noto Sans KR"/>
+                <a:cs typeface="Noto Sans KR"/>
+              </a:rPr>
+              <a:t>05</a:t>
+            </a:r>
+          </a:p>
+        </p:txBody>
+      </p:sp>
+      <p:sp>
+        <p:nvSpPr>
+          <p:cNvPr id="23" name="TextBox 22"/>
+          <p:cNvSpPr txBox="1"/>
+          <p:nvPr/>
+        </p:nvSpPr>
+        <p:spPr>
+          <a:xfrm>
+            <a:off x="2020824" y="5239512"/>
+            <a:ext cx="5120640" cy="640080"/>
+          </a:xfrm>
+          <a:prstGeom prst="rect">
+            <a:avLst/>
+          </a:prstGeom>
+          <a:noFill/>
+        </p:spPr>
+        <p:txBody>
+          <a:bodyPr wrap="square" anchor="t" lIns="0" rIns="0" tIns="0" bIns="0">
+            <a:spAutoFit/>
+          </a:bodyPr>
+          <a:lstStyle/>
+          <a:p>
+            <a:pPr algn="l"/>
+            <a:r>
+              <a:rPr sz="2300" b="1">
+                <a:solidFill>
+                  <a:srgbClr val="0A0A0A"/>
+                </a:solidFill>
+                <a:latin typeface="Noto Sans KR"/>
+                <a:ea typeface="Noto Sans KR"/>
+                <a:cs typeface="Noto Sans KR"/>
+              </a:rPr>
+              <a:t>BX 디자인</a:t>
+            </a:r>
+          </a:p>
+        </p:txBody>
+      </p:sp>
+      <p:sp>
+        <p:nvSpPr>
+          <p:cNvPr id="24" name="TextBox 23"/>
+          <p:cNvSpPr txBox="1"/>
+          <p:nvPr/>
+        </p:nvSpPr>
+        <p:spPr>
+          <a:xfrm>
+            <a:off x="6903720" y="5330952"/>
+            <a:ext cx="4684471" cy="640080"/>
+          </a:xfrm>
+          <a:prstGeom prst="rect">
+            <a:avLst/>
+          </a:prstGeom>
+          <a:noFill/>
+        </p:spPr>
+        <p:txBody>
+          <a:bodyPr wrap="square" anchor="t" lIns="0" rIns="0" tIns="0" bIns="0">
+            <a:spAutoFit/>
+          </a:bodyPr>
+          <a:lstStyle/>
+          <a:p>
+            <a:pPr algn="l">
+              <a:lnSpc>
+                <a:spcPct val="145000"/>
+              </a:lnSpc>
+            </a:pPr>
+            <a:r>
+              <a:rPr sz="950" b="0">
+                <a:solidFill>
+                  <a:srgbClr val="6F6F6F"/>
+                </a:solidFill>
+                <a:latin typeface="Noto Sans KR"/>
+                <a:ea typeface="Noto Sans KR"/>
+                <a:cs typeface="Noto Sans KR"/>
+              </a:rPr>
+              <a:t>비주얼 아이덴티티부터 콘텐츠 시스템까지. 장면이 브랜드가 되도록.</a:t>
+            </a:r>
+          </a:p>
+        </p:txBody>
+      </p:sp>
+      <p:sp>
+        <p:nvSpPr>
+          <p:cNvPr id="25" name="Rectangle 24"/>
+          <p:cNvSpPr/>
+          <p:nvPr/>
+        </p:nvSpPr>
+        <p:spPr>
+          <a:xfrm>
+            <a:off x="603504" y="5989320"/>
+            <a:ext cx="10984687" cy="16510"/>
           </a:xfrm>
           <a:prstGeom prst="rect">
             <a:avLst/>
@@ -7143,14 +7507,14 @@
       </p:sp>
       <p:sp>
         <p:nvSpPr>
-          <p:cNvPr id="5" name="TextBox 4"/>
+          <p:cNvPr id="26" name="TextBox 25"/>
           <p:cNvSpPr txBox="1"/>
           <p:nvPr/>
         </p:nvSpPr>
         <p:spPr>
           <a:xfrm>
-            <a:off x="640080" y="2194560"/>
-            <a:ext cx="2270683" cy="2560320"/>
+            <a:off x="603504" y="6190488"/>
+            <a:ext cx="10984687" cy="365760"/>
           </a:xfrm>
           <a:prstGeom prst="rect">
             <a:avLst/>
@@ -7163,639 +7527,17 @@
           </a:bodyPr>
           <a:lstStyle/>
           <a:p>
-            <a:pPr algn="l">
-              <a:lnSpc>
-                <a:spcPct val="135000"/>
-              </a:lnSpc>
-              <a:spcAft>
-                <a:spcPts val="600"/>
-              </a:spcAft>
-            </a:pPr>
-            <a:r>
-              <a:rPr sz="900" b="0" spc="200">
+            <a:pPr algn="l"/>
+            <a:r>
+              <a:rPr sz="1050" b="0">
                 <a:solidFill>
                   <a:srgbClr val="6F6F6F"/>
                 </a:solidFill>
-                <a:latin typeface="Jost"/>
-                <a:ea typeface="Noto Sans KR"/>
-                <a:cs typeface="Noto Sans KR"/>
-              </a:rPr>
-              <a:t>STUDIO</a:t>
-            </a:r>
-          </a:p>
-          <a:p>
-            <a:pPr algn="l">
-              <a:lnSpc>
-                <a:spcPct val="135000"/>
-              </a:lnSpc>
-              <a:spcAft>
-                <a:spcPts val="600"/>
-              </a:spcAft>
-            </a:pPr>
-            <a:r>
-              <a:rPr sz="600" b="0">
-                <a:solidFill>
-                  <a:srgbClr val="6F6F6F"/>
-                </a:solidFill>
-                <a:latin typeface="Jost"/>
-                <a:ea typeface="Noto Sans KR"/>
-                <a:cs typeface="Noto Sans KR"/>
-              </a:rPr>
-              <a:t/>
-            </a:r>
-          </a:p>
-          <a:p>
-            <a:pPr algn="l">
-              <a:lnSpc>
-                <a:spcPct val="135000"/>
-              </a:lnSpc>
-              <a:spcAft>
-                <a:spcPts val="600"/>
-              </a:spcAft>
-            </a:pPr>
-            <a:r>
-              <a:rPr sz="1300" b="1">
-                <a:solidFill>
-                  <a:srgbClr val="0A0A0A"/>
-                </a:solidFill>
                 <a:latin typeface="Noto Sans KR"/>
                 <a:ea typeface="Noto Sans KR"/>
                 <a:cs typeface="Noto Sans KR"/>
               </a:rPr>
-              <a:t>스튜디오 홀리몰리</a:t>
-            </a:r>
-          </a:p>
-          <a:p>
-            <a:pPr algn="l">
-              <a:lnSpc>
-                <a:spcPct val="135000"/>
-              </a:lnSpc>
-              <a:spcAft>
-                <a:spcPts val="600"/>
-              </a:spcAft>
-            </a:pPr>
-            <a:r>
-              <a:rPr sz="1000" b="0">
-                <a:solidFill>
-                  <a:srgbClr val="6F6F6F"/>
-                </a:solidFill>
-                <a:latin typeface="Noto Sans KR"/>
-                <a:ea typeface="Noto Sans KR"/>
-                <a:cs typeface="Noto Sans KR"/>
-              </a:rPr>
-              <a:t>Visual Direction Studio</a:t>
-            </a:r>
-          </a:p>
-        </p:txBody>
-      </p:sp>
-      <p:sp>
-        <p:nvSpPr>
-          <p:cNvPr id="6" name="Rectangle 5"/>
-          <p:cNvSpPr/>
-          <p:nvPr/>
-        </p:nvSpPr>
-        <p:spPr>
-          <a:xfrm>
-            <a:off x="3362248" y="1828800"/>
-            <a:ext cx="11430" cy="2926080"/>
-          </a:xfrm>
-          <a:prstGeom prst="rect">
-            <a:avLst/>
-          </a:prstGeom>
-          <a:solidFill>
-            <a:srgbClr val="E5E5E3"/>
-          </a:solidFill>
-          <a:ln>
-            <a:noFill/>
-          </a:ln>
-          <a:effectLst/>
-        </p:spPr>
-        <p:txBody>
-          <a:bodyPr rtlCol="0" anchor="ctr"/>
-          <a:lstStyle/>
-          <a:p>
-            <a:pPr algn="ctr"/>
-          </a:p>
-        </p:txBody>
-      </p:sp>
-      <p:sp>
-        <p:nvSpPr>
-          <p:cNvPr id="7" name="TextBox 6"/>
-          <p:cNvSpPr txBox="1"/>
-          <p:nvPr/>
-        </p:nvSpPr>
-        <p:spPr>
-          <a:xfrm>
-            <a:off x="3623995" y="2194560"/>
-            <a:ext cx="2270683" cy="2560320"/>
-          </a:xfrm>
-          <a:prstGeom prst="rect">
-            <a:avLst/>
-          </a:prstGeom>
-          <a:noFill/>
-        </p:spPr>
-        <p:txBody>
-          <a:bodyPr wrap="square" anchor="t" lIns="0" rIns="0" tIns="0" bIns="0">
-            <a:spAutoFit/>
-          </a:bodyPr>
-          <a:lstStyle/>
-          <a:p>
-            <a:pPr algn="l">
-              <a:lnSpc>
-                <a:spcPct val="135000"/>
-              </a:lnSpc>
-              <a:spcAft>
-                <a:spcPts val="600"/>
-              </a:spcAft>
-            </a:pPr>
-            <a:r>
-              <a:rPr sz="900" b="0" spc="200">
-                <a:solidFill>
-                  <a:srgbClr val="6F6F6F"/>
-                </a:solidFill>
-                <a:latin typeface="Jost"/>
-                <a:ea typeface="Noto Sans KR"/>
-                <a:cs typeface="Noto Sans KR"/>
-              </a:rPr>
-              <a:t>FIELD</a:t>
-            </a:r>
-          </a:p>
-          <a:p>
-            <a:pPr algn="l">
-              <a:lnSpc>
-                <a:spcPct val="135000"/>
-              </a:lnSpc>
-              <a:spcAft>
-                <a:spcPts val="600"/>
-              </a:spcAft>
-            </a:pPr>
-            <a:r>
-              <a:rPr sz="600" b="0">
-                <a:solidFill>
-                  <a:srgbClr val="6F6F6F"/>
-                </a:solidFill>
-                <a:latin typeface="Jost"/>
-                <a:ea typeface="Noto Sans KR"/>
-                <a:cs typeface="Noto Sans KR"/>
-              </a:rPr>
-              <a:t/>
-            </a:r>
-          </a:p>
-          <a:p>
-            <a:pPr algn="l">
-              <a:lnSpc>
-                <a:spcPct val="135000"/>
-              </a:lnSpc>
-              <a:spcAft>
-                <a:spcPts val="600"/>
-              </a:spcAft>
-            </a:pPr>
-            <a:r>
-              <a:rPr sz="1300" b="1">
-                <a:solidFill>
-                  <a:srgbClr val="0A0A0A"/>
-                </a:solidFill>
-                <a:latin typeface="Noto Sans KR"/>
-                <a:ea typeface="Noto Sans KR"/>
-                <a:cs typeface="Noto Sans KR"/>
-              </a:rPr>
-              <a:t>Photo · Film · Branding</a:t>
-            </a:r>
-          </a:p>
-          <a:p>
-            <a:pPr algn="l">
-              <a:lnSpc>
-                <a:spcPct val="135000"/>
-              </a:lnSpc>
-              <a:spcAft>
-                <a:spcPts val="600"/>
-              </a:spcAft>
-            </a:pPr>
-            <a:r>
-              <a:rPr sz="1000" b="0">
-                <a:solidFill>
-                  <a:srgbClr val="6F6F6F"/>
-                </a:solidFill>
-                <a:latin typeface="Noto Sans KR"/>
-                <a:ea typeface="Noto Sans KR"/>
-                <a:cs typeface="Noto Sans KR"/>
-              </a:rPr>
-              <a:t>기획부터 촬영, 브랜드 경험 설계까지</a:t>
-            </a:r>
-          </a:p>
-        </p:txBody>
-      </p:sp>
-      <p:sp>
-        <p:nvSpPr>
-          <p:cNvPr id="8" name="Rectangle 7"/>
-          <p:cNvSpPr/>
-          <p:nvPr/>
-        </p:nvSpPr>
-        <p:spPr>
-          <a:xfrm>
-            <a:off x="6090132" y="1828800"/>
-            <a:ext cx="11430" cy="2926080"/>
-          </a:xfrm>
-          <a:prstGeom prst="rect">
-            <a:avLst/>
-          </a:prstGeom>
-          <a:solidFill>
-            <a:srgbClr val="E5E5E3"/>
-          </a:solidFill>
-          <a:ln>
-            <a:noFill/>
-          </a:ln>
-          <a:effectLst/>
-        </p:spPr>
-        <p:txBody>
-          <a:bodyPr rtlCol="0" anchor="ctr"/>
-          <a:lstStyle/>
-          <a:p>
-            <a:pPr algn="ctr"/>
-          </a:p>
-        </p:txBody>
-      </p:sp>
-      <p:sp>
-        <p:nvSpPr>
-          <p:cNvPr id="9" name="TextBox 8"/>
-          <p:cNvSpPr txBox="1"/>
-          <p:nvPr/>
-        </p:nvSpPr>
-        <p:spPr>
-          <a:xfrm>
-            <a:off x="6351879" y="2194560"/>
-            <a:ext cx="2270683" cy="2560320"/>
-          </a:xfrm>
-          <a:prstGeom prst="rect">
-            <a:avLst/>
-          </a:prstGeom>
-          <a:noFill/>
-        </p:spPr>
-        <p:txBody>
-          <a:bodyPr wrap="square" anchor="t" lIns="0" rIns="0" tIns="0" bIns="0">
-            <a:spAutoFit/>
-          </a:bodyPr>
-          <a:lstStyle/>
-          <a:p>
-            <a:pPr algn="l">
-              <a:lnSpc>
-                <a:spcPct val="135000"/>
-              </a:lnSpc>
-              <a:spcAft>
-                <a:spcPts val="600"/>
-              </a:spcAft>
-            </a:pPr>
-            <a:r>
-              <a:rPr sz="900" b="0" spc="200">
-                <a:solidFill>
-                  <a:srgbClr val="6F6F6F"/>
-                </a:solidFill>
-                <a:latin typeface="Jost"/>
-                <a:ea typeface="Noto Sans KR"/>
-                <a:cs typeface="Noto Sans KR"/>
-              </a:rPr>
-              <a:t>LOCATION</a:t>
-            </a:r>
-          </a:p>
-          <a:p>
-            <a:pPr algn="l">
-              <a:lnSpc>
-                <a:spcPct val="135000"/>
-              </a:lnSpc>
-              <a:spcAft>
-                <a:spcPts val="600"/>
-              </a:spcAft>
-            </a:pPr>
-            <a:r>
-              <a:rPr sz="600" b="0">
-                <a:solidFill>
-                  <a:srgbClr val="6F6F6F"/>
-                </a:solidFill>
-                <a:latin typeface="Jost"/>
-                <a:ea typeface="Noto Sans KR"/>
-                <a:cs typeface="Noto Sans KR"/>
-              </a:rPr>
-              <a:t/>
-            </a:r>
-          </a:p>
-          <a:p>
-            <a:pPr algn="l">
-              <a:lnSpc>
-                <a:spcPct val="135000"/>
-              </a:lnSpc>
-              <a:spcAft>
-                <a:spcPts val="600"/>
-              </a:spcAft>
-            </a:pPr>
-            <a:r>
-              <a:rPr sz="1300" b="1">
-                <a:solidFill>
-                  <a:srgbClr val="0A0A0A"/>
-                </a:solidFill>
-                <a:latin typeface="Noto Sans KR"/>
-                <a:ea typeface="Noto Sans KR"/>
-                <a:cs typeface="Noto Sans KR"/>
-              </a:rPr>
-              <a:t>서울 강남구 역삼동 783-2, B1</a:t>
-            </a:r>
-          </a:p>
-          <a:p>
-            <a:pPr algn="l">
-              <a:lnSpc>
-                <a:spcPct val="135000"/>
-              </a:lnSpc>
-              <a:spcAft>
-                <a:spcPts val="600"/>
-              </a:spcAft>
-            </a:pPr>
-            <a:r>
-              <a:rPr sz="1000" b="0">
-                <a:solidFill>
-                  <a:srgbClr val="6F6F6F"/>
-                </a:solidFill>
-                <a:latin typeface="Noto Sans KR"/>
-                <a:ea typeface="Noto Sans KR"/>
-                <a:cs typeface="Noto Sans KR"/>
-              </a:rPr>
-              <a:t>스튜디오 및 로케이션 촬영</a:t>
-            </a:r>
-          </a:p>
-        </p:txBody>
-      </p:sp>
-      <p:sp>
-        <p:nvSpPr>
-          <p:cNvPr id="10" name="Rectangle 9"/>
-          <p:cNvSpPr/>
-          <p:nvPr/>
-        </p:nvSpPr>
-        <p:spPr>
-          <a:xfrm>
-            <a:off x="8818016" y="1828800"/>
-            <a:ext cx="11430" cy="2926080"/>
-          </a:xfrm>
-          <a:prstGeom prst="rect">
-            <a:avLst/>
-          </a:prstGeom>
-          <a:solidFill>
-            <a:srgbClr val="E5E5E3"/>
-          </a:solidFill>
-          <a:ln>
-            <a:noFill/>
-          </a:ln>
-          <a:effectLst/>
-        </p:spPr>
-        <p:txBody>
-          <a:bodyPr rtlCol="0" anchor="ctr"/>
-          <a:lstStyle/>
-          <a:p>
-            <a:pPr algn="ctr"/>
-          </a:p>
-        </p:txBody>
-      </p:sp>
-      <p:sp>
-        <p:nvSpPr>
-          <p:cNvPr id="11" name="TextBox 10"/>
-          <p:cNvSpPr txBox="1"/>
-          <p:nvPr/>
-        </p:nvSpPr>
-        <p:spPr>
-          <a:xfrm>
-            <a:off x="9079763" y="2194560"/>
-            <a:ext cx="2270683" cy="2560320"/>
-          </a:xfrm>
-          <a:prstGeom prst="rect">
-            <a:avLst/>
-          </a:prstGeom>
-          <a:noFill/>
-        </p:spPr>
-        <p:txBody>
-          <a:bodyPr wrap="square" anchor="t" lIns="0" rIns="0" tIns="0" bIns="0">
-            <a:spAutoFit/>
-          </a:bodyPr>
-          <a:lstStyle/>
-          <a:p>
-            <a:pPr algn="l">
-              <a:lnSpc>
-                <a:spcPct val="135000"/>
-              </a:lnSpc>
-              <a:spcAft>
-                <a:spcPts val="600"/>
-              </a:spcAft>
-            </a:pPr>
-            <a:r>
-              <a:rPr sz="900" b="0" spc="200">
-                <a:solidFill>
-                  <a:srgbClr val="6F6F6F"/>
-                </a:solidFill>
-                <a:latin typeface="Jost"/>
-                <a:ea typeface="Noto Sans KR"/>
-                <a:cs typeface="Noto Sans KR"/>
-              </a:rPr>
-              <a:t>CONTACT</a:t>
-            </a:r>
-          </a:p>
-          <a:p>
-            <a:pPr algn="l">
-              <a:lnSpc>
-                <a:spcPct val="135000"/>
-              </a:lnSpc>
-              <a:spcAft>
-                <a:spcPts val="600"/>
-              </a:spcAft>
-            </a:pPr>
-            <a:r>
-              <a:rPr sz="600" b="0">
-                <a:solidFill>
-                  <a:srgbClr val="6F6F6F"/>
-                </a:solidFill>
-                <a:latin typeface="Jost"/>
-                <a:ea typeface="Noto Sans KR"/>
-                <a:cs typeface="Noto Sans KR"/>
-              </a:rPr>
-              <a:t/>
-            </a:r>
-          </a:p>
-          <a:p>
-            <a:pPr algn="l">
-              <a:lnSpc>
-                <a:spcPct val="135000"/>
-              </a:lnSpc>
-              <a:spcAft>
-                <a:spcPts val="600"/>
-              </a:spcAft>
-            </a:pPr>
-            <a:r>
-              <a:rPr sz="1100" b="1">
-                <a:solidFill>
-                  <a:srgbClr val="0A0A0A"/>
-                </a:solidFill>
-                <a:latin typeface="Noto Sans KR"/>
-                <a:ea typeface="Noto Sans KR"/>
-                <a:cs typeface="Noto Sans KR"/>
-              </a:rPr>
-              <a:t>studio.holymolly@gmail.com</a:t>
-            </a:r>
-          </a:p>
-          <a:p>
-            <a:pPr algn="l">
-              <a:lnSpc>
-                <a:spcPct val="135000"/>
-              </a:lnSpc>
-              <a:spcAft>
-                <a:spcPts val="600"/>
-              </a:spcAft>
-            </a:pPr>
-            <a:r>
-              <a:rPr sz="1000" b="0">
-                <a:solidFill>
-                  <a:srgbClr val="6F6F6F"/>
-                </a:solidFill>
-                <a:latin typeface="Noto Sans KR"/>
-                <a:ea typeface="Noto Sans KR"/>
-                <a:cs typeface="Noto Sans KR"/>
-              </a:rPr>
-              <a:t>@studio_holymolly</a:t>
-            </a:r>
-          </a:p>
-        </p:txBody>
-      </p:sp>
-      <p:sp>
-        <p:nvSpPr>
-          <p:cNvPr id="12" name="Rectangle 11"/>
-          <p:cNvSpPr/>
-          <p:nvPr/>
-        </p:nvSpPr>
-        <p:spPr>
-          <a:xfrm>
-            <a:off x="640080" y="4754880"/>
-            <a:ext cx="10911535" cy="11430"/>
-          </a:xfrm>
-          <a:prstGeom prst="rect">
-            <a:avLst/>
-          </a:prstGeom>
-          <a:solidFill>
-            <a:srgbClr val="E5E5E3"/>
-          </a:solidFill>
-          <a:ln>
-            <a:noFill/>
-          </a:ln>
-          <a:effectLst/>
-        </p:spPr>
-        <p:txBody>
-          <a:bodyPr rtlCol="0" anchor="ctr"/>
-          <a:lstStyle/>
-          <a:p>
-            <a:pPr algn="ctr"/>
-          </a:p>
-        </p:txBody>
-      </p:sp>
-      <p:sp>
-        <p:nvSpPr>
-          <p:cNvPr id="13" name="TextBox 12"/>
-          <p:cNvSpPr txBox="1"/>
-          <p:nvPr/>
-        </p:nvSpPr>
-        <p:spPr>
-          <a:xfrm>
-            <a:off x="640080" y="5212080"/>
-            <a:ext cx="10911535" cy="731520"/>
-          </a:xfrm>
-          <a:prstGeom prst="rect">
-            <a:avLst/>
-          </a:prstGeom>
-          <a:noFill/>
-        </p:spPr>
-        <p:txBody>
-          <a:bodyPr wrap="square" anchor="t" lIns="0" rIns="0" tIns="0" bIns="0">
-            <a:spAutoFit/>
-          </a:bodyPr>
-          <a:lstStyle/>
-          <a:p>
-            <a:pPr algn="l"/>
-            <a:r>
-              <a:rPr sz="950" b="0">
-                <a:solidFill>
-                  <a:srgbClr val="A3A3A3"/>
-                </a:solidFill>
-                <a:latin typeface="Noto Sans KR"/>
-                <a:ea typeface="Noto Sans KR"/>
-                <a:cs typeface="Noto Sans KR"/>
-              </a:rPr>
-              <a:t>* 누적 프로젝트 수 · 함께한 브랜드 수 등 실적 숫자는 확정되는 대로 이 페이지에 추가</a:t>
-            </a:r>
-          </a:p>
-        </p:txBody>
-      </p:sp>
-      <p:sp>
-        <p:nvSpPr>
-          <p:cNvPr id="14" name="TextBox 13"/>
-          <p:cNvSpPr txBox="1"/>
-          <p:nvPr/>
-        </p:nvSpPr>
-        <p:spPr>
-          <a:xfrm>
-            <a:off x="640080" y="6473952"/>
-            <a:ext cx="3657600" cy="274320"/>
-          </a:xfrm>
-          <a:prstGeom prst="rect">
-            <a:avLst/>
-          </a:prstGeom>
-          <a:noFill/>
-        </p:spPr>
-        <p:txBody>
-          <a:bodyPr wrap="square" anchor="t" lIns="0" rIns="0" tIns="0" bIns="0">
-            <a:spAutoFit/>
-          </a:bodyPr>
-          <a:lstStyle/>
-          <a:p>
-            <a:pPr algn="l"/>
-            <a:r>
-              <a:rPr sz="800" b="0" spc="150">
-                <a:solidFill>
-                  <a:srgbClr val="A3A3A3"/>
-                </a:solidFill>
-                <a:latin typeface="Jost"/>
-                <a:ea typeface="Noto Sans KR"/>
-                <a:cs typeface="Noto Sans KR"/>
-              </a:rPr>
-              <a:t>STUDIO. HOLYMOLLY</a:t>
-            </a:r>
-          </a:p>
-        </p:txBody>
-      </p:sp>
-      <p:sp>
-        <p:nvSpPr>
-          <p:cNvPr id="15" name="TextBox 14"/>
-          <p:cNvSpPr txBox="1"/>
-          <p:nvPr/>
-        </p:nvSpPr>
-        <p:spPr>
-          <a:xfrm>
-            <a:off x="10637215" y="6473952"/>
-            <a:ext cx="914400" cy="274320"/>
-          </a:xfrm>
-          <a:prstGeom prst="rect">
-            <a:avLst/>
-          </a:prstGeom>
-          <a:noFill/>
-        </p:spPr>
-        <p:txBody>
-          <a:bodyPr wrap="square" anchor="t" lIns="0" rIns="0" tIns="0" bIns="0">
-            <a:spAutoFit/>
-          </a:bodyPr>
-          <a:lstStyle/>
-          <a:p>
-            <a:pPr algn="r"/>
-            <a:r>
-              <a:rPr sz="800" b="0" spc="150">
-                <a:solidFill>
-                  <a:srgbClr val="A3A3A3"/>
-                </a:solidFill>
-                <a:latin typeface="Jost"/>
-                <a:ea typeface="Noto Sans KR"/>
-                <a:cs typeface="Noto Sans KR"/>
-              </a:rPr>
-              <a:t>04</a:t>
+              <a:t>사진 · 영상 · 디자인을 한 팀이 진행하면, 채널 전체가 하나의 무드로 이어집니다.</a:t>
             </a:r>
           </a:p>
         </p:txBody>
@@ -7833,7 +7575,7 @@
             <a:avLst/>
           </a:prstGeom>
           <a:solidFill>
-            <a:srgbClr val="FAFAF8"/>
+            <a:srgbClr val="111111"/>
           </a:solidFill>
           <a:ln>
             <a:noFill/>
@@ -7856,8 +7598,8 @@
         </p:nvSpPr>
         <p:spPr>
           <a:xfrm>
-            <a:off x="640080" y="502920"/>
-            <a:ext cx="7315200" cy="320040"/>
+            <a:off x="603504" y="310896"/>
+            <a:ext cx="8229600" cy="274320"/>
           </a:xfrm>
           <a:prstGeom prst="rect">
             <a:avLst/>
@@ -7872,15 +7614,15 @@
           <a:p>
             <a:pPr algn="l"/>
             <a:r>
-              <a:rPr sz="1000" b="0" spc="200">
-                <a:solidFill>
-                  <a:srgbClr val="6F6F6F"/>
+              <a:rPr sz="900" b="0" spc="220">
+                <a:solidFill>
+                  <a:srgbClr val="8A8A8A"/>
                 </a:solidFill>
                 <a:latin typeface="Jost"/>
                 <a:ea typeface="Noto Sans KR"/>
                 <a:cs typeface="Noto Sans KR"/>
               </a:rPr>
-              <a:t>SERVICES</a:t>
+              <a:t>SELECTED WORKS</a:t>
             </a:r>
           </a:p>
         </p:txBody>
@@ -7893,8 +7635,8 @@
         </p:nvSpPr>
         <p:spPr>
           <a:xfrm>
-            <a:off x="640080" y="914400"/>
-            <a:ext cx="10911535" cy="1188720"/>
+            <a:off x="566928" y="1554480"/>
+            <a:ext cx="12344400" cy="2560320"/>
           </a:xfrm>
           <a:prstGeom prst="rect">
             <a:avLst/>
@@ -7907,41 +7649,74 @@
           </a:bodyPr>
           <a:lstStyle/>
           <a:p>
-            <a:pPr algn="l">
-              <a:lnSpc>
-                <a:spcPct val="115000"/>
-              </a:lnSpc>
-            </a:pPr>
-            <a:r>
-              <a:rPr sz="2400" b="1">
-                <a:solidFill>
-                  <a:srgbClr val="0A0A0A"/>
+            <a:pPr algn="l"/>
+            <a:r>
+              <a:rPr sz="16000" b="0" spc="150">
+                <a:solidFill>
+                  <a:srgbClr val="FAFAF8"/>
+                </a:solidFill>
+                <a:latin typeface="Jost"/>
+                <a:ea typeface="Noto Sans KR"/>
+                <a:cs typeface="Noto Sans KR"/>
+              </a:rPr>
+              <a:t>WORKS →</a:t>
+            </a:r>
+          </a:p>
+        </p:txBody>
+      </p:sp>
+      <p:sp>
+        <p:nvSpPr>
+          <p:cNvPr id="5" name="TextBox 4"/>
+          <p:cNvSpPr txBox="1"/>
+          <p:nvPr/>
+        </p:nvSpPr>
+        <p:spPr>
+          <a:xfrm>
+            <a:off x="603504" y="4160520"/>
+            <a:ext cx="9144000" cy="548640"/>
+          </a:xfrm>
+          <a:prstGeom prst="rect">
+            <a:avLst/>
+          </a:prstGeom>
+          <a:noFill/>
+        </p:spPr>
+        <p:txBody>
+          <a:bodyPr wrap="square" anchor="t" lIns="0" rIns="0" tIns="0" bIns="0">
+            <a:spAutoFit/>
+          </a:bodyPr>
+          <a:lstStyle/>
+          <a:p>
+            <a:pPr algn="l"/>
+            <a:r>
+              <a:rPr sz="1300" b="0">
+                <a:solidFill>
+                  <a:srgbClr val="9A9A9A"/>
                 </a:solidFill>
                 <a:latin typeface="Noto Sans KR"/>
                 <a:ea typeface="Noto Sans KR"/>
                 <a:cs typeface="Noto Sans KR"/>
               </a:rPr>
-              <a:t>이런 작업을 함께합니다</a:t>
-            </a:r>
-          </a:p>
-        </p:txBody>
-      </p:sp>
-      <p:sp>
-        <p:nvSpPr>
-          <p:cNvPr id="5" name="Rectangle 4"/>
+              <a:t>말보다 컷이 빠릅니다. 작업물은 여기서 보세요.</a:t>
+            </a:r>
+          </a:p>
+        </p:txBody>
+      </p:sp>
+      <p:sp>
+        <p:nvSpPr>
+          <p:cNvPr id="6" name="Rectangle 5"/>
           <p:cNvSpPr/>
           <p:nvPr/>
         </p:nvSpPr>
         <p:spPr>
           <a:xfrm>
-            <a:off x="640080" y="2057400"/>
-            <a:ext cx="10911535" cy="11430"/>
+            <a:off x="603504" y="5074920"/>
+            <a:ext cx="10984687" cy="12700"/>
           </a:xfrm>
           <a:prstGeom prst="rect">
             <a:avLst/>
           </a:prstGeom>
           <a:solidFill>
-            <a:srgbClr val="E5E5E3"/>
+            <a:srgbClr val="2E2E2E"/>
           </a:solidFill>
           <a:ln>
             <a:noFill/>
@@ -7958,14 +7733,14 @@
       </p:sp>
       <p:sp>
         <p:nvSpPr>
-          <p:cNvPr id="6" name="TextBox 5"/>
+          <p:cNvPr id="7" name="TextBox 6"/>
           <p:cNvSpPr txBox="1"/>
           <p:nvPr/>
         </p:nvSpPr>
         <p:spPr>
           <a:xfrm>
-            <a:off x="640080" y="2331720"/>
-            <a:ext cx="822960" cy="365760"/>
+            <a:off x="603504" y="5349240"/>
+            <a:ext cx="3295802" cy="914400"/>
           </a:xfrm>
           <a:prstGeom prst="rect">
             <a:avLst/>
@@ -7978,31 +7753,53 @@
           </a:bodyPr>
           <a:lstStyle/>
           <a:p>
-            <a:pPr algn="l"/>
-            <a:r>
-              <a:rPr sz="1100" b="0" spc="150">
-                <a:solidFill>
-                  <a:srgbClr val="A3A3A3"/>
+            <a:pPr algn="l">
+              <a:lnSpc>
+                <a:spcPct val="180000"/>
+              </a:lnSpc>
+            </a:pPr>
+            <a:r>
+              <a:rPr sz="850" b="0" spc="220">
+                <a:solidFill>
+                  <a:srgbClr val="8A8A8A"/>
                 </a:solidFill>
                 <a:latin typeface="Jost"/>
                 <a:ea typeface="Noto Sans KR"/>
                 <a:cs typeface="Noto Sans KR"/>
               </a:rPr>
-              <a:t>01</a:t>
-            </a:r>
-          </a:p>
-        </p:txBody>
-      </p:sp>
-      <p:sp>
-        <p:nvSpPr>
-          <p:cNvPr id="7" name="TextBox 6"/>
+              <a:t>PORTFOLIO</a:t>
+            </a:r>
+          </a:p>
+          <a:p>
+            <a:pPr algn="l">
+              <a:lnSpc>
+                <a:spcPct val="180000"/>
+              </a:lnSpc>
+            </a:pPr>
+            <a:r>
+              <a:rPr sz="1300" b="1">
+                <a:solidFill>
+                  <a:srgbClr val="FAFAF8"/>
+                </a:solidFill>
+                <a:latin typeface="Jost"/>
+                <a:ea typeface="Noto Sans KR"/>
+                <a:cs typeface="Noto Sans KR"/>
+              </a:rPr>
+              <a:t>studioholymolly.myportfolio.com</a:t>
+            </a:r>
+          </a:p>
+        </p:txBody>
+      </p:sp>
+      <p:sp>
+        <p:nvSpPr>
+          <p:cNvPr id="8" name="TextBox 7"/>
           <p:cNvSpPr txBox="1"/>
           <p:nvPr/>
         </p:nvSpPr>
         <p:spPr>
           <a:xfrm>
-            <a:off x="1645920" y="2258568"/>
-            <a:ext cx="4206240" cy="548640"/>
+            <a:off x="4265066" y="5349240"/>
+            <a:ext cx="3295802" cy="914400"/>
           </a:xfrm>
           <a:prstGeom prst="rect">
             <a:avLst/>
@@ -8015,31 +7812,53 @@
           </a:bodyPr>
           <a:lstStyle/>
           <a:p>
-            <a:pPr algn="l"/>
-            <a:r>
-              <a:rPr sz="1800" b="1">
-                <a:solidFill>
-                  <a:srgbClr val="0A0A0A"/>
-                </a:solidFill>
-                <a:latin typeface="Noto Sans KR"/>
-                <a:ea typeface="Noto Sans KR"/>
-                <a:cs typeface="Noto Sans KR"/>
-              </a:rPr>
-              <a:t>뷰티 &amp; 제품</a:t>
-            </a:r>
-          </a:p>
-        </p:txBody>
-      </p:sp>
-      <p:sp>
-        <p:nvSpPr>
-          <p:cNvPr id="8" name="TextBox 7"/>
+            <a:pPr algn="l">
+              <a:lnSpc>
+                <a:spcPct val="180000"/>
+              </a:lnSpc>
+            </a:pPr>
+            <a:r>
+              <a:rPr sz="850" b="0" spc="220">
+                <a:solidFill>
+                  <a:srgbClr val="8A8A8A"/>
+                </a:solidFill>
+                <a:latin typeface="Jost"/>
+                <a:ea typeface="Noto Sans KR"/>
+                <a:cs typeface="Noto Sans KR"/>
+              </a:rPr>
+              <a:t>INSTAGRAM</a:t>
+            </a:r>
+          </a:p>
+          <a:p>
+            <a:pPr algn="l">
+              <a:lnSpc>
+                <a:spcPct val="180000"/>
+              </a:lnSpc>
+            </a:pPr>
+            <a:r>
+              <a:rPr sz="1300" b="1">
+                <a:solidFill>
+                  <a:srgbClr val="FAFAF8"/>
+                </a:solidFill>
+                <a:latin typeface="Jost"/>
+                <a:ea typeface="Noto Sans KR"/>
+                <a:cs typeface="Noto Sans KR"/>
+              </a:rPr>
+              <a:t>@studio_holymolly</a:t>
+            </a:r>
+          </a:p>
+        </p:txBody>
+      </p:sp>
+      <p:sp>
+        <p:nvSpPr>
+          <p:cNvPr id="9" name="TextBox 8"/>
           <p:cNvSpPr txBox="1"/>
           <p:nvPr/>
         </p:nvSpPr>
         <p:spPr>
           <a:xfrm>
-            <a:off x="6217920" y="2313432"/>
-            <a:ext cx="5333695" cy="960120"/>
+            <a:off x="7926628" y="5349240"/>
+            <a:ext cx="3295802" cy="914400"/>
           </a:xfrm>
           <a:prstGeom prst="rect">
             <a:avLst/>
@@ -8054,50 +7873,38 @@
           <a:p>
             <a:pPr algn="l">
               <a:lnSpc>
-                <a:spcPct val="150000"/>
+                <a:spcPct val="180000"/>
               </a:lnSpc>
             </a:pPr>
             <a:r>
-              <a:rPr sz="1100" b="0">
-                <a:solidFill>
-                  <a:srgbClr val="6F6F6F"/>
-                </a:solidFill>
-                <a:latin typeface="Noto Sans KR"/>
-                <a:ea typeface="Noto Sans KR"/>
-                <a:cs typeface="Noto Sans KR"/>
-              </a:rPr>
-              <a:t>코스메틱의 제형과 컬러, 제품의 형태와 소재를 정교하게 담아냅니다. 스마트스토어 컷부터 브랜드 캠페인까지, 제품이 팔리게 하는 컷을 만듭니다.</a:t>
-            </a:r>
-          </a:p>
-        </p:txBody>
-      </p:sp>
-      <p:sp>
-        <p:nvSpPr>
-          <p:cNvPr id="9" name="Rectangle 8"/>
-          <p:cNvSpPr/>
-          <p:nvPr/>
-        </p:nvSpPr>
-        <p:spPr>
-          <a:xfrm>
-            <a:off x="640080" y="3355848"/>
-            <a:ext cx="10911535" cy="11430"/>
-          </a:xfrm>
-          <a:prstGeom prst="rect">
-            <a:avLst/>
-          </a:prstGeom>
-          <a:solidFill>
-            <a:srgbClr val="E5E5E3"/>
-          </a:solidFill>
-          <a:ln>
-            <a:noFill/>
-          </a:ln>
-          <a:effectLst/>
-        </p:spPr>
-        <p:txBody>
-          <a:bodyPr rtlCol="0" anchor="ctr"/>
-          <a:lstStyle/>
-          <a:p>
-            <a:pPr algn="ctr"/>
+              <a:rPr sz="850" b="0" spc="220">
+                <a:solidFill>
+                  <a:srgbClr val="8A8A8A"/>
+                </a:solidFill>
+                <a:latin typeface="Jost"/>
+                <a:ea typeface="Noto Sans KR"/>
+                <a:cs typeface="Noto Sans KR"/>
+              </a:rPr>
+              <a:t>THREADS</a:t>
+            </a:r>
+          </a:p>
+          <a:p>
+            <a:pPr algn="l">
+              <a:lnSpc>
+                <a:spcPct val="180000"/>
+              </a:lnSpc>
+            </a:pPr>
+            <a:r>
+              <a:rPr sz="1300" b="1">
+                <a:solidFill>
+                  <a:srgbClr val="FAFAF8"/>
+                </a:solidFill>
+                <a:latin typeface="Jost"/>
+                <a:ea typeface="Noto Sans KR"/>
+                <a:cs typeface="Noto Sans KR"/>
+              </a:rPr>
+              <a:t>@studio_holymolly</a:t>
+            </a:r>
           </a:p>
         </p:txBody>
       </p:sp>
@@ -8109,8 +7916,8 @@
         </p:nvSpPr>
         <p:spPr>
           <a:xfrm>
-            <a:off x="640080" y="3630168"/>
-            <a:ext cx="822960" cy="365760"/>
+            <a:off x="10490911" y="6309360"/>
+            <a:ext cx="1097280" cy="274320"/>
           </a:xfrm>
           <a:prstGeom prst="rect">
             <a:avLst/>
@@ -8123,338 +7930,11 @@
           </a:bodyPr>
           <a:lstStyle/>
           <a:p>
-            <a:pPr algn="l"/>
-            <a:r>
-              <a:rPr sz="1100" b="0" spc="150">
-                <a:solidFill>
-                  <a:srgbClr val="A3A3A3"/>
-                </a:solidFill>
-                <a:latin typeface="Jost"/>
-                <a:ea typeface="Noto Sans KR"/>
-                <a:cs typeface="Noto Sans KR"/>
-              </a:rPr>
-              <a:t>02</a:t>
-            </a:r>
-          </a:p>
-        </p:txBody>
-      </p:sp>
-      <p:sp>
-        <p:nvSpPr>
-          <p:cNvPr id="11" name="TextBox 10"/>
-          <p:cNvSpPr txBox="1"/>
-          <p:nvPr/>
-        </p:nvSpPr>
-        <p:spPr>
-          <a:xfrm>
-            <a:off x="1645920" y="3557016"/>
-            <a:ext cx="4206240" cy="548640"/>
-          </a:xfrm>
-          <a:prstGeom prst="rect">
-            <a:avLst/>
-          </a:prstGeom>
-          <a:noFill/>
-        </p:spPr>
-        <p:txBody>
-          <a:bodyPr wrap="square" anchor="t" lIns="0" rIns="0" tIns="0" bIns="0">
-            <a:spAutoFit/>
-          </a:bodyPr>
-          <a:lstStyle/>
-          <a:p>
-            <a:pPr algn="l"/>
-            <a:r>
-              <a:rPr sz="1800" b="1">
-                <a:solidFill>
-                  <a:srgbClr val="0A0A0A"/>
-                </a:solidFill>
-                <a:latin typeface="Noto Sans KR"/>
-                <a:ea typeface="Noto Sans KR"/>
-                <a:cs typeface="Noto Sans KR"/>
-              </a:rPr>
-              <a:t>F&amp;B &amp; 라이프스타일</a:t>
-            </a:r>
-          </a:p>
-        </p:txBody>
-      </p:sp>
-      <p:sp>
-        <p:nvSpPr>
-          <p:cNvPr id="12" name="TextBox 11"/>
-          <p:cNvSpPr txBox="1"/>
-          <p:nvPr/>
-        </p:nvSpPr>
-        <p:spPr>
-          <a:xfrm>
-            <a:off x="6217920" y="3611880"/>
-            <a:ext cx="5333695" cy="960120"/>
-          </a:xfrm>
-          <a:prstGeom prst="rect">
-            <a:avLst/>
-          </a:prstGeom>
-          <a:noFill/>
-        </p:spPr>
-        <p:txBody>
-          <a:bodyPr wrap="square" anchor="t" lIns="0" rIns="0" tIns="0" bIns="0">
-            <a:spAutoFit/>
-          </a:bodyPr>
-          <a:lstStyle/>
-          <a:p>
-            <a:pPr algn="l">
-              <a:lnSpc>
-                <a:spcPct val="150000"/>
-              </a:lnSpc>
-            </a:pPr>
-            <a:r>
-              <a:rPr sz="1100" b="0">
-                <a:solidFill>
-                  <a:srgbClr val="6F6F6F"/>
-                </a:solidFill>
-                <a:latin typeface="Noto Sans KR"/>
-                <a:ea typeface="Noto Sans KR"/>
-                <a:cs typeface="Noto Sans KR"/>
-              </a:rPr>
-              <a:t>시즐과 온도, 쓰는 장면과 먹는 순간. 제품이 놓일 실제 삶의 장면을 만들어 브랜드에 생활의 온도를 더합니다.</a:t>
-            </a:r>
-          </a:p>
-        </p:txBody>
-      </p:sp>
-      <p:sp>
-        <p:nvSpPr>
-          <p:cNvPr id="13" name="Rectangle 12"/>
-          <p:cNvSpPr/>
-          <p:nvPr/>
-        </p:nvSpPr>
-        <p:spPr>
-          <a:xfrm>
-            <a:off x="640080" y="4654296"/>
-            <a:ext cx="10911535" cy="11430"/>
-          </a:xfrm>
-          <a:prstGeom prst="rect">
-            <a:avLst/>
-          </a:prstGeom>
-          <a:solidFill>
-            <a:srgbClr val="E5E5E3"/>
-          </a:solidFill>
-          <a:ln>
-            <a:noFill/>
-          </a:ln>
-          <a:effectLst/>
-        </p:spPr>
-        <p:txBody>
-          <a:bodyPr rtlCol="0" anchor="ctr"/>
-          <a:lstStyle/>
-          <a:p>
-            <a:pPr algn="ctr"/>
-          </a:p>
-        </p:txBody>
-      </p:sp>
-      <p:sp>
-        <p:nvSpPr>
-          <p:cNvPr id="14" name="TextBox 13"/>
-          <p:cNvSpPr txBox="1"/>
-          <p:nvPr/>
-        </p:nvSpPr>
-        <p:spPr>
-          <a:xfrm>
-            <a:off x="640080" y="4928616"/>
-            <a:ext cx="822960" cy="365760"/>
-          </a:xfrm>
-          <a:prstGeom prst="rect">
-            <a:avLst/>
-          </a:prstGeom>
-          <a:noFill/>
-        </p:spPr>
-        <p:txBody>
-          <a:bodyPr wrap="square" anchor="t" lIns="0" rIns="0" tIns="0" bIns="0">
-            <a:spAutoFit/>
-          </a:bodyPr>
-          <a:lstStyle/>
-          <a:p>
-            <a:pPr algn="l"/>
-            <a:r>
-              <a:rPr sz="1100" b="0" spc="150">
-                <a:solidFill>
-                  <a:srgbClr val="A3A3A3"/>
-                </a:solidFill>
-                <a:latin typeface="Jost"/>
-                <a:ea typeface="Noto Sans KR"/>
-                <a:cs typeface="Noto Sans KR"/>
-              </a:rPr>
-              <a:t>03</a:t>
-            </a:r>
-          </a:p>
-        </p:txBody>
-      </p:sp>
-      <p:sp>
-        <p:nvSpPr>
-          <p:cNvPr id="15" name="TextBox 14"/>
-          <p:cNvSpPr txBox="1"/>
-          <p:nvPr/>
-        </p:nvSpPr>
-        <p:spPr>
-          <a:xfrm>
-            <a:off x="1645920" y="4855464"/>
-            <a:ext cx="4206240" cy="548640"/>
-          </a:xfrm>
-          <a:prstGeom prst="rect">
-            <a:avLst/>
-          </a:prstGeom>
-          <a:noFill/>
-        </p:spPr>
-        <p:txBody>
-          <a:bodyPr wrap="square" anchor="t" lIns="0" rIns="0" tIns="0" bIns="0">
-            <a:spAutoFit/>
-          </a:bodyPr>
-          <a:lstStyle/>
-          <a:p>
-            <a:pPr algn="l"/>
-            <a:r>
-              <a:rPr sz="1800" b="1">
-                <a:solidFill>
-                  <a:srgbClr val="0A0A0A"/>
-                </a:solidFill>
-                <a:latin typeface="Noto Sans KR"/>
-                <a:ea typeface="Noto Sans KR"/>
-                <a:cs typeface="Noto Sans KR"/>
-              </a:rPr>
-              <a:t>패션 &amp; 인물</a:t>
-            </a:r>
-          </a:p>
-        </p:txBody>
-      </p:sp>
-      <p:sp>
-        <p:nvSpPr>
-          <p:cNvPr id="16" name="TextBox 15"/>
-          <p:cNvSpPr txBox="1"/>
-          <p:nvPr/>
-        </p:nvSpPr>
-        <p:spPr>
-          <a:xfrm>
-            <a:off x="6217920" y="4910328"/>
-            <a:ext cx="5333695" cy="960120"/>
-          </a:xfrm>
-          <a:prstGeom prst="rect">
-            <a:avLst/>
-          </a:prstGeom>
-          <a:noFill/>
-        </p:spPr>
-        <p:txBody>
-          <a:bodyPr wrap="square" anchor="t" lIns="0" rIns="0" tIns="0" bIns="0">
-            <a:spAutoFit/>
-          </a:bodyPr>
-          <a:lstStyle/>
-          <a:p>
-            <a:pPr algn="l">
-              <a:lnSpc>
-                <a:spcPct val="150000"/>
-              </a:lnSpc>
-            </a:pPr>
-            <a:r>
-              <a:rPr sz="1100" b="0">
-                <a:solidFill>
-                  <a:srgbClr val="6F6F6F"/>
-                </a:solidFill>
-                <a:latin typeface="Noto Sans KR"/>
-                <a:ea typeface="Noto Sans KR"/>
-                <a:cs typeface="Noto Sans KR"/>
-              </a:rPr>
-              <a:t>시즌 룩북과 커머스 화보, 그리고 브랜드를 이끄는 사람들. 브랜드의 결을 인물과 착장으로 옮깁니다.</a:t>
-            </a:r>
-          </a:p>
-        </p:txBody>
-      </p:sp>
-      <p:sp>
-        <p:nvSpPr>
-          <p:cNvPr id="17" name="Rectangle 16"/>
-          <p:cNvSpPr/>
-          <p:nvPr/>
-        </p:nvSpPr>
-        <p:spPr>
-          <a:xfrm>
-            <a:off x="640080" y="5952744"/>
-            <a:ext cx="10911535" cy="11430"/>
-          </a:xfrm>
-          <a:prstGeom prst="rect">
-            <a:avLst/>
-          </a:prstGeom>
-          <a:solidFill>
-            <a:srgbClr val="E5E5E3"/>
-          </a:solidFill>
-          <a:ln>
-            <a:noFill/>
-          </a:ln>
-          <a:effectLst/>
-        </p:spPr>
-        <p:txBody>
-          <a:bodyPr rtlCol="0" anchor="ctr"/>
-          <a:lstStyle/>
-          <a:p>
-            <a:pPr algn="ctr"/>
-          </a:p>
-        </p:txBody>
-      </p:sp>
-      <p:sp>
-        <p:nvSpPr>
-          <p:cNvPr id="18" name="TextBox 17"/>
-          <p:cNvSpPr txBox="1"/>
-          <p:nvPr/>
-        </p:nvSpPr>
-        <p:spPr>
-          <a:xfrm>
-            <a:off x="640080" y="6473952"/>
-            <a:ext cx="3657600" cy="274320"/>
-          </a:xfrm>
-          <a:prstGeom prst="rect">
-            <a:avLst/>
-          </a:prstGeom>
-          <a:noFill/>
-        </p:spPr>
-        <p:txBody>
-          <a:bodyPr wrap="square" anchor="t" lIns="0" rIns="0" tIns="0" bIns="0">
-            <a:spAutoFit/>
-          </a:bodyPr>
-          <a:lstStyle/>
-          <a:p>
-            <a:pPr algn="l"/>
-            <a:r>
-              <a:rPr sz="800" b="0" spc="150">
-                <a:solidFill>
-                  <a:srgbClr val="A3A3A3"/>
-                </a:solidFill>
-                <a:latin typeface="Jost"/>
-                <a:ea typeface="Noto Sans KR"/>
-                <a:cs typeface="Noto Sans KR"/>
-              </a:rPr>
-              <a:t>STUDIO. HOLYMOLLY</a:t>
-            </a:r>
-          </a:p>
-        </p:txBody>
-      </p:sp>
-      <p:sp>
-        <p:nvSpPr>
-          <p:cNvPr id="19" name="TextBox 18"/>
-          <p:cNvSpPr txBox="1"/>
-          <p:nvPr/>
-        </p:nvSpPr>
-        <p:spPr>
-          <a:xfrm>
-            <a:off x="10637215" y="6473952"/>
-            <a:ext cx="914400" cy="274320"/>
-          </a:xfrm>
-          <a:prstGeom prst="rect">
-            <a:avLst/>
-          </a:prstGeom>
-          <a:noFill/>
-        </p:spPr>
-        <p:txBody>
-          <a:bodyPr wrap="square" anchor="t" lIns="0" rIns="0" tIns="0" bIns="0">
-            <a:spAutoFit/>
-          </a:bodyPr>
-          <a:lstStyle/>
-          <a:p>
             <a:pPr algn="r"/>
             <a:r>
-              <a:rPr sz="800" b="0" spc="150">
-                <a:solidFill>
-                  <a:srgbClr val="A3A3A3"/>
+              <a:rPr sz="900" b="0" spc="220">
+                <a:solidFill>
+                  <a:srgbClr val="8A8A8A"/>
                 </a:solidFill>
                 <a:latin typeface="Jost"/>
                 <a:ea typeface="Noto Sans KR"/>
@@ -8515,98 +7995,20 @@
       </p:sp>
       <p:sp>
         <p:nvSpPr>
-          <p:cNvPr id="3" name="TextBox 2"/>
-          <p:cNvSpPr txBox="1"/>
-          <p:nvPr/>
-        </p:nvSpPr>
-        <p:spPr>
-          <a:xfrm>
-            <a:off x="640080" y="502920"/>
-            <a:ext cx="7315200" cy="320040"/>
-          </a:xfrm>
-          <a:prstGeom prst="rect">
-            <a:avLst/>
-          </a:prstGeom>
-          <a:noFill/>
-        </p:spPr>
-        <p:txBody>
-          <a:bodyPr wrap="square" anchor="t" lIns="0" rIns="0" tIns="0" bIns="0">
-            <a:spAutoFit/>
-          </a:bodyPr>
-          <a:lstStyle/>
-          <a:p>
-            <a:pPr algn="l"/>
-            <a:r>
-              <a:rPr sz="1000" b="0" spc="200">
-                <a:solidFill>
-                  <a:srgbClr val="6F6F6F"/>
-                </a:solidFill>
-                <a:latin typeface="Jost"/>
-                <a:ea typeface="Noto Sans KR"/>
-                <a:cs typeface="Noto Sans KR"/>
-              </a:rPr>
-              <a:t>SERVICES — CONT.</a:t>
-            </a:r>
-          </a:p>
-        </p:txBody>
-      </p:sp>
-      <p:sp>
-        <p:nvSpPr>
-          <p:cNvPr id="4" name="TextBox 3"/>
-          <p:cNvSpPr txBox="1"/>
-          <p:nvPr/>
-        </p:nvSpPr>
-        <p:spPr>
-          <a:xfrm>
-            <a:off x="640080" y="914400"/>
-            <a:ext cx="10911535" cy="1188720"/>
-          </a:xfrm>
-          <a:prstGeom prst="rect">
-            <a:avLst/>
-          </a:prstGeom>
-          <a:noFill/>
-        </p:spPr>
-        <p:txBody>
-          <a:bodyPr wrap="square" anchor="t" lIns="0" rIns="0" tIns="0" bIns="0">
-            <a:spAutoFit/>
-          </a:bodyPr>
-          <a:lstStyle/>
-          <a:p>
-            <a:pPr algn="l">
-              <a:lnSpc>
-                <a:spcPct val="115000"/>
-              </a:lnSpc>
-            </a:pPr>
-            <a:r>
-              <a:rPr sz="2400" b="1">
-                <a:solidFill>
-                  <a:srgbClr val="0A0A0A"/>
-                </a:solidFill>
-                <a:latin typeface="Noto Sans KR"/>
-                <a:ea typeface="Noto Sans KR"/>
-                <a:cs typeface="Noto Sans KR"/>
-              </a:rPr>
-              <a:t>이런 작업을 함께합니다</a:t>
-            </a:r>
-          </a:p>
-        </p:txBody>
-      </p:sp>
-      <p:sp>
-        <p:nvSpPr>
-          <p:cNvPr id="5" name="Rectangle 4"/>
+          <p:cNvPr id="3" name="Rectangle 2"/>
           <p:cNvSpPr/>
           <p:nvPr/>
         </p:nvSpPr>
         <p:spPr>
           <a:xfrm>
-            <a:off x="640080" y="2057400"/>
-            <a:ext cx="10911535" cy="11430"/>
+            <a:off x="0" y="0"/>
+            <a:ext cx="12191695" cy="5943600"/>
           </a:xfrm>
           <a:prstGeom prst="rect">
             <a:avLst/>
           </a:prstGeom>
           <a:solidFill>
-            <a:srgbClr val="E5E5E3"/>
+            <a:srgbClr val="EFEFED"/>
           </a:solidFill>
           <a:ln>
             <a:noFill/>
@@ -8623,14 +8025,14 @@
       </p:sp>
       <p:sp>
         <p:nvSpPr>
-          <p:cNvPr id="6" name="TextBox 5"/>
+          <p:cNvPr id="4" name="TextBox 3"/>
           <p:cNvSpPr txBox="1"/>
           <p:nvPr/>
         </p:nvSpPr>
         <p:spPr>
           <a:xfrm>
-            <a:off x="640080" y="2331720"/>
-            <a:ext cx="822960" cy="365760"/>
+            <a:off x="0" y="0"/>
+            <a:ext cx="12191695" cy="5943600"/>
           </a:xfrm>
           <a:prstGeom prst="rect">
             <a:avLst/>
@@ -8638,14 +8040,18 @@
           <a:noFill/>
         </p:spPr>
         <p:txBody>
-          <a:bodyPr wrap="square" anchor="t" lIns="0" rIns="0" tIns="0" bIns="0">
+          <a:bodyPr wrap="square" anchor="ctr" lIns="0" rIns="0" tIns="0" bIns="0">
             <a:spAutoFit/>
           </a:bodyPr>
           <a:lstStyle/>
           <a:p>
-            <a:pPr algn="l"/>
-            <a:r>
-              <a:rPr sz="1100" b="0" spc="150">
+            <a:pPr algn="ctr">
+              <a:spcAft>
+                <a:spcPts val="400"/>
+              </a:spcAft>
+            </a:pPr>
+            <a:r>
+              <a:rPr sz="1000" b="0" spc="280">
                 <a:solidFill>
                   <a:srgbClr val="A3A3A3"/>
                 </a:solidFill>
@@ -8653,8 +8059,86 @@
                 <a:ea typeface="Noto Sans KR"/>
                 <a:cs typeface="Noto Sans KR"/>
               </a:rPr>
-              <a:t>04</a:t>
-            </a:r>
+              <a:t>IMAGE</a:t>
+            </a:r>
+          </a:p>
+          <a:p>
+            <a:pPr algn="ctr">
+              <a:spcAft>
+                <a:spcPts val="400"/>
+              </a:spcAft>
+            </a:pPr>
+            <a:r>
+              <a:rPr sz="950" b="0">
+                <a:solidFill>
+                  <a:srgbClr val="A3A3A3"/>
+                </a:solidFill>
+                <a:latin typeface="Noto Sans KR"/>
+                <a:ea typeface="Noto Sans KR"/>
+                <a:cs typeface="Noto Sans KR"/>
+              </a:rPr>
+              <a:t>뷰티 대표 컷으로 교체 (풀블리드)</a:t>
+            </a:r>
+          </a:p>
+        </p:txBody>
+      </p:sp>
+      <p:sp>
+        <p:nvSpPr>
+          <p:cNvPr id="5" name="Rectangle 4"/>
+          <p:cNvSpPr/>
+          <p:nvPr/>
+        </p:nvSpPr>
+        <p:spPr>
+          <a:xfrm>
+            <a:off x="0" y="5943600"/>
+            <a:ext cx="12191695" cy="914400"/>
+          </a:xfrm>
+          <a:prstGeom prst="rect">
+            <a:avLst/>
+          </a:prstGeom>
+          <a:solidFill>
+            <a:srgbClr val="FAFAF8"/>
+          </a:solidFill>
+          <a:ln>
+            <a:noFill/>
+          </a:ln>
+          <a:effectLst/>
+        </p:spPr>
+        <p:txBody>
+          <a:bodyPr rtlCol="0" anchor="ctr"/>
+          <a:lstStyle/>
+          <a:p>
+            <a:pPr algn="ctr"/>
+          </a:p>
+        </p:txBody>
+      </p:sp>
+      <p:sp>
+        <p:nvSpPr>
+          <p:cNvPr id="6" name="Rectangle 5"/>
+          <p:cNvSpPr/>
+          <p:nvPr/>
+        </p:nvSpPr>
+        <p:spPr>
+          <a:xfrm>
+            <a:off x="0" y="5943600"/>
+            <a:ext cx="12191695" cy="16510"/>
+          </a:xfrm>
+          <a:prstGeom prst="rect">
+            <a:avLst/>
+          </a:prstGeom>
+          <a:solidFill>
+            <a:srgbClr val="0A0A0A"/>
+          </a:solidFill>
+          <a:ln>
+            <a:noFill/>
+          </a:ln>
+          <a:effectLst/>
+        </p:spPr>
+        <p:txBody>
+          <a:bodyPr rtlCol="0" anchor="ctr"/>
+          <a:lstStyle/>
+          <a:p>
+            <a:pPr algn="ctr"/>
           </a:p>
         </p:txBody>
       </p:sp>
@@ -8666,45 +8150,8 @@
         </p:nvSpPr>
         <p:spPr>
           <a:xfrm>
-            <a:off x="1645920" y="2258568"/>
-            <a:ext cx="4206240" cy="548640"/>
-          </a:xfrm>
-          <a:prstGeom prst="rect">
-            <a:avLst/>
-          </a:prstGeom>
-          <a:noFill/>
-        </p:spPr>
-        <p:txBody>
-          <a:bodyPr wrap="square" anchor="t" lIns="0" rIns="0" tIns="0" bIns="0">
-            <a:spAutoFit/>
-          </a:bodyPr>
-          <a:lstStyle/>
-          <a:p>
-            <a:pPr algn="l"/>
-            <a:r>
-              <a:rPr sz="1800" b="1">
-                <a:solidFill>
-                  <a:srgbClr val="0A0A0A"/>
-                </a:solidFill>
-                <a:latin typeface="Noto Sans KR"/>
-                <a:ea typeface="Noto Sans KR"/>
-                <a:cs typeface="Noto Sans KR"/>
-              </a:rPr>
-              <a:t>영상</a:t>
-            </a:r>
-          </a:p>
-        </p:txBody>
-      </p:sp>
-      <p:sp>
-        <p:nvSpPr>
-          <p:cNvPr id="8" name="TextBox 7"/>
-          <p:cNvSpPr txBox="1"/>
-          <p:nvPr/>
-        </p:nvSpPr>
-        <p:spPr>
-          <a:xfrm>
-            <a:off x="6217920" y="2313432"/>
-            <a:ext cx="5333695" cy="960120"/>
+            <a:off x="603504" y="6126480"/>
+            <a:ext cx="5120640" cy="640080"/>
           </a:xfrm>
           <a:prstGeom prst="rect">
             <a:avLst/>
@@ -8723,144 +8170,17 @@
               </a:lnSpc>
             </a:pPr>
             <a:r>
-              <a:rPr sz="1100" b="0">
-                <a:solidFill>
-                  <a:srgbClr val="6F6F6F"/>
+              <a:rPr sz="1300" b="1">
+                <a:solidFill>
+                  <a:srgbClr val="0A0A0A"/>
                 </a:solidFill>
                 <a:latin typeface="Noto Sans KR"/>
                 <a:ea typeface="Noto Sans KR"/>
                 <a:cs typeface="Noto Sans KR"/>
               </a:rPr>
-              <a:t>브랜드 필름, 커머스 영상, 소셜 콘텐츠. 사진과 같은 무드를 무빙으로 확장해 채널 전체의 톤을 맞춥니다.</a:t>
-            </a:r>
-          </a:p>
-        </p:txBody>
-      </p:sp>
-      <p:sp>
-        <p:nvSpPr>
-          <p:cNvPr id="9" name="Rectangle 8"/>
-          <p:cNvSpPr/>
-          <p:nvPr/>
-        </p:nvSpPr>
-        <p:spPr>
-          <a:xfrm>
-            <a:off x="640080" y="3355848"/>
-            <a:ext cx="10911535" cy="11430"/>
-          </a:xfrm>
-          <a:prstGeom prst="rect">
-            <a:avLst/>
-          </a:prstGeom>
-          <a:solidFill>
-            <a:srgbClr val="E5E5E3"/>
-          </a:solidFill>
-          <a:ln>
-            <a:noFill/>
-          </a:ln>
-          <a:effectLst/>
-        </p:spPr>
-        <p:txBody>
-          <a:bodyPr rtlCol="0" anchor="ctr"/>
-          <a:lstStyle/>
-          <a:p>
-            <a:pPr algn="ctr"/>
-          </a:p>
-        </p:txBody>
-      </p:sp>
-      <p:sp>
-        <p:nvSpPr>
-          <p:cNvPr id="10" name="TextBox 9"/>
-          <p:cNvSpPr txBox="1"/>
-          <p:nvPr/>
-        </p:nvSpPr>
-        <p:spPr>
-          <a:xfrm>
-            <a:off x="640080" y="3630168"/>
-            <a:ext cx="822960" cy="365760"/>
-          </a:xfrm>
-          <a:prstGeom prst="rect">
-            <a:avLst/>
-          </a:prstGeom>
-          <a:noFill/>
-        </p:spPr>
-        <p:txBody>
-          <a:bodyPr wrap="square" anchor="t" lIns="0" rIns="0" tIns="0" bIns="0">
-            <a:spAutoFit/>
-          </a:bodyPr>
-          <a:lstStyle/>
-          <a:p>
-            <a:pPr algn="l"/>
-            <a:r>
-              <a:rPr sz="1100" b="0" spc="150">
-                <a:solidFill>
-                  <a:srgbClr val="A3A3A3"/>
-                </a:solidFill>
-                <a:latin typeface="Jost"/>
-                <a:ea typeface="Noto Sans KR"/>
-                <a:cs typeface="Noto Sans KR"/>
-              </a:rPr>
-              <a:t>05</a:t>
-            </a:r>
-          </a:p>
-        </p:txBody>
-      </p:sp>
-      <p:sp>
-        <p:nvSpPr>
-          <p:cNvPr id="11" name="TextBox 10"/>
-          <p:cNvSpPr txBox="1"/>
-          <p:nvPr/>
-        </p:nvSpPr>
-        <p:spPr>
-          <a:xfrm>
-            <a:off x="1645920" y="3557016"/>
-            <a:ext cx="4206240" cy="548640"/>
-          </a:xfrm>
-          <a:prstGeom prst="rect">
-            <a:avLst/>
-          </a:prstGeom>
-          <a:noFill/>
-        </p:spPr>
-        <p:txBody>
-          <a:bodyPr wrap="square" anchor="t" lIns="0" rIns="0" tIns="0" bIns="0">
-            <a:spAutoFit/>
-          </a:bodyPr>
-          <a:lstStyle/>
-          <a:p>
-            <a:pPr algn="l"/>
-            <a:r>
-              <a:rPr sz="1800" b="1">
-                <a:solidFill>
-                  <a:srgbClr val="0A0A0A"/>
-                </a:solidFill>
-                <a:latin typeface="Noto Sans KR"/>
-                <a:ea typeface="Noto Sans KR"/>
-                <a:cs typeface="Noto Sans KR"/>
-              </a:rPr>
-              <a:t>BX 디자인</a:t>
-            </a:r>
-          </a:p>
-        </p:txBody>
-      </p:sp>
-      <p:sp>
-        <p:nvSpPr>
-          <p:cNvPr id="12" name="TextBox 11"/>
-          <p:cNvSpPr txBox="1"/>
-          <p:nvPr/>
-        </p:nvSpPr>
-        <p:spPr>
-          <a:xfrm>
-            <a:off x="6217920" y="3611880"/>
-            <a:ext cx="5333695" cy="960120"/>
-          </a:xfrm>
-          <a:prstGeom prst="rect">
-            <a:avLst/>
-          </a:prstGeom>
-          <a:noFill/>
-        </p:spPr>
-        <p:txBody>
-          <a:bodyPr wrap="square" anchor="t" lIns="0" rIns="0" tIns="0" bIns="0">
-            <a:spAutoFit/>
-          </a:bodyPr>
-          <a:lstStyle/>
+              <a:t>[클라이언트/브랜드명] — [프로젝트명]</a:t>
+            </a:r>
+          </a:p>
           <a:p>
             <a:pPr algn="l">
               <a:lnSpc>
@@ -8868,7 +8188,7 @@
               </a:lnSpc>
             </a:pPr>
             <a:r>
-              <a:rPr sz="1100" b="0">
+              <a:rPr sz="850" b="0" spc="80">
                 <a:solidFill>
                   <a:srgbClr val="6F6F6F"/>
                 </a:solidFill>
@@ -8876,51 +8196,21 @@
                 <a:ea typeface="Noto Sans KR"/>
                 <a:cs typeface="Noto Sans KR"/>
               </a:rPr>
-              <a:t>촬영을 넘어 브랜드 경험을 설계합니다. 비주얼 아이덴티티부터 콘텐츠 시스템까지, 장면이 브랜드가 되도록.</a:t>
-            </a:r>
-          </a:p>
-        </p:txBody>
-      </p:sp>
-      <p:sp>
-        <p:nvSpPr>
-          <p:cNvPr id="13" name="Rectangle 12"/>
-          <p:cNvSpPr/>
-          <p:nvPr/>
-        </p:nvSpPr>
-        <p:spPr>
-          <a:xfrm>
-            <a:off x="640080" y="4654296"/>
-            <a:ext cx="10911535" cy="11430"/>
-          </a:xfrm>
-          <a:prstGeom prst="rect">
-            <a:avLst/>
-          </a:prstGeom>
-          <a:solidFill>
-            <a:srgbClr val="E5E5E3"/>
-          </a:solidFill>
-          <a:ln>
-            <a:noFill/>
-          </a:ln>
-          <a:effectLst/>
-        </p:spPr>
-        <p:txBody>
-          <a:bodyPr rtlCol="0" anchor="ctr"/>
-          <a:lstStyle/>
-          <a:p>
-            <a:pPr algn="ctr"/>
-          </a:p>
-        </p:txBody>
-      </p:sp>
-      <p:sp>
-        <p:nvSpPr>
-          <p:cNvPr id="14" name="TextBox 13"/>
+              <a:t>SCOPE — 기획 · 촬영 · 리터칭 (해당 항목만)</a:t>
+            </a:r>
+          </a:p>
+        </p:txBody>
+      </p:sp>
+      <p:sp>
+        <p:nvSpPr>
+          <p:cNvPr id="8" name="TextBox 7"/>
           <p:cNvSpPr txBox="1"/>
           <p:nvPr/>
         </p:nvSpPr>
         <p:spPr>
           <a:xfrm>
-            <a:off x="640080" y="5120640"/>
-            <a:ext cx="10911535" cy="731520"/>
+            <a:off x="6035040" y="6163056"/>
+            <a:ext cx="4206240" cy="548640"/>
           </a:xfrm>
           <a:prstGeom prst="rect">
             <a:avLst/>
@@ -8933,9 +8223,13 @@
           </a:bodyPr>
           <a:lstStyle/>
           <a:p>
-            <a:pPr algn="l"/>
-            <a:r>
-              <a:rPr sz="1200" b="0">
+            <a:pPr algn="l">
+              <a:lnSpc>
+                <a:spcPct val="145000"/>
+              </a:lnSpc>
+            </a:pPr>
+            <a:r>
+              <a:rPr sz="950" b="0">
                 <a:solidFill>
                   <a:srgbClr val="6F6F6F"/>
                 </a:solidFill>
@@ -8943,21 +8237,21 @@
                 <a:ea typeface="Noto Sans KR"/>
                 <a:cs typeface="Noto Sans KR"/>
               </a:rPr>
-              <a:t>사진 · 영상 · 디자인을 한 팀이 진행하면, 채널 전체가 하나의 무드로 이어집니다.</a:t>
-            </a:r>
-          </a:p>
-        </p:txBody>
-      </p:sp>
-      <p:sp>
-        <p:nvSpPr>
-          <p:cNvPr id="15" name="TextBox 14"/>
+              <a:t>[한 줄 요약 — 무엇을 해결했는지]</a:t>
+            </a:r>
+          </a:p>
+        </p:txBody>
+      </p:sp>
+      <p:sp>
+        <p:nvSpPr>
+          <p:cNvPr id="9" name="TextBox 8"/>
           <p:cNvSpPr txBox="1"/>
           <p:nvPr/>
         </p:nvSpPr>
         <p:spPr>
           <a:xfrm>
-            <a:off x="640080" y="6473952"/>
-            <a:ext cx="3657600" cy="274320"/>
+            <a:off x="9942271" y="6163056"/>
+            <a:ext cx="1645920" cy="274320"/>
           </a:xfrm>
           <a:prstGeom prst="rect">
             <a:avLst/>
@@ -8970,9 +8264,9 @@
           </a:bodyPr>
           <a:lstStyle/>
           <a:p>
-            <a:pPr algn="l"/>
-            <a:r>
-              <a:rPr sz="800" b="0" spc="150">
+            <a:pPr algn="r"/>
+            <a:r>
+              <a:rPr sz="850" b="0" spc="150">
                 <a:solidFill>
                   <a:srgbClr val="A3A3A3"/>
                 </a:solidFill>
@@ -8980,44 +8274,7 @@
                 <a:ea typeface="Noto Sans KR"/>
                 <a:cs typeface="Noto Sans KR"/>
               </a:rPr>
-              <a:t>STUDIO. HOLYMOLLY</a:t>
-            </a:r>
-          </a:p>
-        </p:txBody>
-      </p:sp>
-      <p:sp>
-        <p:nvSpPr>
-          <p:cNvPr id="16" name="TextBox 15"/>
-          <p:cNvSpPr txBox="1"/>
-          <p:nvPr/>
-        </p:nvSpPr>
-        <p:spPr>
-          <a:xfrm>
-            <a:off x="10637215" y="6473952"/>
-            <a:ext cx="914400" cy="274320"/>
-          </a:xfrm>
-          <a:prstGeom prst="rect">
-            <a:avLst/>
-          </a:prstGeom>
-          <a:noFill/>
-        </p:spPr>
-        <p:txBody>
-          <a:bodyPr wrap="square" anchor="t" lIns="0" rIns="0" tIns="0" bIns="0">
-            <a:spAutoFit/>
-          </a:bodyPr>
-          <a:lstStyle/>
-          <a:p>
-            <a:pPr algn="r"/>
-            <a:r>
-              <a:rPr sz="800" b="0" spc="150">
-                <a:solidFill>
-                  <a:srgbClr val="A3A3A3"/>
-                </a:solidFill>
-                <a:latin typeface="Jost"/>
-                <a:ea typeface="Noto Sans KR"/>
-                <a:cs typeface="Noto Sans KR"/>
-              </a:rPr>
-              <a:t>06</a:t>
+              <a:t>CASE 01 — 06</a:t>
             </a:r>
           </a:p>
         </p:txBody>
@@ -9055,7 +8312,7 @@
             <a:avLst/>
           </a:prstGeom>
           <a:solidFill>
-            <a:srgbClr val="111111"/>
+            <a:srgbClr val="FAFAF8"/>
           </a:solidFill>
           <a:ln>
             <a:noFill/>
@@ -9072,14 +8329,44 @@
       </p:sp>
       <p:sp>
         <p:nvSpPr>
-          <p:cNvPr id="3" name="TextBox 2"/>
+          <p:cNvPr id="3" name="Rectangle 2"/>
+          <p:cNvSpPr/>
+          <p:nvPr/>
+        </p:nvSpPr>
+        <p:spPr>
+          <a:xfrm>
+            <a:off x="0" y="0"/>
+            <a:ext cx="12191695" cy="5943600"/>
+          </a:xfrm>
+          <a:prstGeom prst="rect">
+            <a:avLst/>
+          </a:prstGeom>
+          <a:solidFill>
+            <a:srgbClr val="EFEFED"/>
+          </a:solidFill>
+          <a:ln>
+            <a:noFill/>
+          </a:ln>
+          <a:effectLst/>
+        </p:spPr>
+        <p:txBody>
+          <a:bodyPr rtlCol="0" anchor="ctr"/>
+          <a:lstStyle/>
+          <a:p>
+            <a:pPr algn="ctr"/>
+          </a:p>
+        </p:txBody>
+      </p:sp>
+      <p:sp>
+        <p:nvSpPr>
+          <p:cNvPr id="4" name="TextBox 3"/>
           <p:cNvSpPr txBox="1"/>
           <p:nvPr/>
         </p:nvSpPr>
         <p:spPr>
           <a:xfrm>
-            <a:off x="640080" y="502920"/>
-            <a:ext cx="7315200" cy="320040"/>
+            <a:off x="0" y="0"/>
+            <a:ext cx="12191695" cy="5943600"/>
           </a:xfrm>
           <a:prstGeom prst="rect">
             <a:avLst/>
@@ -9087,95 +8374,118 @@
           <a:noFill/>
         </p:spPr>
         <p:txBody>
-          <a:bodyPr wrap="square" anchor="t" lIns="0" rIns="0" tIns="0" bIns="0">
+          <a:bodyPr wrap="square" anchor="ctr" lIns="0" rIns="0" tIns="0" bIns="0">
             <a:spAutoFit/>
           </a:bodyPr>
           <a:lstStyle/>
           <a:p>
-            <a:pPr algn="l"/>
-            <a:r>
-              <a:rPr sz="1000" b="0" spc="200">
-                <a:solidFill>
-                  <a:srgbClr val="8A8A8A"/>
+            <a:pPr algn="ctr">
+              <a:spcAft>
+                <a:spcPts val="400"/>
+              </a:spcAft>
+            </a:pPr>
+            <a:r>
+              <a:rPr sz="1000" b="0" spc="280">
+                <a:solidFill>
+                  <a:srgbClr val="A3A3A3"/>
                 </a:solidFill>
                 <a:latin typeface="Jost"/>
                 <a:ea typeface="Noto Sans KR"/>
                 <a:cs typeface="Noto Sans KR"/>
               </a:rPr>
-              <a:t>SELECTED WORKS</a:t>
-            </a:r>
-          </a:p>
-        </p:txBody>
-      </p:sp>
-      <p:sp>
-        <p:nvSpPr>
-          <p:cNvPr id="4" name="TextBox 3"/>
+              <a:t>IMAGE</a:t>
+            </a:r>
+          </a:p>
+          <a:p>
+            <a:pPr algn="ctr">
+              <a:spcAft>
+                <a:spcPts val="400"/>
+              </a:spcAft>
+            </a:pPr>
+            <a:r>
+              <a:rPr sz="950" b="0">
+                <a:solidFill>
+                  <a:srgbClr val="A3A3A3"/>
+                </a:solidFill>
+                <a:latin typeface="Noto Sans KR"/>
+                <a:ea typeface="Noto Sans KR"/>
+                <a:cs typeface="Noto Sans KR"/>
+              </a:rPr>
+              <a:t>제품 / 커머스 대표 컷으로 교체 (풀블리드)</a:t>
+            </a:r>
+          </a:p>
+        </p:txBody>
+      </p:sp>
+      <p:sp>
+        <p:nvSpPr>
+          <p:cNvPr id="5" name="Rectangle 4"/>
+          <p:cNvSpPr/>
+          <p:nvPr/>
+        </p:nvSpPr>
+        <p:spPr>
+          <a:xfrm>
+            <a:off x="0" y="5943600"/>
+            <a:ext cx="12191695" cy="914400"/>
+          </a:xfrm>
+          <a:prstGeom prst="rect">
+            <a:avLst/>
+          </a:prstGeom>
+          <a:solidFill>
+            <a:srgbClr val="FAFAF8"/>
+          </a:solidFill>
+          <a:ln>
+            <a:noFill/>
+          </a:ln>
+          <a:effectLst/>
+        </p:spPr>
+        <p:txBody>
+          <a:bodyPr rtlCol="0" anchor="ctr"/>
+          <a:lstStyle/>
+          <a:p>
+            <a:pPr algn="ctr"/>
+          </a:p>
+        </p:txBody>
+      </p:sp>
+      <p:sp>
+        <p:nvSpPr>
+          <p:cNvPr id="6" name="Rectangle 5"/>
+          <p:cNvSpPr/>
+          <p:nvPr/>
+        </p:nvSpPr>
+        <p:spPr>
+          <a:xfrm>
+            <a:off x="0" y="5943600"/>
+            <a:ext cx="12191695" cy="16510"/>
+          </a:xfrm>
+          <a:prstGeom prst="rect">
+            <a:avLst/>
+          </a:prstGeom>
+          <a:solidFill>
+            <a:srgbClr val="0A0A0A"/>
+          </a:solidFill>
+          <a:ln>
+            <a:noFill/>
+          </a:ln>
+          <a:effectLst/>
+        </p:spPr>
+        <p:txBody>
+          <a:bodyPr rtlCol="0" anchor="ctr"/>
+          <a:lstStyle/>
+          <a:p>
+            <a:pPr algn="ctr"/>
+          </a:p>
+        </p:txBody>
+      </p:sp>
+      <p:sp>
+        <p:nvSpPr>
+          <p:cNvPr id="7" name="TextBox 6"/>
           <p:cNvSpPr txBox="1"/>
           <p:nvPr/>
         </p:nvSpPr>
         <p:spPr>
           <a:xfrm>
-            <a:off x="640080" y="1554480"/>
-            <a:ext cx="10911535" cy="1828800"/>
-          </a:xfrm>
-          <a:prstGeom prst="rect">
-            <a:avLst/>
-          </a:prstGeom>
-          <a:noFill/>
-        </p:spPr>
-        <p:txBody>
-          <a:bodyPr wrap="square" anchor="t" lIns="0" rIns="0" tIns="0" bIns="0">
-            <a:spAutoFit/>
-          </a:bodyPr>
-          <a:lstStyle/>
-          <a:p>
-            <a:pPr algn="l">
-              <a:lnSpc>
-                <a:spcPct val="130000"/>
-              </a:lnSpc>
-            </a:pPr>
-            <a:r>
-              <a:rPr sz="3000" b="1">
-                <a:solidFill>
-                  <a:srgbClr val="FAFAF8"/>
-                </a:solidFill>
-                <a:latin typeface="Noto Sans KR"/>
-                <a:ea typeface="Noto Sans KR"/>
-                <a:cs typeface="Noto Sans KR"/>
-              </a:rPr>
-              <a:t>말보다 컷이 빠릅니다.</a:t>
-            </a:r>
-          </a:p>
-          <a:p>
-            <a:pPr algn="l">
-              <a:lnSpc>
-                <a:spcPct val="130000"/>
-              </a:lnSpc>
-            </a:pPr>
-            <a:r>
-              <a:rPr sz="3000" b="1">
-                <a:solidFill>
-                  <a:srgbClr val="FAFAF8"/>
-                </a:solidFill>
-                <a:latin typeface="Noto Sans KR"/>
-                <a:ea typeface="Noto Sans KR"/>
-                <a:cs typeface="Noto Sans KR"/>
-              </a:rPr>
-              <a:t>작업물은 여기서 보세요.</a:t>
-            </a:r>
-          </a:p>
-        </p:txBody>
-      </p:sp>
-      <p:sp>
-        <p:nvSpPr>
-          <p:cNvPr id="5" name="TextBox 4"/>
-          <p:cNvSpPr txBox="1"/>
-          <p:nvPr/>
-        </p:nvSpPr>
-        <p:spPr>
-          <a:xfrm>
-            <a:off x="640080" y="3429000"/>
-            <a:ext cx="7772400" cy="731520"/>
+            <a:off x="603504" y="6126480"/>
+            <a:ext cx="5120640" cy="640080"/>
           </a:xfrm>
           <a:prstGeom prst="rect">
             <a:avLst/>
@@ -9194,131 +8504,33 @@
               </a:lnSpc>
             </a:pPr>
             <a:r>
-              <a:rPr sz="1150" b="0">
-                <a:solidFill>
-                  <a:srgbClr val="909090"/>
+              <a:rPr sz="1300" b="1">
+                <a:solidFill>
+                  <a:srgbClr val="0A0A0A"/>
                 </a:solidFill>
                 <a:latin typeface="Noto Sans KR"/>
                 <a:ea typeface="Noto Sans KR"/>
                 <a:cs typeface="Noto Sans KR"/>
               </a:rPr>
-              <a:t>카테고리별 작업물과 최근 프로젝트는 포트폴리오 사이트와 SNS 채널에 계속 업데이트하고 있습니다.</a:t>
-            </a:r>
-          </a:p>
-        </p:txBody>
-      </p:sp>
-      <p:sp>
-        <p:nvSpPr>
-          <p:cNvPr id="6" name="Rectangle 5"/>
-          <p:cNvSpPr/>
-          <p:nvPr/>
-        </p:nvSpPr>
-        <p:spPr>
-          <a:xfrm>
-            <a:off x="640080" y="4343400"/>
-            <a:ext cx="10911535" cy="11430"/>
-          </a:xfrm>
-          <a:prstGeom prst="rect">
-            <a:avLst/>
-          </a:prstGeom>
-          <a:solidFill>
-            <a:srgbClr val="2E2E2E"/>
-          </a:solidFill>
-          <a:ln>
-            <a:noFill/>
-          </a:ln>
-          <a:effectLst/>
-        </p:spPr>
-        <p:txBody>
-          <a:bodyPr rtlCol="0" anchor="ctr"/>
-          <a:lstStyle/>
-          <a:p>
-            <a:pPr algn="ctr"/>
-          </a:p>
-        </p:txBody>
-      </p:sp>
-      <p:sp>
-        <p:nvSpPr>
-          <p:cNvPr id="7" name="TextBox 6"/>
-          <p:cNvSpPr txBox="1"/>
-          <p:nvPr/>
-        </p:nvSpPr>
-        <p:spPr>
-          <a:xfrm>
-            <a:off x="640080" y="4709160"/>
-            <a:ext cx="3271418" cy="1463040"/>
-          </a:xfrm>
-          <a:prstGeom prst="rect">
-            <a:avLst/>
-          </a:prstGeom>
-          <a:noFill/>
-        </p:spPr>
-        <p:txBody>
-          <a:bodyPr wrap="square" anchor="t" lIns="0" rIns="0" tIns="0" bIns="0">
-            <a:spAutoFit/>
-          </a:bodyPr>
-          <a:lstStyle/>
+              <a:t>[클라이언트/브랜드명] — [프로젝트명]</a:t>
+            </a:r>
+          </a:p>
           <a:p>
             <a:pPr algn="l">
               <a:lnSpc>
                 <a:spcPct val="150000"/>
               </a:lnSpc>
-              <a:spcAft>
-                <a:spcPts val="400"/>
-              </a:spcAft>
             </a:pPr>
             <a:r>
-              <a:rPr sz="1000" b="0" spc="150">
+              <a:rPr sz="850" b="0" spc="80">
                 <a:solidFill>
                   <a:srgbClr val="6F6F6F"/>
                 </a:solidFill>
-                <a:latin typeface="Jost"/>
-                <a:ea typeface="Noto Sans KR"/>
-                <a:cs typeface="Noto Sans KR"/>
-              </a:rPr>
-              <a:t>01</a:t>
-            </a:r>
-          </a:p>
-          <a:p>
-            <a:pPr algn="l">
-              <a:lnSpc>
-                <a:spcPct val="150000"/>
-              </a:lnSpc>
-              <a:spcAft>
-                <a:spcPts val="400"/>
-              </a:spcAft>
-            </a:pPr>
-            <a:r>
-              <a:rPr sz="1500" b="1">
-                <a:solidFill>
-                  <a:srgbClr val="FAFAF8"/>
-                </a:solidFill>
-                <a:latin typeface="Jost"/>
-                <a:ea typeface="Noto Sans KR"/>
-                <a:cs typeface="Noto Sans KR"/>
-              </a:rPr>
-              <a:t>Portfolio</a:t>
-            </a:r>
-          </a:p>
-          <a:p>
-            <a:pPr algn="l">
-              <a:lnSpc>
-                <a:spcPct val="150000"/>
-              </a:lnSpc>
-              <a:spcAft>
-                <a:spcPts val="400"/>
-              </a:spcAft>
-            </a:pPr>
-            <a:r>
-              <a:rPr sz="1000" b="0">
-                <a:solidFill>
-                  <a:srgbClr val="909090"/>
-                </a:solidFill>
                 <a:latin typeface="Noto Sans KR"/>
                 <a:ea typeface="Noto Sans KR"/>
                 <a:cs typeface="Noto Sans KR"/>
               </a:rPr>
-              <a:t>studioholymolly.myportfolio.com</a:t>
+              <a:t>SCOPE — 기획 · 촬영 · 리터칭 (해당 항목만)</a:t>
             </a:r>
           </a:p>
         </p:txBody>
@@ -9331,8 +8543,8 @@
         </p:nvSpPr>
         <p:spPr>
           <a:xfrm>
-            <a:off x="4277258" y="4709160"/>
-            <a:ext cx="3271418" cy="1463040"/>
+            <a:off x="6035040" y="6163056"/>
+            <a:ext cx="4206240" cy="548640"/>
           </a:xfrm>
           <a:prstGeom prst="rect">
             <a:avLst/>
@@ -9347,64 +8559,19 @@
           <a:p>
             <a:pPr algn="l">
               <a:lnSpc>
-                <a:spcPct val="150000"/>
+                <a:spcPct val="145000"/>
               </a:lnSpc>
-              <a:spcAft>
-                <a:spcPts val="400"/>
-              </a:spcAft>
             </a:pPr>
             <a:r>
-              <a:rPr sz="1000" b="0" spc="150">
+              <a:rPr sz="950" b="0">
                 <a:solidFill>
                   <a:srgbClr val="6F6F6F"/>
                 </a:solidFill>
-                <a:latin typeface="Jost"/>
-                <a:ea typeface="Noto Sans KR"/>
-                <a:cs typeface="Noto Sans KR"/>
-              </a:rPr>
-              <a:t>02</a:t>
-            </a:r>
-          </a:p>
-          <a:p>
-            <a:pPr algn="l">
-              <a:lnSpc>
-                <a:spcPct val="150000"/>
-              </a:lnSpc>
-              <a:spcAft>
-                <a:spcPts val="400"/>
-              </a:spcAft>
-            </a:pPr>
-            <a:r>
-              <a:rPr sz="1500" b="1">
-                <a:solidFill>
-                  <a:srgbClr val="FAFAF8"/>
-                </a:solidFill>
-                <a:latin typeface="Jost"/>
-                <a:ea typeface="Noto Sans KR"/>
-                <a:cs typeface="Noto Sans KR"/>
-              </a:rPr>
-              <a:t>Instagram</a:t>
-            </a:r>
-          </a:p>
-          <a:p>
-            <a:pPr algn="l">
-              <a:lnSpc>
-                <a:spcPct val="150000"/>
-              </a:lnSpc>
-              <a:spcAft>
-                <a:spcPts val="400"/>
-              </a:spcAft>
-            </a:pPr>
-            <a:r>
-              <a:rPr sz="1000" b="0">
-                <a:solidFill>
-                  <a:srgbClr val="909090"/>
-                </a:solidFill>
                 <a:latin typeface="Noto Sans KR"/>
                 <a:ea typeface="Noto Sans KR"/>
                 <a:cs typeface="Noto Sans KR"/>
               </a:rPr>
-              <a:t>@studio_holymolly — 최근 작업과 현장 컷</a:t>
+              <a:t>[한 줄 요약 — 무엇을 해결했는지]</a:t>
             </a:r>
           </a:p>
         </p:txBody>
@@ -9417,8 +8584,8 @@
         </p:nvSpPr>
         <p:spPr>
           <a:xfrm>
-            <a:off x="7914436" y="4709160"/>
-            <a:ext cx="3271418" cy="1463040"/>
+            <a:off x="9942271" y="6163056"/>
+            <a:ext cx="1645920" cy="274320"/>
           </a:xfrm>
           <a:prstGeom prst="rect">
             <a:avLst/>
@@ -9431,140 +8598,17 @@
           </a:bodyPr>
           <a:lstStyle/>
           <a:p>
-            <a:pPr algn="l">
-              <a:lnSpc>
-                <a:spcPct val="150000"/>
-              </a:lnSpc>
-              <a:spcAft>
-                <a:spcPts val="400"/>
-              </a:spcAft>
-            </a:pPr>
-            <a:r>
-              <a:rPr sz="1000" b="0" spc="150">
-                <a:solidFill>
-                  <a:srgbClr val="6F6F6F"/>
+            <a:pPr algn="r"/>
+            <a:r>
+              <a:rPr sz="850" b="0" spc="150">
+                <a:solidFill>
+                  <a:srgbClr val="A3A3A3"/>
                 </a:solidFill>
                 <a:latin typeface="Jost"/>
                 <a:ea typeface="Noto Sans KR"/>
                 <a:cs typeface="Noto Sans KR"/>
               </a:rPr>
-              <a:t>03</a:t>
-            </a:r>
-          </a:p>
-          <a:p>
-            <a:pPr algn="l">
-              <a:lnSpc>
-                <a:spcPct val="150000"/>
-              </a:lnSpc>
-              <a:spcAft>
-                <a:spcPts val="400"/>
-              </a:spcAft>
-            </a:pPr>
-            <a:r>
-              <a:rPr sz="1500" b="1">
-                <a:solidFill>
-                  <a:srgbClr val="FAFAF8"/>
-                </a:solidFill>
-                <a:latin typeface="Jost"/>
-                <a:ea typeface="Noto Sans KR"/>
-                <a:cs typeface="Noto Sans KR"/>
-              </a:rPr>
-              <a:t>Threads</a:t>
-            </a:r>
-          </a:p>
-          <a:p>
-            <a:pPr algn="l">
-              <a:lnSpc>
-                <a:spcPct val="150000"/>
-              </a:lnSpc>
-              <a:spcAft>
-                <a:spcPts val="400"/>
-              </a:spcAft>
-            </a:pPr>
-            <a:r>
-              <a:rPr sz="1000" b="0">
-                <a:solidFill>
-                  <a:srgbClr val="909090"/>
-                </a:solidFill>
-                <a:latin typeface="Noto Sans KR"/>
-                <a:ea typeface="Noto Sans KR"/>
-                <a:cs typeface="Noto Sans KR"/>
-              </a:rPr>
-              <a:t>@studio_holymolly — 보정 전 원본 컷까지 공개</a:t>
-            </a:r>
-          </a:p>
-        </p:txBody>
-      </p:sp>
-      <p:sp>
-        <p:nvSpPr>
-          <p:cNvPr id="10" name="TextBox 9"/>
-          <p:cNvSpPr txBox="1"/>
-          <p:nvPr/>
-        </p:nvSpPr>
-        <p:spPr>
-          <a:xfrm>
-            <a:off x="640080" y="6473952"/>
-            <a:ext cx="3657600" cy="274320"/>
-          </a:xfrm>
-          <a:prstGeom prst="rect">
-            <a:avLst/>
-          </a:prstGeom>
-          <a:noFill/>
-        </p:spPr>
-        <p:txBody>
-          <a:bodyPr wrap="square" anchor="t" lIns="0" rIns="0" tIns="0" bIns="0">
-            <a:spAutoFit/>
-          </a:bodyPr>
-          <a:lstStyle/>
-          <a:p>
-            <a:pPr algn="l"/>
-            <a:r>
-              <a:rPr sz="800" b="0" spc="150">
-                <a:solidFill>
-                  <a:srgbClr val="6F6F6F"/>
-                </a:solidFill>
-                <a:latin typeface="Jost"/>
-                <a:ea typeface="Noto Sans KR"/>
-                <a:cs typeface="Noto Sans KR"/>
-              </a:rPr>
-              <a:t>STUDIO. HOLYMOLLY</a:t>
-            </a:r>
-          </a:p>
-        </p:txBody>
-      </p:sp>
-      <p:sp>
-        <p:nvSpPr>
-          <p:cNvPr id="11" name="TextBox 10"/>
-          <p:cNvSpPr txBox="1"/>
-          <p:nvPr/>
-        </p:nvSpPr>
-        <p:spPr>
-          <a:xfrm>
-            <a:off x="10637215" y="6473952"/>
-            <a:ext cx="914400" cy="274320"/>
-          </a:xfrm>
-          <a:prstGeom prst="rect">
-            <a:avLst/>
-          </a:prstGeom>
-          <a:noFill/>
-        </p:spPr>
-        <p:txBody>
-          <a:bodyPr wrap="square" anchor="t" lIns="0" rIns="0" tIns="0" bIns="0">
-            <a:spAutoFit/>
-          </a:bodyPr>
-          <a:lstStyle/>
-          <a:p>
-            <a:pPr algn="r"/>
-            <a:r>
-              <a:rPr sz="800" b="0" spc="150">
-                <a:solidFill>
-                  <a:srgbClr val="6F6F6F"/>
-                </a:solidFill>
-                <a:latin typeface="Jost"/>
-                <a:ea typeface="Noto Sans KR"/>
-                <a:cs typeface="Noto Sans KR"/>
-              </a:rPr>
-              <a:t>07</a:t>
+              <a:t>CASE 02 — 07</a:t>
             </a:r>
           </a:p>
         </p:txBody>
@@ -9619,62 +8663,23 @@
       </p:sp>
       <p:sp>
         <p:nvSpPr>
-          <p:cNvPr id="3" name="TextBox 2"/>
-          <p:cNvSpPr txBox="1"/>
-          <p:nvPr/>
-        </p:nvSpPr>
-        <p:spPr>
-          <a:xfrm>
-            <a:off x="640080" y="502920"/>
-            <a:ext cx="7315200" cy="320040"/>
-          </a:xfrm>
-          <a:prstGeom prst="rect">
-            <a:avLst/>
-          </a:prstGeom>
-          <a:noFill/>
-        </p:spPr>
-        <p:txBody>
-          <a:bodyPr wrap="square" anchor="t" lIns="0" rIns="0" tIns="0" bIns="0">
-            <a:spAutoFit/>
-          </a:bodyPr>
-          <a:lstStyle/>
-          <a:p>
-            <a:pPr algn="l"/>
-            <a:r>
-              <a:rPr sz="1000" b="0" spc="200">
-                <a:solidFill>
-                  <a:srgbClr val="6F6F6F"/>
-                </a:solidFill>
-                <a:latin typeface="Jost"/>
-                <a:ea typeface="Noto Sans KR"/>
-                <a:cs typeface="Noto Sans KR"/>
-              </a:rPr>
-              <a:t>SELECTED WORKS — CASE 01</a:t>
-            </a:r>
-          </a:p>
-        </p:txBody>
-      </p:sp>
-      <p:sp>
-        <p:nvSpPr>
-          <p:cNvPr id="4" name="Rectangle 3"/>
+          <p:cNvPr id="3" name="Rectangle 2"/>
           <p:cNvSpPr/>
           <p:nvPr/>
         </p:nvSpPr>
         <p:spPr>
           <a:xfrm>
-            <a:off x="640080" y="1051560"/>
-            <a:ext cx="6858000" cy="4937760"/>
+            <a:off x="0" y="0"/>
+            <a:ext cx="12191695" cy="5943600"/>
           </a:xfrm>
           <a:prstGeom prst="rect">
             <a:avLst/>
           </a:prstGeom>
           <a:solidFill>
-            <a:srgbClr val="F0F0EE"/>
+            <a:srgbClr val="EFEFED"/>
           </a:solidFill>
-          <a:ln w="9525">
-            <a:solidFill>
-              <a:srgbClr val="E5E5E3"/>
-            </a:solidFill>
+          <a:ln>
+            <a:noFill/>
           </a:ln>
           <a:effectLst/>
         </p:spPr>
@@ -9688,14 +8693,14 @@
       </p:sp>
       <p:sp>
         <p:nvSpPr>
-          <p:cNvPr id="5" name="TextBox 4"/>
+          <p:cNvPr id="4" name="TextBox 3"/>
           <p:cNvSpPr txBox="1"/>
           <p:nvPr/>
         </p:nvSpPr>
         <p:spPr>
           <a:xfrm>
-            <a:off x="640080" y="1051560"/>
-            <a:ext cx="6858000" cy="4937760"/>
+            <a:off x="0" y="0"/>
+            <a:ext cx="12191695" cy="5943600"/>
           </a:xfrm>
           <a:prstGeom prst="rect">
             <a:avLst/>
@@ -9714,7 +8719,7 @@
               </a:spcAft>
             </a:pPr>
             <a:r>
-              <a:rPr sz="1000" b="0" spc="250">
+              <a:rPr sz="1000" b="0" spc="280">
                 <a:solidFill>
                   <a:srgbClr val="A3A3A3"/>
                 </a:solidFill>
@@ -9740,86 +8745,27 @@
                 <a:ea typeface="Noto Sans KR"/>
                 <a:cs typeface="Noto Sans KR"/>
               </a:rPr>
-              <a:t>뷰티 대표 컷으로 교체</a:t>
-            </a:r>
-          </a:p>
-        </p:txBody>
-      </p:sp>
-      <p:sp>
-        <p:nvSpPr>
-          <p:cNvPr id="6" name="TextBox 5"/>
-          <p:cNvSpPr txBox="1"/>
-          <p:nvPr/>
-        </p:nvSpPr>
-        <p:spPr>
-          <a:xfrm>
-            <a:off x="7863840" y="1188720"/>
-            <a:ext cx="3687775" cy="1097280"/>
-          </a:xfrm>
-          <a:prstGeom prst="rect">
-            <a:avLst/>
-          </a:prstGeom>
-          <a:noFill/>
-        </p:spPr>
-        <p:txBody>
-          <a:bodyPr wrap="square" anchor="t" lIns="0" rIns="0" tIns="0" bIns="0">
-            <a:spAutoFit/>
-          </a:bodyPr>
-          <a:lstStyle/>
-          <a:p>
-            <a:pPr algn="l">
-              <a:lnSpc>
-                <a:spcPct val="135000"/>
-              </a:lnSpc>
-            </a:pPr>
-            <a:r>
-              <a:rPr sz="1600" b="1">
-                <a:solidFill>
-                  <a:srgbClr val="0A0A0A"/>
-                </a:solidFill>
-                <a:latin typeface="Noto Sans KR"/>
-                <a:ea typeface="Noto Sans KR"/>
-                <a:cs typeface="Noto Sans KR"/>
-              </a:rPr>
-              <a:t>[클라이언트/브랜드명]</a:t>
-            </a:r>
-          </a:p>
-          <a:p>
-            <a:pPr algn="l">
-              <a:lnSpc>
-                <a:spcPct val="135000"/>
-              </a:lnSpc>
-            </a:pPr>
-            <a:r>
-              <a:rPr sz="1300" b="0">
-                <a:solidFill>
-                  <a:srgbClr val="0A0A0A"/>
-                </a:solidFill>
-                <a:latin typeface="Noto Sans KR"/>
-                <a:ea typeface="Noto Sans KR"/>
-                <a:cs typeface="Noto Sans KR"/>
-              </a:rPr>
-              <a:t>[프로젝트명]</a:t>
-            </a:r>
-          </a:p>
-        </p:txBody>
-      </p:sp>
-      <p:sp>
-        <p:nvSpPr>
-          <p:cNvPr id="7" name="Rectangle 6"/>
+              <a:t>F&amp;B 대표 컷으로 교체 (풀블리드)</a:t>
+            </a:r>
+          </a:p>
+        </p:txBody>
+      </p:sp>
+      <p:sp>
+        <p:nvSpPr>
+          <p:cNvPr id="5" name="Rectangle 4"/>
           <p:cNvSpPr/>
           <p:nvPr/>
         </p:nvSpPr>
         <p:spPr>
           <a:xfrm>
-            <a:off x="7863840" y="2514600"/>
-            <a:ext cx="3687775" cy="11430"/>
+            <a:off x="0" y="5943600"/>
+            <a:ext cx="12191695" cy="914400"/>
           </a:xfrm>
           <a:prstGeom prst="rect">
             <a:avLst/>
           </a:prstGeom>
           <a:solidFill>
-            <a:srgbClr val="E5E5E3"/>
+            <a:srgbClr val="FAFAF8"/>
           </a:solidFill>
           <a:ln>
             <a:noFill/>
@@ -9836,14 +8782,44 @@
       </p:sp>
       <p:sp>
         <p:nvSpPr>
-          <p:cNvPr id="8" name="TextBox 7"/>
+          <p:cNvPr id="6" name="Rectangle 5"/>
+          <p:cNvSpPr/>
+          <p:nvPr/>
+        </p:nvSpPr>
+        <p:spPr>
+          <a:xfrm>
+            <a:off x="0" y="5943600"/>
+            <a:ext cx="12191695" cy="16510"/>
+          </a:xfrm>
+          <a:prstGeom prst="rect">
+            <a:avLst/>
+          </a:prstGeom>
+          <a:solidFill>
+            <a:srgbClr val="0A0A0A"/>
+          </a:solidFill>
+          <a:ln>
+            <a:noFill/>
+          </a:ln>
+          <a:effectLst/>
+        </p:spPr>
+        <p:txBody>
+          <a:bodyPr rtlCol="0" anchor="ctr"/>
+          <a:lstStyle/>
+          <a:p>
+            <a:pPr algn="ctr"/>
+          </a:p>
+        </p:txBody>
+      </p:sp>
+      <p:sp>
+        <p:nvSpPr>
+          <p:cNvPr id="7" name="TextBox 6"/>
           <p:cNvSpPr txBox="1"/>
           <p:nvPr/>
         </p:nvSpPr>
         <p:spPr>
           <a:xfrm>
-            <a:off x="7863840" y="2743200"/>
-            <a:ext cx="3687775" cy="2926080"/>
+            <a:off x="603504" y="6126480"/>
+            <a:ext cx="5120640" cy="640080"/>
           </a:xfrm>
           <a:prstGeom prst="rect">
             <a:avLst/>
@@ -9860,20 +8836,17 @@
               <a:lnSpc>
                 <a:spcPct val="150000"/>
               </a:lnSpc>
-              <a:spcAft>
-                <a:spcPts val="500"/>
-              </a:spcAft>
             </a:pPr>
             <a:r>
-              <a:rPr sz="900" b="0" spc="200">
-                <a:solidFill>
-                  <a:srgbClr val="6F6F6F"/>
-                </a:solidFill>
-                <a:latin typeface="Jost"/>
-                <a:ea typeface="Noto Sans KR"/>
-                <a:cs typeface="Noto Sans KR"/>
-              </a:rPr>
-              <a:t>SCOPE</a:t>
+              <a:rPr sz="1300" b="1">
+                <a:solidFill>
+                  <a:srgbClr val="0A0A0A"/>
+                </a:solidFill>
+                <a:latin typeface="Noto Sans KR"/>
+                <a:ea typeface="Noto Sans KR"/>
+                <a:cs typeface="Noto Sans KR"/>
+              </a:rPr>
+              <a:t>[클라이언트/브랜드명] — [프로젝트명]</a:t>
             </a:r>
           </a:p>
           <a:p>
@@ -9881,12 +8854,9 @@
               <a:lnSpc>
                 <a:spcPct val="150000"/>
               </a:lnSpc>
-              <a:spcAft>
-                <a:spcPts val="500"/>
-              </a:spcAft>
             </a:pPr>
             <a:r>
-              <a:rPr sz="1050" b="0">
+              <a:rPr sz="850" b="0" spc="80">
                 <a:solidFill>
                   <a:srgbClr val="6F6F6F"/>
                 </a:solidFill>
@@ -9894,84 +8864,21 @@
                 <a:ea typeface="Noto Sans KR"/>
                 <a:cs typeface="Noto Sans KR"/>
               </a:rPr>
-              <a:t>기획 · 촬영 · 리터칭 (해당 항목만 남기기)</a:t>
-            </a:r>
-          </a:p>
-          <a:p>
-            <a:pPr algn="l">
-              <a:lnSpc>
-                <a:spcPct val="150000"/>
-              </a:lnSpc>
-              <a:spcAft>
-                <a:spcPts val="500"/>
-              </a:spcAft>
-            </a:pPr>
-            <a:r>
-              <a:rPr sz="800" b="0">
-                <a:solidFill>
-                  <a:srgbClr val="6F6F6F"/>
-                </a:solidFill>
-                <a:latin typeface="Jost"/>
-                <a:ea typeface="Noto Sans KR"/>
-                <a:cs typeface="Noto Sans KR"/>
-              </a:rPr>
-              <a:t/>
-            </a:r>
-          </a:p>
-          <a:p>
-            <a:pPr algn="l">
-              <a:lnSpc>
-                <a:spcPct val="150000"/>
-              </a:lnSpc>
-              <a:spcAft>
-                <a:spcPts val="500"/>
-              </a:spcAft>
-            </a:pPr>
-            <a:r>
-              <a:rPr sz="900" b="0" spc="200">
-                <a:solidFill>
-                  <a:srgbClr val="6F6F6F"/>
-                </a:solidFill>
-                <a:latin typeface="Jost"/>
-                <a:ea typeface="Noto Sans KR"/>
-                <a:cs typeface="Noto Sans KR"/>
-              </a:rPr>
-              <a:t>SUMMARY</a:t>
-            </a:r>
-          </a:p>
-          <a:p>
-            <a:pPr algn="l">
-              <a:lnSpc>
-                <a:spcPct val="150000"/>
-              </a:lnSpc>
-              <a:spcAft>
-                <a:spcPts val="500"/>
-              </a:spcAft>
-            </a:pPr>
-            <a:r>
-              <a:rPr sz="1050" b="0">
-                <a:solidFill>
-                  <a:srgbClr val="6F6F6F"/>
-                </a:solidFill>
-                <a:latin typeface="Noto Sans KR"/>
-                <a:ea typeface="Noto Sans KR"/>
-                <a:cs typeface="Noto Sans KR"/>
-              </a:rPr>
-              <a:t>[한 줄 요약 — 무엇을 해결했는지. 예: 신제품 론칭 상세페이지 전체 비주얼]</a:t>
-            </a:r>
-          </a:p>
-        </p:txBody>
-      </p:sp>
-      <p:sp>
-        <p:nvSpPr>
-          <p:cNvPr id="9" name="TextBox 8"/>
+              <a:t>SCOPE — 기획 · 촬영 · 리터칭 (해당 항목만)</a:t>
+            </a:r>
+          </a:p>
+        </p:txBody>
+      </p:sp>
+      <p:sp>
+        <p:nvSpPr>
+          <p:cNvPr id="8" name="TextBox 7"/>
           <p:cNvSpPr txBox="1"/>
           <p:nvPr/>
         </p:nvSpPr>
         <p:spPr>
           <a:xfrm>
-            <a:off x="640080" y="6473952"/>
-            <a:ext cx="3657600" cy="274320"/>
+            <a:off x="6035040" y="6163056"/>
+            <a:ext cx="4206240" cy="548640"/>
           </a:xfrm>
           <a:prstGeom prst="rect">
             <a:avLst/>
@@ -9984,31 +8891,35 @@
           </a:bodyPr>
           <a:lstStyle/>
           <a:p>
-            <a:pPr algn="l"/>
-            <a:r>
-              <a:rPr sz="800" b="0" spc="150">
-                <a:solidFill>
-                  <a:srgbClr val="A3A3A3"/>
-                </a:solidFill>
-                <a:latin typeface="Jost"/>
-                <a:ea typeface="Noto Sans KR"/>
-                <a:cs typeface="Noto Sans KR"/>
-              </a:rPr>
-              <a:t>STUDIO. HOLYMOLLY</a:t>
-            </a:r>
-          </a:p>
-        </p:txBody>
-      </p:sp>
-      <p:sp>
-        <p:nvSpPr>
-          <p:cNvPr id="10" name="TextBox 9"/>
+            <a:pPr algn="l">
+              <a:lnSpc>
+                <a:spcPct val="145000"/>
+              </a:lnSpc>
+            </a:pPr>
+            <a:r>
+              <a:rPr sz="950" b="0">
+                <a:solidFill>
+                  <a:srgbClr val="6F6F6F"/>
+                </a:solidFill>
+                <a:latin typeface="Noto Sans KR"/>
+                <a:ea typeface="Noto Sans KR"/>
+                <a:cs typeface="Noto Sans KR"/>
+              </a:rPr>
+              <a:t>[한 줄 요약 — 무엇을 해결했는지]</a:t>
+            </a:r>
+          </a:p>
+        </p:txBody>
+      </p:sp>
+      <p:sp>
+        <p:nvSpPr>
+          <p:cNvPr id="9" name="TextBox 8"/>
           <p:cNvSpPr txBox="1"/>
           <p:nvPr/>
         </p:nvSpPr>
         <p:spPr>
           <a:xfrm>
-            <a:off x="10637215" y="6473952"/>
-            <a:ext cx="914400" cy="274320"/>
+            <a:off x="9942271" y="6163056"/>
+            <a:ext cx="1645920" cy="274320"/>
           </a:xfrm>
           <a:prstGeom prst="rect">
             <a:avLst/>
@@ -10023,7 +8934,7 @@
           <a:p>
             <a:pPr algn="r"/>
             <a:r>
-              <a:rPr sz="800" b="0" spc="150">
+              <a:rPr sz="850" b="0" spc="150">
                 <a:solidFill>
                   <a:srgbClr val="A3A3A3"/>
                 </a:solidFill>
@@ -10031,7 +8942,7 @@
                 <a:ea typeface="Noto Sans KR"/>
                 <a:cs typeface="Noto Sans KR"/>
               </a:rPr>
-              <a:t>08</a:t>
+              <a:t>CASE 03 — 08</a:t>
             </a:r>
           </a:p>
         </p:txBody>
@@ -10086,62 +8997,23 @@
       </p:sp>
       <p:sp>
         <p:nvSpPr>
-          <p:cNvPr id="3" name="TextBox 2"/>
-          <p:cNvSpPr txBox="1"/>
-          <p:nvPr/>
-        </p:nvSpPr>
-        <p:spPr>
-          <a:xfrm>
-            <a:off x="640080" y="502920"/>
-            <a:ext cx="7315200" cy="320040"/>
-          </a:xfrm>
-          <a:prstGeom prst="rect">
-            <a:avLst/>
-          </a:prstGeom>
-          <a:noFill/>
-        </p:spPr>
-        <p:txBody>
-          <a:bodyPr wrap="square" anchor="t" lIns="0" rIns="0" tIns="0" bIns="0">
-            <a:spAutoFit/>
-          </a:bodyPr>
-          <a:lstStyle/>
-          <a:p>
-            <a:pPr algn="l"/>
-            <a:r>
-              <a:rPr sz="1000" b="0" spc="200">
-                <a:solidFill>
-                  <a:srgbClr val="6F6F6F"/>
-                </a:solidFill>
-                <a:latin typeface="Jost"/>
-                <a:ea typeface="Noto Sans KR"/>
-                <a:cs typeface="Noto Sans KR"/>
-              </a:rPr>
-              <a:t>SELECTED WORKS — CASE 02</a:t>
-            </a:r>
-          </a:p>
-        </p:txBody>
-      </p:sp>
-      <p:sp>
-        <p:nvSpPr>
-          <p:cNvPr id="4" name="Rectangle 3"/>
+          <p:cNvPr id="3" name="Rectangle 2"/>
           <p:cNvSpPr/>
           <p:nvPr/>
         </p:nvSpPr>
         <p:spPr>
           <a:xfrm>
-            <a:off x="640080" y="1051560"/>
-            <a:ext cx="6858000" cy="4937760"/>
+            <a:off x="0" y="0"/>
+            <a:ext cx="12191695" cy="5943600"/>
           </a:xfrm>
           <a:prstGeom prst="rect">
             <a:avLst/>
           </a:prstGeom>
           <a:solidFill>
-            <a:srgbClr val="F0F0EE"/>
+            <a:srgbClr val="EFEFED"/>
           </a:solidFill>
-          <a:ln w="9525">
-            <a:solidFill>
-              <a:srgbClr val="E5E5E3"/>
-            </a:solidFill>
+          <a:ln>
+            <a:noFill/>
           </a:ln>
           <a:effectLst/>
         </p:spPr>
@@ -10155,14 +9027,14 @@
       </p:sp>
       <p:sp>
         <p:nvSpPr>
-          <p:cNvPr id="5" name="TextBox 4"/>
+          <p:cNvPr id="4" name="TextBox 3"/>
           <p:cNvSpPr txBox="1"/>
           <p:nvPr/>
         </p:nvSpPr>
         <p:spPr>
           <a:xfrm>
-            <a:off x="640080" y="1051560"/>
-            <a:ext cx="6858000" cy="4937760"/>
+            <a:off x="0" y="0"/>
+            <a:ext cx="12191695" cy="5943600"/>
           </a:xfrm>
           <a:prstGeom prst="rect">
             <a:avLst/>
@@ -10181,7 +9053,7 @@
               </a:spcAft>
             </a:pPr>
             <a:r>
-              <a:rPr sz="1000" b="0" spc="250">
+              <a:rPr sz="1000" b="0" spc="280">
                 <a:solidFill>
                   <a:srgbClr val="A3A3A3"/>
                 </a:solidFill>
@@ -10207,86 +9079,27 @@
                 <a:ea typeface="Noto Sans KR"/>
                 <a:cs typeface="Noto Sans KR"/>
               </a:rPr>
-              <a:t>제품/커머스 대표 컷으로 교체</a:t>
-            </a:r>
-          </a:p>
-        </p:txBody>
-      </p:sp>
-      <p:sp>
-        <p:nvSpPr>
-          <p:cNvPr id="6" name="TextBox 5"/>
-          <p:cNvSpPr txBox="1"/>
-          <p:nvPr/>
-        </p:nvSpPr>
-        <p:spPr>
-          <a:xfrm>
-            <a:off x="7863840" y="1188720"/>
-            <a:ext cx="3687775" cy="1097280"/>
-          </a:xfrm>
-          <a:prstGeom prst="rect">
-            <a:avLst/>
-          </a:prstGeom>
-          <a:noFill/>
-        </p:spPr>
-        <p:txBody>
-          <a:bodyPr wrap="square" anchor="t" lIns="0" rIns="0" tIns="0" bIns="0">
-            <a:spAutoFit/>
-          </a:bodyPr>
-          <a:lstStyle/>
-          <a:p>
-            <a:pPr algn="l">
-              <a:lnSpc>
-                <a:spcPct val="135000"/>
-              </a:lnSpc>
-            </a:pPr>
-            <a:r>
-              <a:rPr sz="1600" b="1">
-                <a:solidFill>
-                  <a:srgbClr val="0A0A0A"/>
-                </a:solidFill>
-                <a:latin typeface="Noto Sans KR"/>
-                <a:ea typeface="Noto Sans KR"/>
-                <a:cs typeface="Noto Sans KR"/>
-              </a:rPr>
-              <a:t>[클라이언트/브랜드명]</a:t>
-            </a:r>
-          </a:p>
-          <a:p>
-            <a:pPr algn="l">
-              <a:lnSpc>
-                <a:spcPct val="135000"/>
-              </a:lnSpc>
-            </a:pPr>
-            <a:r>
-              <a:rPr sz="1300" b="0">
-                <a:solidFill>
-                  <a:srgbClr val="0A0A0A"/>
-                </a:solidFill>
-                <a:latin typeface="Noto Sans KR"/>
-                <a:ea typeface="Noto Sans KR"/>
-                <a:cs typeface="Noto Sans KR"/>
-              </a:rPr>
-              <a:t>[프로젝트명]</a:t>
-            </a:r>
-          </a:p>
-        </p:txBody>
-      </p:sp>
-      <p:sp>
-        <p:nvSpPr>
-          <p:cNvPr id="7" name="Rectangle 6"/>
+              <a:t>라이프스타일 · 인물 대표 컷으로 교체 (풀블리드)</a:t>
+            </a:r>
+          </a:p>
+        </p:txBody>
+      </p:sp>
+      <p:sp>
+        <p:nvSpPr>
+          <p:cNvPr id="5" name="Rectangle 4"/>
           <p:cNvSpPr/>
           <p:nvPr/>
         </p:nvSpPr>
         <p:spPr>
           <a:xfrm>
-            <a:off x="7863840" y="2514600"/>
-            <a:ext cx="3687775" cy="11430"/>
+            <a:off x="0" y="5943600"/>
+            <a:ext cx="12191695" cy="914400"/>
           </a:xfrm>
           <a:prstGeom prst="rect">
             <a:avLst/>
           </a:prstGeom>
           <a:solidFill>
-            <a:srgbClr val="E5E5E3"/>
+            <a:srgbClr val="FAFAF8"/>
           </a:solidFill>
           <a:ln>
             <a:noFill/>
@@ -10303,14 +9116,44 @@
       </p:sp>
       <p:sp>
         <p:nvSpPr>
-          <p:cNvPr id="8" name="TextBox 7"/>
+          <p:cNvPr id="6" name="Rectangle 5"/>
+          <p:cNvSpPr/>
+          <p:nvPr/>
+        </p:nvSpPr>
+        <p:spPr>
+          <a:xfrm>
+            <a:off x="0" y="5943600"/>
+            <a:ext cx="12191695" cy="16510"/>
+          </a:xfrm>
+          <a:prstGeom prst="rect">
+            <a:avLst/>
+          </a:prstGeom>
+          <a:solidFill>
+            <a:srgbClr val="0A0A0A"/>
+          </a:solidFill>
+          <a:ln>
+            <a:noFill/>
+          </a:ln>
+          <a:effectLst/>
+        </p:spPr>
+        <p:txBody>
+          <a:bodyPr rtlCol="0" anchor="ctr"/>
+          <a:lstStyle/>
+          <a:p>
+            <a:pPr algn="ctr"/>
+          </a:p>
+        </p:txBody>
+      </p:sp>
+      <p:sp>
+        <p:nvSpPr>
+          <p:cNvPr id="7" name="TextBox 6"/>
           <p:cNvSpPr txBox="1"/>
           <p:nvPr/>
         </p:nvSpPr>
         <p:spPr>
           <a:xfrm>
-            <a:off x="7863840" y="2743200"/>
-            <a:ext cx="3687775" cy="2926080"/>
+            <a:off x="603504" y="6126480"/>
+            <a:ext cx="5120640" cy="640080"/>
           </a:xfrm>
           <a:prstGeom prst="rect">
             <a:avLst/>
@@ -10327,20 +9170,17 @@
               <a:lnSpc>
                 <a:spcPct val="150000"/>
               </a:lnSpc>
-              <a:spcAft>
-                <a:spcPts val="500"/>
-              </a:spcAft>
             </a:pPr>
             <a:r>
-              <a:rPr sz="900" b="0" spc="200">
-                <a:solidFill>
-                  <a:srgbClr val="6F6F6F"/>
-                </a:solidFill>
-                <a:latin typeface="Jost"/>
-                <a:ea typeface="Noto Sans KR"/>
-                <a:cs typeface="Noto Sans KR"/>
-              </a:rPr>
-              <a:t>SCOPE</a:t>
+              <a:rPr sz="1300" b="1">
+                <a:solidFill>
+                  <a:srgbClr val="0A0A0A"/>
+                </a:solidFill>
+                <a:latin typeface="Noto Sans KR"/>
+                <a:ea typeface="Noto Sans KR"/>
+                <a:cs typeface="Noto Sans KR"/>
+              </a:rPr>
+              <a:t>[클라이언트/브랜드명] — [프로젝트명]</a:t>
             </a:r>
           </a:p>
           <a:p>
@@ -10348,12 +9188,9 @@
               <a:lnSpc>
                 <a:spcPct val="150000"/>
               </a:lnSpc>
-              <a:spcAft>
-                <a:spcPts val="500"/>
-              </a:spcAft>
             </a:pPr>
             <a:r>
-              <a:rPr sz="1050" b="0">
+              <a:rPr sz="850" b="0" spc="80">
                 <a:solidFill>
                   <a:srgbClr val="6F6F6F"/>
                 </a:solidFill>
@@ -10361,84 +9198,21 @@
                 <a:ea typeface="Noto Sans KR"/>
                 <a:cs typeface="Noto Sans KR"/>
               </a:rPr>
-              <a:t>기획 · 촬영 · 리터칭 (해당 항목만 남기기)</a:t>
-            </a:r>
-          </a:p>
-          <a:p>
-            <a:pPr algn="l">
-              <a:lnSpc>
-                <a:spcPct val="150000"/>
-              </a:lnSpc>
-              <a:spcAft>
-                <a:spcPts val="500"/>
-              </a:spcAft>
-            </a:pPr>
-            <a:r>
-              <a:rPr sz="800" b="0">
-                <a:solidFill>
-                  <a:srgbClr val="6F6F6F"/>
-                </a:solidFill>
-                <a:latin typeface="Jost"/>
-                <a:ea typeface="Noto Sans KR"/>
-                <a:cs typeface="Noto Sans KR"/>
-              </a:rPr>
-              <a:t/>
-            </a:r>
-          </a:p>
-          <a:p>
-            <a:pPr algn="l">
-              <a:lnSpc>
-                <a:spcPct val="150000"/>
-              </a:lnSpc>
-              <a:spcAft>
-                <a:spcPts val="500"/>
-              </a:spcAft>
-            </a:pPr>
-            <a:r>
-              <a:rPr sz="900" b="0" spc="200">
-                <a:solidFill>
-                  <a:srgbClr val="6F6F6F"/>
-                </a:solidFill>
-                <a:latin typeface="Jost"/>
-                <a:ea typeface="Noto Sans KR"/>
-                <a:cs typeface="Noto Sans KR"/>
-              </a:rPr>
-              <a:t>SUMMARY</a:t>
-            </a:r>
-          </a:p>
-          <a:p>
-            <a:pPr algn="l">
-              <a:lnSpc>
-                <a:spcPct val="150000"/>
-              </a:lnSpc>
-              <a:spcAft>
-                <a:spcPts val="500"/>
-              </a:spcAft>
-            </a:pPr>
-            <a:r>
-              <a:rPr sz="1050" b="0">
-                <a:solidFill>
-                  <a:srgbClr val="6F6F6F"/>
-                </a:solidFill>
-                <a:latin typeface="Noto Sans KR"/>
-                <a:ea typeface="Noto Sans KR"/>
-                <a:cs typeface="Noto Sans KR"/>
-              </a:rPr>
-              <a:t>[한 줄 요약 — 무엇을 해결했는지. 예: 신제품 론칭 상세페이지 전체 비주얼]</a:t>
-            </a:r>
-          </a:p>
-        </p:txBody>
-      </p:sp>
-      <p:sp>
-        <p:nvSpPr>
-          <p:cNvPr id="9" name="TextBox 8"/>
+              <a:t>SCOPE — 기획 · 촬영 · 리터칭 (해당 항목만)</a:t>
+            </a:r>
+          </a:p>
+        </p:txBody>
+      </p:sp>
+      <p:sp>
+        <p:nvSpPr>
+          <p:cNvPr id="8" name="TextBox 7"/>
           <p:cNvSpPr txBox="1"/>
           <p:nvPr/>
         </p:nvSpPr>
         <p:spPr>
           <a:xfrm>
-            <a:off x="640080" y="6473952"/>
-            <a:ext cx="3657600" cy="274320"/>
+            <a:off x="6035040" y="6163056"/>
+            <a:ext cx="4206240" cy="548640"/>
           </a:xfrm>
           <a:prstGeom prst="rect">
             <a:avLst/>
@@ -10451,31 +9225,35 @@
           </a:bodyPr>
           <a:lstStyle/>
           <a:p>
-            <a:pPr algn="l"/>
-            <a:r>
-              <a:rPr sz="800" b="0" spc="150">
-                <a:solidFill>
-                  <a:srgbClr val="A3A3A3"/>
-                </a:solidFill>
-                <a:latin typeface="Jost"/>
-                <a:ea typeface="Noto Sans KR"/>
-                <a:cs typeface="Noto Sans KR"/>
-              </a:rPr>
-              <a:t>STUDIO. HOLYMOLLY</a:t>
-            </a:r>
-          </a:p>
-        </p:txBody>
-      </p:sp>
-      <p:sp>
-        <p:nvSpPr>
-          <p:cNvPr id="10" name="TextBox 9"/>
+            <a:pPr algn="l">
+              <a:lnSpc>
+                <a:spcPct val="145000"/>
+              </a:lnSpc>
+            </a:pPr>
+            <a:r>
+              <a:rPr sz="950" b="0">
+                <a:solidFill>
+                  <a:srgbClr val="6F6F6F"/>
+                </a:solidFill>
+                <a:latin typeface="Noto Sans KR"/>
+                <a:ea typeface="Noto Sans KR"/>
+                <a:cs typeface="Noto Sans KR"/>
+              </a:rPr>
+              <a:t>[한 줄 요약 — 무엇을 해결했는지]</a:t>
+            </a:r>
+          </a:p>
+        </p:txBody>
+      </p:sp>
+      <p:sp>
+        <p:nvSpPr>
+          <p:cNvPr id="9" name="TextBox 8"/>
           <p:cNvSpPr txBox="1"/>
           <p:nvPr/>
         </p:nvSpPr>
         <p:spPr>
           <a:xfrm>
-            <a:off x="10637215" y="6473952"/>
-            <a:ext cx="914400" cy="274320"/>
+            <a:off x="9942271" y="6163056"/>
+            <a:ext cx="1645920" cy="274320"/>
           </a:xfrm>
           <a:prstGeom prst="rect">
             <a:avLst/>
@@ -10490,7 +9268,7 @@
           <a:p>
             <a:pPr algn="r"/>
             <a:r>
-              <a:rPr sz="800" b="0" spc="150">
+              <a:rPr sz="850" b="0" spc="150">
                 <a:solidFill>
                   <a:srgbClr val="A3A3A3"/>
                 </a:solidFill>
@@ -10498,7 +9276,7 @@
                 <a:ea typeface="Noto Sans KR"/>
                 <a:cs typeface="Noto Sans KR"/>
               </a:rPr>
-              <a:t>09</a:t>
+              <a:t>CASE 04 — 09</a:t>
             </a:r>
           </a:p>
         </p:txBody>
